--- a/docs/Qanopy_pitch.pptx
+++ b/docs/Qanopy_pitch.pptx
@@ -508,7 +508,7 @@
           <a:lstStyle/>
           <a:p>
             <a:r>
-              <a:t>Every carbon credit is a claim about a forest that was never cut down. A claim about something that did not happen. So who checks it?</a:t>
+              <a:t>Carbon credits pay for forest that was not cut down. Who checks that, week by week? Today, credits are checked in periodic audits. We built a system that checks them every week.</a:t>
             </a:r>
           </a:p>
         </p:txBody>
@@ -578,7 +578,7 @@
           <a:lstStyle/>
           <a:p>
             <a:r>
-              <a:t>A credit pays for forest saved compared with what would have happened anyway. That baseline comes from project paperwork, and it is checked in periodic audits. A buyer or a bank cannot tell a good credit from a bad one.</a:t>
+              <a:t>A carbon credit pays for forest that stays standing. The baseline, the loss that would have happened without the project, is estimated in project documents. Auditors check it periodically. Buyers and banks have no continuous evidence.</a:t>
             </a:r>
           </a:p>
         </p:txBody>
@@ -648,7 +648,7 @@
           <a:lstStyle/>
           <a:p>
             <a:r>
-              <a:t>Qanopy gives any carbon project a public weekly verdict. Upload the project boundary. We find fifty forest parcels that look like it, and watch both with satellite radar every week. The gap is the forest the project really saved. We turn it into tons of CO2, compare it with the claim, and publish a five-level status as an NFT anyone can check. It already runs on four projects.</a:t>
+              <a:t>Qanopy takes a project boundary and selects 50 similar forest parcels. It reads satellite radar alerts for the project and the parcels every week. The difference is the avoided forest loss. Qanopy converts it to tons of CO2 and compares it with the project's claim. The result is published as a five-level NFT status. Four projects run today.</a:t>
             </a:r>
           </a:p>
         </p:txBody>
@@ -718,7 +718,7 @@
           <a:lstStyle/>
           <a:p>
             <a:r>
-              <a:t>This is the live dashboard for ALGAR in Brazil. The project lost half a percent of its forest, the matched parcels four and a half. That is about six thousand hectares kept standing, thirty-one percent of its claim to date, so the status is Worst. We treat that as a signal to investigate, not a verdict.</a:t>
+              <a:t>This is the dashboard for ALGAR in Brazil. The project lost 0.58% of its forest. The comparison parcels lost 4.61%. That is 5,741 hectares avoided, or 31% of the amount claimed so far. The status is Worst. We read this as a flag to investigate.</a:t>
             </a:r>
           </a:p>
         </p:txBody>
@@ -788,7 +788,7 @@
           <a:lstStyle/>
           <a:p>
             <a:r>
-              <a:t>Quantum is in the solution, in practice and in theory. In practice: we ran parcel selection on IBM's 156-qubit Fez. On a small, favourable problem it found the best set about seventy percent of the time, against under two percent at random. In theory: amplitude estimation, simulated, is nearly ten times tighter than classical sampling at the same budget. The catch, which we show openly: classical wins at every size we can run today, and the advantage needs gates three thousand times better. It pays off at market scale, thousands of projects, refreshed weekly. The pipeline is quantum-ready for that day.</a:t>
+              <a:t>Quantum amplitude estimation, or QAE, estimates an average with fewer samples than classical Monte Carlo. We ran it on IBM's ibm_fez. A one-qubit test had lower error than Monte Carlo at five of eight budgets, up to 16 times lower. At 262,000 calls, hardware noise removed the advantage. The full 50-parcel circuit lost its signal after one Grover step. Today's hardware shows the advantage at small scale only.</a:t>
             </a:r>
           </a:p>
         </p:txBody>
@@ -858,7 +858,7 @@
           <a:lstStyle/>
           <a:p>
             <a:r>
-              <a:t>Who pays? Anyone who has to trust a credit: buyers, registries, insurers and banks, as a subscription per monitored project. Today it is a working prototype on four projects. Next: real carbon data, validation against audited projects, and quantum as hardware allows.</a:t>
+              <a:t>Quantum helps when the scale grows. We also ran parcel selection on ibm_fez. It found the best set in 71% of valid runs on a small problem. For plus or minus 1%, QAE needs about 2,000 runs where Monte Carlo needs 98,000. That matters when every run is a costly simulation, over thousands of projects, every week. It needs gates about 3,000 times better than today's. Until then, classical methods win at every size we can run.</a:t>
             </a:r>
           </a:p>
         </p:txBody>
@@ -928,7 +928,7 @@
           <a:lstStyle/>
           <a:p>
             <a:r>
-              <a:t>We started with the parcel-matching engine. At the event we added quantum selection on IBM hardware, weekly radar monitoring, the CO2 estimate, the NFT status and an upload-a-project dashboard. Trust in carbon credits, checked every week. Thank you.</a:t>
+              <a:t>Buyers, registries, insurers and banks need to rely on credits. They would pay a subscription per monitored project. Today a working prototype covers four projects, with NFTs on a test network. The parcel-matching engine existed first. At this event we added the quantum runs, the monitoring, the NFT status and the dashboard. Next, we replace assumed carbon densities with project data.</a:t>
             </a:r>
           </a:p>
         </p:txBody>
@@ -3986,8 +3986,8 @@
         </p:nvSpPr>
         <p:spPr>
           <a:xfrm>
-            <a:off x="822960" y="1371600"/>
-            <a:ext cx="10515600" cy="2926080"/>
+            <a:off x="822960" y="1554480"/>
+            <a:ext cx="10515600" cy="2560320"/>
           </a:xfrm>
           <a:prstGeom prst="rect">
             <a:avLst/>
@@ -4006,13 +4006,13 @@
               </a:lnSpc>
             </a:pPr>
             <a:r>
-              <a:rPr sz="5400" b="1">
+              <a:rPr sz="5800" b="1">
                 <a:solidFill>
                   <a:srgbClr val="FFFFFF"/>
                 </a:solidFill>
                 <a:latin typeface="Calibri"/>
               </a:rPr>
-              <a:t>Every carbon credit is a claim about a forest that didn't get cut down.</a:t>
+              <a:t>Who checks that a carbon credit saved a forest?</a:t>
             </a:r>
           </a:p>
         </p:txBody>
@@ -4045,13 +4045,13 @@
               </a:lnSpc>
             </a:pPr>
             <a:r>
-              <a:rPr sz="4400" b="1">
+              <a:rPr sz="4000" b="1">
                 <a:solidFill>
                   <a:srgbClr val="4ADE9B"/>
                 </a:solidFill>
                 <a:latin typeface="Calibri"/>
               </a:rPr>
-              <a:t>Who checks?</a:t>
+              <a:t>Qanopy checks it every week.</a:t>
             </a:r>
           </a:p>
         </p:txBody>
@@ -4090,7 +4090,7 @@
                 </a:solidFill>
                 <a:latin typeface="Calibri"/>
               </a:rPr>
-              <a:t>Qanopy · Quantum x Finance Hackathon</a:t>
+              <a:t>Quantum x Finance Hackathon</a:t>
             </a:r>
           </a:p>
         </p:txBody>
@@ -4147,7 +4147,7 @@
                 </a:solidFill>
                 <a:latin typeface="Calibri"/>
               </a:rPr>
-              <a:t>Credits are sold on a baseline nobody can watch</a:t>
+              <a:t>Credit buyers cannot check a credit between audits</a:t>
             </a:r>
           </a:p>
         </p:txBody>
@@ -4204,8 +4204,8 @@
         </p:nvSpPr>
         <p:spPr>
           <a:xfrm>
-            <a:off x="685800" y="2148840"/>
-            <a:ext cx="10835640" cy="868680"/>
+            <a:off x="685800" y="2286000"/>
+            <a:ext cx="10835640" cy="1097280"/>
           </a:xfrm>
           <a:prstGeom prst="rect">
             <a:avLst/>
@@ -4248,8 +4248,8 @@
         </p:nvSpPr>
         <p:spPr>
           <a:xfrm>
-            <a:off x="868680" y="2148840"/>
-            <a:ext cx="2926080" cy="868680"/>
+            <a:off x="868680" y="2286000"/>
+            <a:ext cx="2377440" cy="1097280"/>
           </a:xfrm>
           <a:prstGeom prst="rect">
             <a:avLst/>
@@ -4268,7 +4268,7 @@
               </a:lnSpc>
             </a:pPr>
             <a:r>
-              <a:rPr sz="2600" b="1">
+              <a:rPr sz="2400" b="1">
                 <a:solidFill>
                   <a:srgbClr val="0C3D2B"/>
                 </a:solidFill>
@@ -4287,8 +4287,8 @@
         </p:nvSpPr>
         <p:spPr>
           <a:xfrm>
-            <a:off x="3840480" y="2148840"/>
-            <a:ext cx="7589520" cy="868680"/>
+            <a:off x="3246120" y="2286000"/>
+            <a:ext cx="8092440" cy="1097280"/>
           </a:xfrm>
           <a:prstGeom prst="rect">
             <a:avLst/>
@@ -4303,17 +4303,17 @@
           <a:p>
             <a:pPr algn="l">
               <a:lnSpc>
-                <a:spcPct val="105000"/>
+                <a:spcPct val="100000"/>
               </a:lnSpc>
             </a:pPr>
             <a:r>
-              <a:rPr sz="2400" b="0">
+              <a:rPr sz="2200" b="0">
                 <a:solidFill>
                   <a:srgbClr val="0F2419"/>
                 </a:solidFill>
                 <a:latin typeface="Calibri"/>
               </a:rPr>
-              <a:t>Forest saved compared with what would have happened anyway</a:t>
+              <a:t>Pays for forest that stays standing.</a:t>
             </a:r>
           </a:p>
         </p:txBody>
@@ -4326,8 +4326,8 @@
         </p:nvSpPr>
         <p:spPr>
           <a:xfrm>
-            <a:off x="685800" y="3172968"/>
-            <a:ext cx="10835640" cy="868680"/>
+            <a:off x="685800" y="3584448"/>
+            <a:ext cx="10835640" cy="1097280"/>
           </a:xfrm>
           <a:prstGeom prst="rect">
             <a:avLst/>
@@ -4370,8 +4370,8 @@
         </p:nvSpPr>
         <p:spPr>
           <a:xfrm>
-            <a:off x="868680" y="3172968"/>
-            <a:ext cx="2926080" cy="868680"/>
+            <a:off x="868680" y="3584448"/>
+            <a:ext cx="2377440" cy="1097280"/>
           </a:xfrm>
           <a:prstGeom prst="rect">
             <a:avLst/>
@@ -4390,7 +4390,7 @@
               </a:lnSpc>
             </a:pPr>
             <a:r>
-              <a:rPr sz="2600" b="1">
+              <a:rPr sz="2400" b="1">
                 <a:solidFill>
                   <a:srgbClr val="0C3D2B"/>
                 </a:solidFill>
@@ -4409,8 +4409,8 @@
         </p:nvSpPr>
         <p:spPr>
           <a:xfrm>
-            <a:off x="3840480" y="3172968"/>
-            <a:ext cx="7589520" cy="868680"/>
+            <a:off x="3246120" y="3584448"/>
+            <a:ext cx="8092440" cy="1097280"/>
           </a:xfrm>
           <a:prstGeom prst="rect">
             <a:avLst/>
@@ -4425,17 +4425,17 @@
           <a:p>
             <a:pPr algn="l">
               <a:lnSpc>
-                <a:spcPct val="105000"/>
+                <a:spcPct val="100000"/>
               </a:lnSpc>
             </a:pPr>
             <a:r>
-              <a:rPr sz="2400" b="0">
+              <a:rPr sz="2200" b="0">
                 <a:solidFill>
                   <a:srgbClr val="0F2419"/>
                 </a:solidFill>
                 <a:latin typeface="Calibri"/>
               </a:rPr>
-              <a:t>Comes from project paperwork, not from the forest next door</a:t>
+              <a:t>Estimated in project documents.</a:t>
             </a:r>
           </a:p>
         </p:txBody>
@@ -4448,8 +4448,8 @@
         </p:nvSpPr>
         <p:spPr>
           <a:xfrm>
-            <a:off x="685800" y="4197096"/>
-            <a:ext cx="10835640" cy="868680"/>
+            <a:off x="685800" y="4882896"/>
+            <a:ext cx="10835640" cy="1097280"/>
           </a:xfrm>
           <a:prstGeom prst="rect">
             <a:avLst/>
@@ -4492,8 +4492,8 @@
         </p:nvSpPr>
         <p:spPr>
           <a:xfrm>
-            <a:off x="868680" y="4197096"/>
-            <a:ext cx="2926080" cy="868680"/>
+            <a:off x="868680" y="4882896"/>
+            <a:ext cx="2377440" cy="1097280"/>
           </a:xfrm>
           <a:prstGeom prst="rect">
             <a:avLst/>
@@ -4512,13 +4512,13 @@
               </a:lnSpc>
             </a:pPr>
             <a:r>
-              <a:rPr sz="2600" b="1">
+              <a:rPr sz="2400" b="1">
                 <a:solidFill>
                   <a:srgbClr val="0C3D2B"/>
                 </a:solidFill>
                 <a:latin typeface="Calibri"/>
               </a:rPr>
-              <a:t>The checking</a:t>
+              <a:t>The check</a:t>
             </a:r>
           </a:p>
         </p:txBody>
@@ -4531,8 +4531,8 @@
         </p:nvSpPr>
         <p:spPr>
           <a:xfrm>
-            <a:off x="3840480" y="4197096"/>
-            <a:ext cx="7589520" cy="868680"/>
+            <a:off x="3246120" y="4882896"/>
+            <a:ext cx="8092440" cy="1097280"/>
           </a:xfrm>
           <a:prstGeom prst="rect">
             <a:avLst/>
@@ -4541,6 +4541,45 @@
         </p:spPr>
         <p:txBody>
           <a:bodyPr wrap="square" anchor="ctr" lIns="45720" rIns="45720" tIns="27432" bIns="27432">
+            <a:spAutoFit/>
+          </a:bodyPr>
+          <a:lstStyle/>
+          <a:p>
+            <a:pPr algn="l">
+              <a:lnSpc>
+                <a:spcPct val="100000"/>
+              </a:lnSpc>
+            </a:pPr>
+            <a:r>
+              <a:rPr sz="2200" b="0">
+                <a:solidFill>
+                  <a:srgbClr val="0F2419"/>
+                </a:solidFill>
+                <a:latin typeface="Calibri"/>
+              </a:rPr>
+              <a:t>A periodic audit, not continuous evidence.</a:t>
+            </a:r>
+          </a:p>
+        </p:txBody>
+      </p:sp>
+      <p:sp>
+        <p:nvSpPr>
+          <p:cNvPr id="13" name="TextBox 12"/>
+          <p:cNvSpPr txBox="1"/>
+          <p:nvPr/>
+        </p:nvSpPr>
+        <p:spPr>
+          <a:xfrm>
+            <a:off x="640080" y="6400800"/>
+            <a:ext cx="5486400" cy="274320"/>
+          </a:xfrm>
+          <a:prstGeom prst="rect">
+            <a:avLst/>
+          </a:prstGeom>
+          <a:noFill/>
+        </p:spPr>
+        <p:txBody>
+          <a:bodyPr wrap="square" anchor="t" lIns="45720" rIns="45720" tIns="27432" bIns="27432">
             <a:spAutoFit/>
           </a:bodyPr>
           <a:lstStyle/>
@@ -4551,167 +4590,6 @@
               </a:lnSpc>
             </a:pPr>
             <a:r>
-              <a:rPr sz="2400" b="0">
-                <a:solidFill>
-                  <a:srgbClr val="0F2419"/>
-                </a:solidFill>
-                <a:latin typeface="Calibri"/>
-              </a:rPr>
-              <a:t>Periodic audits, not weekly evidence</a:t>
-            </a:r>
-          </a:p>
-        </p:txBody>
-      </p:sp>
-      <p:sp>
-        <p:nvSpPr>
-          <p:cNvPr id="13" name="Rectangle 12"/>
-          <p:cNvSpPr/>
-          <p:nvPr/>
-        </p:nvSpPr>
-        <p:spPr>
-          <a:xfrm>
-            <a:off x="685800" y="5221224"/>
-            <a:ext cx="10835640" cy="868680"/>
-          </a:xfrm>
-          <a:prstGeom prst="rect">
-            <a:avLst/>
-          </a:prstGeom>
-          <a:solidFill>
-            <a:srgbClr val="E6F4EC"/>
-          </a:solidFill>
-          <a:ln>
-            <a:noFill/>
-          </a:ln>
-          <a:effectLst/>
-        </p:spPr>
-        <p:style>
-          <a:lnRef idx="1">
-            <a:schemeClr val="accent1"/>
-          </a:lnRef>
-          <a:fillRef idx="3">
-            <a:schemeClr val="accent1"/>
-          </a:fillRef>
-          <a:effectRef idx="2">
-            <a:schemeClr val="accent1"/>
-          </a:effectRef>
-          <a:fontRef idx="minor">
-            <a:schemeClr val="lt1"/>
-          </a:fontRef>
-        </p:style>
-        <p:txBody>
-          <a:bodyPr rtlCol="0" anchor="ctr"/>
-          <a:lstStyle/>
-          <a:p>
-            <a:pPr algn="ctr"/>
-          </a:p>
-        </p:txBody>
-      </p:sp>
-      <p:sp>
-        <p:nvSpPr>
-          <p:cNvPr id="14" name="TextBox 13"/>
-          <p:cNvSpPr txBox="1"/>
-          <p:nvPr/>
-        </p:nvSpPr>
-        <p:spPr>
-          <a:xfrm>
-            <a:off x="868680" y="5221224"/>
-            <a:ext cx="2926080" cy="868680"/>
-          </a:xfrm>
-          <a:prstGeom prst="rect">
-            <a:avLst/>
-          </a:prstGeom>
-          <a:noFill/>
-        </p:spPr>
-        <p:txBody>
-          <a:bodyPr wrap="square" anchor="ctr" lIns="45720" rIns="45720" tIns="27432" bIns="27432">
-            <a:spAutoFit/>
-          </a:bodyPr>
-          <a:lstStyle/>
-          <a:p>
-            <a:pPr algn="l">
-              <a:lnSpc>
-                <a:spcPct val="105000"/>
-              </a:lnSpc>
-            </a:pPr>
-            <a:r>
-              <a:rPr sz="2600" b="1">
-                <a:solidFill>
-                  <a:srgbClr val="0C3D2B"/>
-                </a:solidFill>
-                <a:latin typeface="Calibri"/>
-              </a:rPr>
-              <a:t>The buyer</a:t>
-            </a:r>
-          </a:p>
-        </p:txBody>
-      </p:sp>
-      <p:sp>
-        <p:nvSpPr>
-          <p:cNvPr id="15" name="TextBox 14"/>
-          <p:cNvSpPr txBox="1"/>
-          <p:nvPr/>
-        </p:nvSpPr>
-        <p:spPr>
-          <a:xfrm>
-            <a:off x="3840480" y="5221224"/>
-            <a:ext cx="7589520" cy="868680"/>
-          </a:xfrm>
-          <a:prstGeom prst="rect">
-            <a:avLst/>
-          </a:prstGeom>
-          <a:noFill/>
-        </p:spPr>
-        <p:txBody>
-          <a:bodyPr wrap="square" anchor="ctr" lIns="45720" rIns="45720" tIns="27432" bIns="27432">
-            <a:spAutoFit/>
-          </a:bodyPr>
-          <a:lstStyle/>
-          <a:p>
-            <a:pPr algn="l">
-              <a:lnSpc>
-                <a:spcPct val="105000"/>
-              </a:lnSpc>
-            </a:pPr>
-            <a:r>
-              <a:rPr sz="2400" b="0">
-                <a:solidFill>
-                  <a:srgbClr val="0F2419"/>
-                </a:solidFill>
-                <a:latin typeface="Calibri"/>
-              </a:rPr>
-              <a:t>Cannot tell a good credit from a bad one</a:t>
-            </a:r>
-          </a:p>
-        </p:txBody>
-      </p:sp>
-      <p:sp>
-        <p:nvSpPr>
-          <p:cNvPr id="16" name="TextBox 15"/>
-          <p:cNvSpPr txBox="1"/>
-          <p:nvPr/>
-        </p:nvSpPr>
-        <p:spPr>
-          <a:xfrm>
-            <a:off x="640080" y="6400800"/>
-            <a:ext cx="5486400" cy="274320"/>
-          </a:xfrm>
-          <a:prstGeom prst="rect">
-            <a:avLst/>
-          </a:prstGeom>
-          <a:noFill/>
-        </p:spPr>
-        <p:txBody>
-          <a:bodyPr wrap="square" anchor="t" lIns="45720" rIns="45720" tIns="27432" bIns="27432">
-            <a:spAutoFit/>
-          </a:bodyPr>
-          <a:lstStyle/>
-          <a:p>
-            <a:pPr algn="l">
-              <a:lnSpc>
-                <a:spcPct val="105000"/>
-              </a:lnSpc>
-            </a:pPr>
-            <a:r>
               <a:rPr sz="1200" b="0">
                 <a:solidFill>
                   <a:srgbClr val="587063"/>
@@ -4725,7 +4603,7 @@
       </p:sp>
       <p:sp>
         <p:nvSpPr>
-          <p:cNvPr id="17" name="TextBox 16"/>
+          <p:cNvPr id="14" name="TextBox 13"/>
           <p:cNvSpPr txBox="1"/>
           <p:nvPr/>
         </p:nvSpPr>
@@ -4814,7 +4692,7 @@
                 </a:solidFill>
                 <a:latin typeface="Calibri"/>
               </a:rPr>
-              <a:t>A public, weekly verdict on any carbon project</a:t>
+              <a:t>Qanopy compares each project with similar forest</a:t>
             </a:r>
           </a:p>
         </p:txBody>
@@ -4955,7 +4833,7 @@
         <p:spPr>
           <a:xfrm>
             <a:off x="822960" y="3017520"/>
-            <a:ext cx="1600200" cy="1005840"/>
+            <a:ext cx="1508760" cy="1005840"/>
           </a:xfrm>
           <a:prstGeom prst="rect">
             <a:avLst/>
@@ -4980,7 +4858,7 @@
                 </a:solidFill>
                 <a:latin typeface="Calibri"/>
               </a:rPr>
-              <a:t>the project
+              <a:t>project
 boundary</a:t>
             </a:r>
           </a:p>
@@ -5078,7 +4956,7 @@
         <p:spPr>
           <a:xfrm>
             <a:off x="3017520" y="3017520"/>
-            <a:ext cx="1600200" cy="1005840"/>
+            <a:ext cx="1508760" cy="1005840"/>
           </a:xfrm>
           <a:prstGeom prst="rect">
             <a:avLst/>
@@ -5103,8 +4981,8 @@
                 </a:solidFill>
                 <a:latin typeface="Calibri"/>
               </a:rPr>
-              <a:t>50 similar forest
-parcels</a:t>
+              <a:t>50 similar
+forest parcels</a:t>
             </a:r>
           </a:p>
         </p:txBody>
@@ -5201,7 +5079,7 @@
         <p:spPr>
           <a:xfrm>
             <a:off x="5212080" y="3017520"/>
-            <a:ext cx="1600200" cy="1005840"/>
+            <a:ext cx="1508760" cy="1005840"/>
           </a:xfrm>
           <a:prstGeom prst="rect">
             <a:avLst/>
@@ -5324,7 +5202,7 @@
         <p:spPr>
           <a:xfrm>
             <a:off x="7406640" y="3017520"/>
-            <a:ext cx="1600200" cy="1005840"/>
+            <a:ext cx="1508760" cy="1005840"/>
           </a:xfrm>
           <a:prstGeom prst="rect">
             <a:avLst/>
@@ -5349,8 +5227,8 @@
                 </a:solidFill>
                 <a:latin typeface="Calibri"/>
               </a:rPr>
-              <a:t>avoided loss in
-tons of CO2e</a:t>
+              <a:t>avoided loss
+in tons of CO2e</a:t>
             </a:r>
           </a:p>
         </p:txBody>
@@ -5447,7 +5325,7 @@
         <p:spPr>
           <a:xfrm>
             <a:off x="9601200" y="3017520"/>
-            <a:ext cx="1600200" cy="1005840"/>
+            <a:ext cx="1508760" cy="1005840"/>
           </a:xfrm>
           <a:prstGeom prst="rect">
             <a:avLst/>
@@ -5472,82 +5350,53 @@
                 </a:solidFill>
                 <a:latin typeface="Calibri"/>
               </a:rPr>
-              <a:t>five-level status
-as an NFT</a:t>
-            </a:r>
-          </a:p>
-        </p:txBody>
-      </p:sp>
-      <p:sp>
-        <p:nvSpPr>
-          <p:cNvPr id="19" name="TextBox 18"/>
-          <p:cNvSpPr txBox="1"/>
-          <p:nvPr/>
-        </p:nvSpPr>
-        <p:spPr>
-          <a:xfrm>
-            <a:off x="685800" y="4572000"/>
-            <a:ext cx="10789920" cy="1463040"/>
-          </a:xfrm>
-          <a:prstGeom prst="rect">
-            <a:avLst/>
-          </a:prstGeom>
-          <a:noFill/>
-        </p:spPr>
-        <p:txBody>
-          <a:bodyPr wrap="square" anchor="t" lIns="45720" rIns="45720" tIns="27432" bIns="27432">
-            <a:spAutoFit/>
-          </a:bodyPr>
-          <a:lstStyle/>
-          <a:p>
-            <a:pPr algn="l">
-              <a:lnSpc>
-                <a:spcPct val="115000"/>
-              </a:lnSpc>
-            </a:pPr>
-            <a:r>
-              <a:rPr sz="2200" b="1">
-                <a:solidFill>
-                  <a:srgbClr val="0C3D2B"/>
-                </a:solidFill>
-                <a:latin typeface="Calibri"/>
-              </a:rPr>
-              <a:t>Works for any project: </a:t>
-            </a:r>
-            <a:r>
-              <a:rPr sz="2200" b="0">
-                <a:solidFill>
-                  <a:srgbClr val="0F2419"/>
-                </a:solidFill>
-                <a:latin typeface="Calibri"/>
-              </a:rPr>
-              <a:t>upload a KML file in the dashboard, no code. Four projects so far: two in Brazil, Cambodia and Bolivia.</a:t>
-            </a:r>
-          </a:p>
-          <a:p>
-            <a:pPr algn="l">
-              <a:lnSpc>
-                <a:spcPct val="115000"/>
-              </a:lnSpc>
-            </a:pPr>
-            <a:r>
-              <a:rPr sz="2200" b="1">
-                <a:solidFill>
-                  <a:srgbClr val="0C3D2B"/>
-                </a:solidFill>
-                <a:latin typeface="Calibri"/>
-              </a:rPr>
-              <a:t>Trust built in: </a:t>
-            </a:r>
-            <a:r>
-              <a:rPr sz="2200" b="0">
-                <a:solidFill>
-                  <a:srgbClr val="0F2419"/>
-                </a:solidFill>
-                <a:latin typeface="Calibri"/>
-              </a:rPr>
-              <a:t>the 50 parcels are frozen with a hash, so the comparison cannot be changed afterwards.</a:t>
-            </a:r>
+              <a:t>five-level
+NFT status</a:t>
+            </a:r>
+          </a:p>
+        </p:txBody>
+      </p:sp>
+      <p:sp>
+        <p:nvSpPr>
+          <p:cNvPr id="19" name="Rectangle 18"/>
+          <p:cNvSpPr/>
+          <p:nvPr/>
+        </p:nvSpPr>
+        <p:spPr>
+          <a:xfrm>
+            <a:off x="685800" y="4434840"/>
+            <a:ext cx="10835640" cy="777240"/>
+          </a:xfrm>
+          <a:prstGeom prst="rect">
+            <a:avLst/>
+          </a:prstGeom>
+          <a:solidFill>
+            <a:srgbClr val="E6F4EC"/>
+          </a:solidFill>
+          <a:ln>
+            <a:noFill/>
+          </a:ln>
+          <a:effectLst/>
+        </p:spPr>
+        <p:style>
+          <a:lnRef idx="1">
+            <a:schemeClr val="accent1"/>
+          </a:lnRef>
+          <a:fillRef idx="3">
+            <a:schemeClr val="accent1"/>
+          </a:fillRef>
+          <a:effectRef idx="2">
+            <a:schemeClr val="accent1"/>
+          </a:effectRef>
+          <a:fontRef idx="minor">
+            <a:schemeClr val="lt1"/>
+          </a:fontRef>
+        </p:style>
+        <p:txBody>
+          <a:bodyPr rtlCol="0" anchor="ctr"/>
+          <a:lstStyle/>
+          <a:p>
+            <a:pPr algn="ctr"/>
           </a:p>
         </p:txBody>
       </p:sp>
@@ -5559,8 +5408,8 @@
         </p:nvSpPr>
         <p:spPr>
           <a:xfrm>
-            <a:off x="640080" y="6400800"/>
-            <a:ext cx="5486400" cy="274320"/>
+            <a:off x="868680" y="4434840"/>
+            <a:ext cx="2377440" cy="777240"/>
           </a:xfrm>
           <a:prstGeom prst="rect">
             <a:avLst/>
@@ -5568,7 +5417,7 @@
           <a:noFill/>
         </p:spPr>
         <p:txBody>
-          <a:bodyPr wrap="square" anchor="t" lIns="45720" rIns="45720" tIns="27432" bIns="27432">
+          <a:bodyPr wrap="square" anchor="ctr" lIns="45720" rIns="45720" tIns="27432" bIns="27432">
             <a:spAutoFit/>
           </a:bodyPr>
           <a:lstStyle/>
@@ -5579,6 +5428,206 @@
               </a:lnSpc>
             </a:pPr>
             <a:r>
+              <a:rPr sz="2200" b="1">
+                <a:solidFill>
+                  <a:srgbClr val="0C3D2B"/>
+                </a:solidFill>
+                <a:latin typeface="Calibri"/>
+              </a:rPr>
+              <a:t>Any project</a:t>
+            </a:r>
+          </a:p>
+        </p:txBody>
+      </p:sp>
+      <p:sp>
+        <p:nvSpPr>
+          <p:cNvPr id="21" name="TextBox 20"/>
+          <p:cNvSpPr txBox="1"/>
+          <p:nvPr/>
+        </p:nvSpPr>
+        <p:spPr>
+          <a:xfrm>
+            <a:off x="3246120" y="4434840"/>
+            <a:ext cx="8092440" cy="777240"/>
+          </a:xfrm>
+          <a:prstGeom prst="rect">
+            <a:avLst/>
+          </a:prstGeom>
+          <a:noFill/>
+        </p:spPr>
+        <p:txBody>
+          <a:bodyPr wrap="square" anchor="ctr" lIns="45720" rIns="45720" tIns="27432" bIns="27432">
+            <a:spAutoFit/>
+          </a:bodyPr>
+          <a:lstStyle/>
+          <a:p>
+            <a:pPr algn="l">
+              <a:lnSpc>
+                <a:spcPct val="100000"/>
+              </a:lnSpc>
+            </a:pPr>
+            <a:r>
+              <a:rPr sz="2000" b="0">
+                <a:solidFill>
+                  <a:srgbClr val="0F2419"/>
+                </a:solidFill>
+                <a:latin typeface="Calibri"/>
+              </a:rPr>
+              <a:t>Upload a KML file in the dashboard. No code.</a:t>
+            </a:r>
+          </a:p>
+        </p:txBody>
+      </p:sp>
+      <p:sp>
+        <p:nvSpPr>
+          <p:cNvPr id="22" name="Rectangle 21"/>
+          <p:cNvSpPr/>
+          <p:nvPr/>
+        </p:nvSpPr>
+        <p:spPr>
+          <a:xfrm>
+            <a:off x="685800" y="5349240"/>
+            <a:ext cx="10835640" cy="777240"/>
+          </a:xfrm>
+          <a:prstGeom prst="rect">
+            <a:avLst/>
+          </a:prstGeom>
+          <a:solidFill>
+            <a:srgbClr val="E6F4EC"/>
+          </a:solidFill>
+          <a:ln>
+            <a:noFill/>
+          </a:ln>
+          <a:effectLst/>
+        </p:spPr>
+        <p:style>
+          <a:lnRef idx="1">
+            <a:schemeClr val="accent1"/>
+          </a:lnRef>
+          <a:fillRef idx="3">
+            <a:schemeClr val="accent1"/>
+          </a:fillRef>
+          <a:effectRef idx="2">
+            <a:schemeClr val="accent1"/>
+          </a:effectRef>
+          <a:fontRef idx="minor">
+            <a:schemeClr val="lt1"/>
+          </a:fontRef>
+        </p:style>
+        <p:txBody>
+          <a:bodyPr rtlCol="0" anchor="ctr"/>
+          <a:lstStyle/>
+          <a:p>
+            <a:pPr algn="ctr"/>
+          </a:p>
+        </p:txBody>
+      </p:sp>
+      <p:sp>
+        <p:nvSpPr>
+          <p:cNvPr id="23" name="TextBox 22"/>
+          <p:cNvSpPr txBox="1"/>
+          <p:nvPr/>
+        </p:nvSpPr>
+        <p:spPr>
+          <a:xfrm>
+            <a:off x="868680" y="5349240"/>
+            <a:ext cx="2377440" cy="777240"/>
+          </a:xfrm>
+          <a:prstGeom prst="rect">
+            <a:avLst/>
+          </a:prstGeom>
+          <a:noFill/>
+        </p:spPr>
+        <p:txBody>
+          <a:bodyPr wrap="square" anchor="ctr" lIns="45720" rIns="45720" tIns="27432" bIns="27432">
+            <a:spAutoFit/>
+          </a:bodyPr>
+          <a:lstStyle/>
+          <a:p>
+            <a:pPr algn="l">
+              <a:lnSpc>
+                <a:spcPct val="105000"/>
+              </a:lnSpc>
+            </a:pPr>
+            <a:r>
+              <a:rPr sz="2200" b="1">
+                <a:solidFill>
+                  <a:srgbClr val="0C3D2B"/>
+                </a:solidFill>
+                <a:latin typeface="Calibri"/>
+              </a:rPr>
+              <a:t>Live now</a:t>
+            </a:r>
+          </a:p>
+        </p:txBody>
+      </p:sp>
+      <p:sp>
+        <p:nvSpPr>
+          <p:cNvPr id="24" name="TextBox 23"/>
+          <p:cNvSpPr txBox="1"/>
+          <p:nvPr/>
+        </p:nvSpPr>
+        <p:spPr>
+          <a:xfrm>
+            <a:off x="3246120" y="5349240"/>
+            <a:ext cx="8092440" cy="777240"/>
+          </a:xfrm>
+          <a:prstGeom prst="rect">
+            <a:avLst/>
+          </a:prstGeom>
+          <a:noFill/>
+        </p:spPr>
+        <p:txBody>
+          <a:bodyPr wrap="square" anchor="ctr" lIns="45720" rIns="45720" tIns="27432" bIns="27432">
+            <a:spAutoFit/>
+          </a:bodyPr>
+          <a:lstStyle/>
+          <a:p>
+            <a:pPr algn="l">
+              <a:lnSpc>
+                <a:spcPct val="100000"/>
+              </a:lnSpc>
+            </a:pPr>
+            <a:r>
+              <a:rPr sz="2000" b="0">
+                <a:solidFill>
+                  <a:srgbClr val="0F2419"/>
+                </a:solidFill>
+                <a:latin typeface="Calibri"/>
+              </a:rPr>
+              <a:t>Four projects: two in Brazil, one in Cambodia, one in Bolivia.</a:t>
+            </a:r>
+          </a:p>
+        </p:txBody>
+      </p:sp>
+      <p:sp>
+        <p:nvSpPr>
+          <p:cNvPr id="25" name="TextBox 24"/>
+          <p:cNvSpPr txBox="1"/>
+          <p:nvPr/>
+        </p:nvSpPr>
+        <p:spPr>
+          <a:xfrm>
+            <a:off x="640080" y="6400800"/>
+            <a:ext cx="5486400" cy="274320"/>
+          </a:xfrm>
+          <a:prstGeom prst="rect">
+            <a:avLst/>
+          </a:prstGeom>
+          <a:noFill/>
+        </p:spPr>
+        <p:txBody>
+          <a:bodyPr wrap="square" anchor="t" lIns="45720" rIns="45720" tIns="27432" bIns="27432">
+            <a:spAutoFit/>
+          </a:bodyPr>
+          <a:lstStyle/>
+          <a:p>
+            <a:pPr algn="l">
+              <a:lnSpc>
+                <a:spcPct val="105000"/>
+              </a:lnSpc>
+            </a:pPr>
+            <a:r>
               <a:rPr sz="1200" b="0">
                 <a:solidFill>
                   <a:srgbClr val="587063"/>
@@ -5592,7 +5641,7 @@
       </p:sp>
       <p:sp>
         <p:nvSpPr>
-          <p:cNvPr id="21" name="TextBox 20"/>
+          <p:cNvPr id="26" name="TextBox 25"/>
           <p:cNvSpPr txBox="1"/>
           <p:nvPr/>
         </p:nvSpPr>
@@ -5681,7 +5730,7 @@
                 </a:solidFill>
                 <a:latin typeface="Calibri"/>
               </a:rPr>
-              <a:t>Live demo: ALGAR, Brazil</a:t>
+              <a:t>ALGAR, Brazil: 31% of the claim so far</a:t>
             </a:r>
           </a:p>
         </p:txBody>
@@ -5782,22 +5831,22 @@
               </a:lnSpc>
             </a:pPr>
             <a:r>
-              <a:rPr sz="2000" b="1">
+              <a:rPr sz="2100" b="1">
                 <a:solidFill>
                   <a:srgbClr val="0C3D2B"/>
                 </a:solidFill>
                 <a:latin typeface="Calibri"/>
               </a:rPr>
-              <a:t>31% of the claim so far. </a:t>
-            </a:r>
-            <a:r>
-              <a:rPr sz="2000" b="0">
+              <a:t>Project loss 0.58%. Parcel loss 4.61%. </a:t>
+            </a:r>
+            <a:r>
+              <a:rPr sz="2100" b="0">
                 <a:solidFill>
                   <a:srgbClr val="0F2419"/>
                 </a:solidFill>
                 <a:latin typeface="Calibri"/>
               </a:rPr>
-              <a:t>A signal to investigate, not a verdict.</a:t>
+              <a:t>Status: Worst. A flag to investigate.</a:t>
             </a:r>
           </a:p>
         </p:txBody>
@@ -5906,7 +5955,7 @@
         </p:nvSpPr>
         <p:spPr>
           <a:xfrm>
-            <a:off x="640080" y="411480"/>
+            <a:off x="640080" y="365760"/>
             <a:ext cx="10881360" cy="1188720"/>
           </a:xfrm>
           <a:prstGeom prst="rect">
@@ -5926,13 +5975,13 @@
               </a:lnSpc>
             </a:pPr>
             <a:r>
-              <a:rPr sz="3400" b="1">
+              <a:rPr sz="3600" b="1">
                 <a:solidFill>
                   <a:srgbClr val="0C3D2B"/>
                 </a:solidFill>
                 <a:latin typeface="Calibri"/>
               </a:rPr>
-              <a:t>Quantum: tested on real hardware, honest about the timeline</a:t>
+              <a:t>QAE ran on IBM's 156-qubit ibm_fez</a:t>
             </a:r>
           </a:p>
         </p:txBody>
@@ -5945,7 +5994,7 @@
         </p:nvSpPr>
         <p:spPr>
           <a:xfrm>
-            <a:off x="685800" y="1673351"/>
+            <a:off x="685800" y="1234440"/>
             <a:ext cx="1097280" cy="64008"/>
           </a:xfrm>
           <a:prstGeom prst="rect">
@@ -5981,16 +6030,40 @@
           </a:p>
         </p:txBody>
       </p:sp>
-      <p:sp>
-        <p:nvSpPr>
-          <p:cNvPr id="4" name="Rectangle 3"/>
+      <p:pic>
+        <p:nvPicPr>
+          <p:cNvPr id="4" name="Picture 3" descr="qae_chart.png"/>
+          <p:cNvPicPr>
+            <a:picLocks noChangeAspect="1"/>
+          </p:cNvPicPr>
+          <p:nvPr/>
+        </p:nvPicPr>
+        <p:blipFill>
+          <a:blip r:embed="rId3"/>
+          <a:stretch>
+            <a:fillRect/>
+          </a:stretch>
+        </p:blipFill>
+        <p:spPr>
+          <a:xfrm>
+            <a:off x="548640" y="1600200"/>
+            <a:ext cx="6035040" cy="3855720"/>
+          </a:xfrm>
+          <a:prstGeom prst="rect">
+            <a:avLst/>
+          </a:prstGeom>
+        </p:spPr>
+      </p:pic>
+      <p:sp>
+        <p:nvSpPr>
+          <p:cNvPr id="5" name="Rectangle 4"/>
           <p:cNvSpPr/>
           <p:nvPr/>
         </p:nvSpPr>
         <p:spPr>
           <a:xfrm>
-            <a:off x="685800" y="2103120"/>
-            <a:ext cx="3474720" cy="3017520"/>
+            <a:off x="6858000" y="1783080"/>
+            <a:ext cx="4709160" cy="1188720"/>
           </a:xfrm>
           <a:prstGeom prst="rect">
             <a:avLst/>
@@ -6027,14 +6100,14 @@
       </p:sp>
       <p:sp>
         <p:nvSpPr>
-          <p:cNvPr id="5" name="TextBox 4"/>
+          <p:cNvPr id="6" name="TextBox 5"/>
           <p:cNvSpPr txBox="1"/>
           <p:nvPr/>
         </p:nvSpPr>
         <p:spPr>
           <a:xfrm>
-            <a:off x="868680" y="2194560"/>
-            <a:ext cx="3108960" cy="502920"/>
+            <a:off x="7040880" y="1783080"/>
+            <a:ext cx="1325880" cy="1188720"/>
           </a:xfrm>
           <a:prstGeom prst="rect">
             <a:avLst/>
@@ -6042,7 +6115,7 @@
           <a:noFill/>
         </p:spPr>
         <p:txBody>
-          <a:bodyPr wrap="square" anchor="t" lIns="45720" rIns="45720" tIns="27432" bIns="27432">
+          <a:bodyPr wrap="square" anchor="ctr" lIns="45720" rIns="45720" tIns="27432" bIns="27432">
             <a:spAutoFit/>
           </a:bodyPr>
           <a:lstStyle/>
@@ -6053,27 +6126,27 @@
               </a:lnSpc>
             </a:pPr>
             <a:r>
-              <a:rPr sz="2800" b="1">
+              <a:rPr sz="2200" b="1">
                 <a:solidFill>
                   <a:srgbClr val="0C3D2B"/>
                 </a:solidFill>
                 <a:latin typeface="Calibri"/>
               </a:rPr>
-              <a:t>In practice</a:t>
-            </a:r>
-          </a:p>
-        </p:txBody>
-      </p:sp>
-      <p:sp>
-        <p:nvSpPr>
-          <p:cNvPr id="6" name="TextBox 5"/>
+              <a:t>Small test</a:t>
+            </a:r>
+          </a:p>
+        </p:txBody>
+      </p:sp>
+      <p:sp>
+        <p:nvSpPr>
+          <p:cNvPr id="7" name="TextBox 6"/>
           <p:cNvSpPr txBox="1"/>
           <p:nvPr/>
         </p:nvSpPr>
         <p:spPr>
           <a:xfrm>
-            <a:off x="868680" y="2697480"/>
-            <a:ext cx="3108960" cy="411480"/>
+            <a:off x="8366760" y="1783080"/>
+            <a:ext cx="3017520" cy="1188720"/>
           </a:xfrm>
           <a:prstGeom prst="rect">
             <a:avLst/>
@@ -6081,63 +6154,24 @@
           <a:noFill/>
         </p:spPr>
         <p:txBody>
-          <a:bodyPr wrap="square" anchor="t" lIns="45720" rIns="45720" tIns="27432" bIns="27432">
+          <a:bodyPr wrap="square" anchor="ctr" lIns="45720" rIns="45720" tIns="27432" bIns="27432">
             <a:spAutoFit/>
           </a:bodyPr>
           <a:lstStyle/>
           <a:p>
             <a:pPr algn="l">
               <a:lnSpc>
-                <a:spcPct val="105000"/>
+                <a:spcPct val="100000"/>
               </a:lnSpc>
             </a:pPr>
             <a:r>
-              <a:rPr sz="1800" b="1">
-                <a:solidFill>
-                  <a:srgbClr val="587063"/>
+              <a:rPr sz="2000" b="0">
+                <a:solidFill>
+                  <a:srgbClr val="0F2419"/>
                 </a:solidFill>
                 <a:latin typeface="Calibri"/>
               </a:rPr>
-              <a:t>IBM Fez, 156 qubits</a:t>
-            </a:r>
-          </a:p>
-        </p:txBody>
-      </p:sp>
-      <p:sp>
-        <p:nvSpPr>
-          <p:cNvPr id="7" name="TextBox 6"/>
-          <p:cNvSpPr txBox="1"/>
-          <p:nvPr/>
-        </p:nvSpPr>
-        <p:spPr>
-          <a:xfrm>
-            <a:off x="868680" y="3200400"/>
-            <a:ext cx="3154680" cy="1920240"/>
-          </a:xfrm>
-          <a:prstGeom prst="rect">
-            <a:avLst/>
-          </a:prstGeom>
-          <a:noFill/>
-        </p:spPr>
-        <p:txBody>
-          <a:bodyPr wrap="square" anchor="t" lIns="45720" rIns="45720" tIns="27432" bIns="27432">
-            <a:spAutoFit/>
-          </a:bodyPr>
-          <a:lstStyle/>
-          <a:p>
-            <a:pPr algn="l">
-              <a:lnSpc>
-                <a:spcPct val="110000"/>
-              </a:lnSpc>
-            </a:pPr>
-            <a:r>
-              <a:rPr sz="1900" b="0">
-                <a:solidFill>
-                  <a:srgbClr val="0F2419"/>
-                </a:solidFill>
-                <a:latin typeface="Calibri"/>
-              </a:rPr>
-              <a:t>QAOA picks parcels. On a small, favourable 8-parcel problem it found the best set ~71% of the time. Random: 1.8%.</a:t>
+              <a:t>1 qubit. Error below Monte Carlo at 5 of 8 budgets, up to 16x.</a:t>
             </a:r>
           </a:p>
         </p:txBody>
@@ -6150,8 +6184,8 @@
         </p:nvSpPr>
         <p:spPr>
           <a:xfrm>
-            <a:off x="4343400" y="2103120"/>
-            <a:ext cx="3474720" cy="3017520"/>
+            <a:off x="6858000" y="3154680"/>
+            <a:ext cx="4709160" cy="1188720"/>
           </a:xfrm>
           <a:prstGeom prst="rect">
             <a:avLst/>
@@ -6194,8 +6228,8 @@
         </p:nvSpPr>
         <p:spPr>
           <a:xfrm>
-            <a:off x="4526280" y="2194560"/>
-            <a:ext cx="3108960" cy="502920"/>
+            <a:off x="7040880" y="3154680"/>
+            <a:ext cx="1325880" cy="1188720"/>
           </a:xfrm>
           <a:prstGeom prst="rect">
             <a:avLst/>
@@ -6203,7 +6237,7 @@
           <a:noFill/>
         </p:spPr>
         <p:txBody>
-          <a:bodyPr wrap="square" anchor="t" lIns="45720" rIns="45720" tIns="27432" bIns="27432">
+          <a:bodyPr wrap="square" anchor="ctr" lIns="45720" rIns="45720" tIns="27432" bIns="27432">
             <a:spAutoFit/>
           </a:bodyPr>
           <a:lstStyle/>
@@ -6214,13 +6248,13 @@
               </a:lnSpc>
             </a:pPr>
             <a:r>
-              <a:rPr sz="2800" b="1">
+              <a:rPr sz="2200" b="1">
                 <a:solidFill>
                   <a:srgbClr val="0C3D2B"/>
                 </a:solidFill>
                 <a:latin typeface="Calibri"/>
               </a:rPr>
-              <a:t>In theory</a:t>
+              <a:t>Real size</a:t>
             </a:r>
           </a:p>
         </p:txBody>
@@ -6233,8 +6267,8 @@
         </p:nvSpPr>
         <p:spPr>
           <a:xfrm>
-            <a:off x="4526280" y="2697480"/>
-            <a:ext cx="3108960" cy="411480"/>
+            <a:off x="8366760" y="3154680"/>
+            <a:ext cx="3017520" cy="1188720"/>
           </a:xfrm>
           <a:prstGeom prst="rect">
             <a:avLst/>
@@ -6242,88 +6276,47 @@
           <a:noFill/>
         </p:spPr>
         <p:txBody>
-          <a:bodyPr wrap="square" anchor="t" lIns="45720" rIns="45720" tIns="27432" bIns="27432">
+          <a:bodyPr wrap="square" anchor="ctr" lIns="45720" rIns="45720" tIns="27432" bIns="27432">
             <a:spAutoFit/>
           </a:bodyPr>
           <a:lstStyle/>
           <a:p>
             <a:pPr algn="l">
               <a:lnSpc>
-                <a:spcPct val="105000"/>
+                <a:spcPct val="100000"/>
               </a:lnSpc>
             </a:pPr>
             <a:r>
-              <a:rPr sz="1800" b="1">
-                <a:solidFill>
-                  <a:srgbClr val="587063"/>
+              <a:rPr sz="2000" b="0">
+                <a:solidFill>
+                  <a:srgbClr val="0F2419"/>
                 </a:solidFill>
                 <a:latin typeface="Calibri"/>
               </a:rPr>
-              <a:t>Amplitude estimation</a:t>
-            </a:r>
-          </a:p>
-        </p:txBody>
-      </p:sp>
-      <p:sp>
-        <p:nvSpPr>
-          <p:cNvPr id="11" name="TextBox 10"/>
-          <p:cNvSpPr txBox="1"/>
-          <p:nvPr/>
-        </p:nvSpPr>
-        <p:spPr>
-          <a:xfrm>
-            <a:off x="4526280" y="3200400"/>
-            <a:ext cx="3154680" cy="1920240"/>
-          </a:xfrm>
-          <a:prstGeom prst="rect">
-            <a:avLst/>
-          </a:prstGeom>
-          <a:noFill/>
-        </p:spPr>
-        <p:txBody>
-          <a:bodyPr wrap="square" anchor="t" lIns="45720" rIns="45720" tIns="27432" bIns="27432">
-            <a:spAutoFit/>
-          </a:bodyPr>
-          <a:lstStyle/>
-          <a:p>
-            <a:pPr algn="l">
-              <a:lnSpc>
-                <a:spcPct val="110000"/>
-              </a:lnSpc>
-            </a:pPr>
-            <a:r>
-              <a:rPr sz="1900" b="0">
-                <a:solidFill>
-                  <a:srgbClr val="0F2419"/>
-                </a:solidFill>
-                <a:latin typeface="Calibri"/>
-              </a:rPr>
-              <a:t>Simulated: 9.8x tighter than Monte Carlo at the same budget. A proven quadratic speedup.</a:t>
-            </a:r>
-          </a:p>
-        </p:txBody>
-      </p:sp>
-      <p:sp>
-        <p:nvSpPr>
-          <p:cNvPr id="12" name="Rectangle 11"/>
+              <a:t>50 parcels, 865 two-qubit gates. Signal gone after 1 Grover step.</a:t>
+            </a:r>
+          </a:p>
+        </p:txBody>
+      </p:sp>
+      <p:sp>
+        <p:nvSpPr>
+          <p:cNvPr id="11" name="Rectangle 10"/>
           <p:cNvSpPr/>
           <p:nvPr/>
         </p:nvSpPr>
         <p:spPr>
           <a:xfrm>
-            <a:off x="8001000" y="2103120"/>
-            <a:ext cx="3474720" cy="3017520"/>
+            <a:off x="6858000" y="4526280"/>
+            <a:ext cx="4709160" cy="1188720"/>
           </a:xfrm>
           <a:prstGeom prst="rect">
             <a:avLst/>
           </a:prstGeom>
           <a:solidFill>
-            <a:srgbClr val="FFFFFF"/>
+            <a:srgbClr val="E6F4EC"/>
           </a:solidFill>
-          <a:ln w="15875">
-            <a:solidFill>
-              <a:srgbClr val="C0392B"/>
-            </a:solidFill>
+          <a:ln>
+            <a:noFill/>
           </a:ln>
           <a:effectLst/>
         </p:spPr>
@@ -6351,14 +6344,14 @@
       </p:sp>
       <p:sp>
         <p:nvSpPr>
-          <p:cNvPr id="13" name="TextBox 12"/>
+          <p:cNvPr id="12" name="TextBox 11"/>
           <p:cNvSpPr txBox="1"/>
           <p:nvPr/>
         </p:nvSpPr>
         <p:spPr>
           <a:xfrm>
-            <a:off x="8183879" y="2194560"/>
-            <a:ext cx="3108960" cy="502920"/>
+            <a:off x="7040880" y="4526280"/>
+            <a:ext cx="1325880" cy="1188720"/>
           </a:xfrm>
           <a:prstGeom prst="rect">
             <a:avLst/>
@@ -6366,7 +6359,7 @@
           <a:noFill/>
         </p:spPr>
         <p:txBody>
-          <a:bodyPr wrap="square" anchor="t" lIns="45720" rIns="45720" tIns="27432" bIns="27432">
+          <a:bodyPr wrap="square" anchor="ctr" lIns="45720" rIns="45720" tIns="27432" bIns="27432">
             <a:spAutoFit/>
           </a:bodyPr>
           <a:lstStyle/>
@@ -6377,13 +6370,52 @@
               </a:lnSpc>
             </a:pPr>
             <a:r>
-              <a:rPr sz="2800" b="1">
-                <a:solidFill>
-                  <a:srgbClr val="C0392B"/>
+              <a:rPr sz="2200" b="1">
+                <a:solidFill>
+                  <a:srgbClr val="0C3D2B"/>
                 </a:solidFill>
                 <a:latin typeface="Calibri"/>
               </a:rPr>
-              <a:t>The catch</a:t>
+              <a:t>Limit</a:t>
+            </a:r>
+          </a:p>
+        </p:txBody>
+      </p:sp>
+      <p:sp>
+        <p:nvSpPr>
+          <p:cNvPr id="13" name="TextBox 12"/>
+          <p:cNvSpPr txBox="1"/>
+          <p:nvPr/>
+        </p:nvSpPr>
+        <p:spPr>
+          <a:xfrm>
+            <a:off x="8366760" y="4526280"/>
+            <a:ext cx="3017520" cy="1188720"/>
+          </a:xfrm>
+          <a:prstGeom prst="rect">
+            <a:avLst/>
+          </a:prstGeom>
+          <a:noFill/>
+        </p:spPr>
+        <p:txBody>
+          <a:bodyPr wrap="square" anchor="ctr" lIns="45720" rIns="45720" tIns="27432" bIns="27432">
+            <a:spAutoFit/>
+          </a:bodyPr>
+          <a:lstStyle/>
+          <a:p>
+            <a:pPr algn="l">
+              <a:lnSpc>
+                <a:spcPct val="100000"/>
+              </a:lnSpc>
+            </a:pPr>
+            <a:r>
+              <a:rPr sz="2000" b="0">
+                <a:solidFill>
+                  <a:srgbClr val="0F2419"/>
+                </a:solidFill>
+                <a:latin typeface="Calibri"/>
+              </a:rPr>
+              <a:t>At 262,000 calls, hardware noise removes the edge.</a:t>
             </a:r>
           </a:p>
         </p:txBody>
@@ -6396,8 +6428,8 @@
         </p:nvSpPr>
         <p:spPr>
           <a:xfrm>
-            <a:off x="8183879" y="2697480"/>
-            <a:ext cx="3108960" cy="411480"/>
+            <a:off x="6858000" y="5806440"/>
+            <a:ext cx="4754880" cy="457200"/>
           </a:xfrm>
           <a:prstGeom prst="rect">
             <a:avLst/>
@@ -6416,13 +6448,13 @@
               </a:lnSpc>
             </a:pPr>
             <a:r>
-              <a:rPr sz="1800" b="1">
+              <a:rPr sz="1300" b="0">
                 <a:solidFill>
                   <a:srgbClr val="587063"/>
                 </a:solidFill>
                 <a:latin typeface="Calibri"/>
               </a:rPr>
-              <a:t>We show it openly</a:t>
+              <a:t>One hardware run per point. Monte Carlo shown as expected error.</a:t>
             </a:r>
           </a:p>
         </p:txBody>
@@ -6435,8 +6467,8 @@
         </p:nvSpPr>
         <p:spPr>
           <a:xfrm>
-            <a:off x="8183879" y="3200400"/>
-            <a:ext cx="3154680" cy="1920240"/>
+            <a:off x="640080" y="6400800"/>
+            <a:ext cx="5486400" cy="274320"/>
           </a:xfrm>
           <a:prstGeom prst="rect">
             <a:avLst/>
@@ -6445,89 +6477,6 @@
         </p:spPr>
         <p:txBody>
           <a:bodyPr wrap="square" anchor="t" lIns="45720" rIns="45720" tIns="27432" bIns="27432">
-            <a:spAutoFit/>
-          </a:bodyPr>
-          <a:lstStyle/>
-          <a:p>
-            <a:pPr algn="l">
-              <a:lnSpc>
-                <a:spcPct val="110000"/>
-              </a:lnSpc>
-            </a:pPr>
-            <a:r>
-              <a:rPr sz="1900" b="0">
-                <a:solidFill>
-                  <a:srgbClr val="0F2419"/>
-                </a:solidFill>
-                <a:latin typeface="Calibri"/>
-              </a:rPr>
-              <a:t>Classical wins at every size we can run today. The advantage needs gates ~3,000x better.</a:t>
-            </a:r>
-          </a:p>
-        </p:txBody>
-      </p:sp>
-      <p:sp>
-        <p:nvSpPr>
-          <p:cNvPr id="16" name="Rectangle 15"/>
-          <p:cNvSpPr/>
-          <p:nvPr/>
-        </p:nvSpPr>
-        <p:spPr>
-          <a:xfrm>
-            <a:off x="685800" y="5349240"/>
-            <a:ext cx="10789920" cy="868680"/>
-          </a:xfrm>
-          <a:prstGeom prst="rect">
-            <a:avLst/>
-          </a:prstGeom>
-          <a:solidFill>
-            <a:srgbClr val="0C3D2B"/>
-          </a:solidFill>
-          <a:ln>
-            <a:noFill/>
-          </a:ln>
-          <a:effectLst/>
-        </p:spPr>
-        <p:style>
-          <a:lnRef idx="1">
-            <a:schemeClr val="accent1"/>
-          </a:lnRef>
-          <a:fillRef idx="3">
-            <a:schemeClr val="accent1"/>
-          </a:fillRef>
-          <a:effectRef idx="2">
-            <a:schemeClr val="accent1"/>
-          </a:effectRef>
-          <a:fontRef idx="minor">
-            <a:schemeClr val="lt1"/>
-          </a:fontRef>
-        </p:style>
-        <p:txBody>
-          <a:bodyPr rtlCol="0" anchor="ctr"/>
-          <a:lstStyle/>
-          <a:p>
-            <a:pPr algn="ctr"/>
-          </a:p>
-        </p:txBody>
-      </p:sp>
-      <p:sp>
-        <p:nvSpPr>
-          <p:cNvPr id="17" name="TextBox 16"/>
-          <p:cNvSpPr txBox="1"/>
-          <p:nvPr/>
-        </p:nvSpPr>
-        <p:spPr>
-          <a:xfrm>
-            <a:off x="868680" y="5349240"/>
-            <a:ext cx="10424160" cy="868680"/>
-          </a:xfrm>
-          <a:prstGeom prst="rect">
-            <a:avLst/>
-          </a:prstGeom>
-          <a:noFill/>
-        </p:spPr>
-        <p:txBody>
-          <a:bodyPr wrap="square" anchor="ctr" lIns="45720" rIns="45720" tIns="27432" bIns="27432">
             <a:spAutoFit/>
           </a:bodyPr>
           <a:lstStyle/>
@@ -6538,54 +6487,6 @@
               </a:lnSpc>
             </a:pPr>
             <a:r>
-              <a:rPr sz="2100" b="1">
-                <a:solidFill>
-                  <a:srgbClr val="4ADE9B"/>
-                </a:solidFill>
-                <a:latin typeface="Calibri"/>
-              </a:rPr>
-              <a:t>Where it pays off: </a:t>
-            </a:r>
-            <a:r>
-              <a:rPr sz="2100" b="0">
-                <a:solidFill>
-                  <a:srgbClr val="FFFFFF"/>
-                </a:solidFill>
-                <a:latin typeface="Calibri"/>
-              </a:rPr>
-              <a:t>thousands of projects, pixel-level models, refreshed weekly. Quantum-ready today, switched on when hardware allows.</a:t>
-            </a:r>
-          </a:p>
-        </p:txBody>
-      </p:sp>
-      <p:sp>
-        <p:nvSpPr>
-          <p:cNvPr id="18" name="TextBox 17"/>
-          <p:cNvSpPr txBox="1"/>
-          <p:nvPr/>
-        </p:nvSpPr>
-        <p:spPr>
-          <a:xfrm>
-            <a:off x="640080" y="6400800"/>
-            <a:ext cx="5486400" cy="274320"/>
-          </a:xfrm>
-          <a:prstGeom prst="rect">
-            <a:avLst/>
-          </a:prstGeom>
-          <a:noFill/>
-        </p:spPr>
-        <p:txBody>
-          <a:bodyPr wrap="square" anchor="t" lIns="45720" rIns="45720" tIns="27432" bIns="27432">
-            <a:spAutoFit/>
-          </a:bodyPr>
-          <a:lstStyle/>
-          <a:p>
-            <a:pPr algn="l">
-              <a:lnSpc>
-                <a:spcPct val="105000"/>
-              </a:lnSpc>
-            </a:pPr>
-            <a:r>
               <a:rPr sz="1200" b="0">
                 <a:solidFill>
                   <a:srgbClr val="587063"/>
@@ -6599,7 +6500,7 @@
       </p:sp>
       <p:sp>
         <p:nvSpPr>
-          <p:cNvPr id="19" name="TextBox 18"/>
+          <p:cNvPr id="16" name="TextBox 15"/>
           <p:cNvSpPr txBox="1"/>
           <p:nvPr/>
         </p:nvSpPr>
@@ -6688,7 +6589,7 @@
                 </a:solidFill>
                 <a:latin typeface="Calibri"/>
               </a:rPr>
-              <a:t>Who pays for trust? Everyone who has to rely on a credit</a:t>
+              <a:t>Quantum pays off when the scale grows</a:t>
             </a:r>
           </a:p>
         </p:txBody>
@@ -6739,14 +6640,58 @@
       </p:sp>
       <p:sp>
         <p:nvSpPr>
-          <p:cNvPr id="4" name="TextBox 3"/>
+          <p:cNvPr id="4" name="Rectangle 3"/>
+          <p:cNvSpPr/>
+          <p:nvPr/>
+        </p:nvSpPr>
+        <p:spPr>
+          <a:xfrm>
+            <a:off x="685800" y="2103120"/>
+            <a:ext cx="10835640" cy="914400"/>
+          </a:xfrm>
+          <a:prstGeom prst="rect">
+            <a:avLst/>
+          </a:prstGeom>
+          <a:solidFill>
+            <a:srgbClr val="E6F4EC"/>
+          </a:solidFill>
+          <a:ln>
+            <a:noFill/>
+          </a:ln>
+          <a:effectLst/>
+        </p:spPr>
+        <p:style>
+          <a:lnRef idx="1">
+            <a:schemeClr val="accent1"/>
+          </a:lnRef>
+          <a:fillRef idx="3">
+            <a:schemeClr val="accent1"/>
+          </a:fillRef>
+          <a:effectRef idx="2">
+            <a:schemeClr val="accent1"/>
+          </a:effectRef>
+          <a:fontRef idx="minor">
+            <a:schemeClr val="lt1"/>
+          </a:fontRef>
+        </p:style>
+        <p:txBody>
+          <a:bodyPr rtlCol="0" anchor="ctr"/>
+          <a:lstStyle/>
+          <a:p>
+            <a:pPr algn="ctr"/>
+          </a:p>
+        </p:txBody>
+      </p:sp>
+      <p:sp>
+        <p:nvSpPr>
+          <p:cNvPr id="5" name="TextBox 4"/>
           <p:cNvSpPr txBox="1"/>
           <p:nvPr/>
         </p:nvSpPr>
         <p:spPr>
           <a:xfrm>
-            <a:off x="685800" y="2103120"/>
-            <a:ext cx="5212080" cy="457200"/>
+            <a:off x="868680" y="2103120"/>
+            <a:ext cx="2377440" cy="914400"/>
           </a:xfrm>
           <a:prstGeom prst="rect">
             <a:avLst/>
@@ -6754,7 +6699,7 @@
           <a:noFill/>
         </p:spPr>
         <p:txBody>
-          <a:bodyPr wrap="square" anchor="t" lIns="45720" rIns="45720" tIns="27432" bIns="27432">
+          <a:bodyPr wrap="square" anchor="ctr" lIns="45720" rIns="45720" tIns="27432" bIns="27432">
             <a:spAutoFit/>
           </a:bodyPr>
           <a:lstStyle/>
@@ -6765,27 +6710,27 @@
               </a:lnSpc>
             </a:pPr>
             <a:r>
-              <a:rPr sz="2600" b="1">
+              <a:rPr sz="2400" b="1">
                 <a:solidFill>
                   <a:srgbClr val="0C3D2B"/>
                 </a:solidFill>
                 <a:latin typeface="Calibri"/>
               </a:rPr>
-              <a:t>Customers</a:t>
-            </a:r>
-          </a:p>
-        </p:txBody>
-      </p:sp>
-      <p:sp>
-        <p:nvSpPr>
-          <p:cNvPr id="5" name="TextBox 4"/>
+              <a:t>Ran</a:t>
+            </a:r>
+          </a:p>
+        </p:txBody>
+      </p:sp>
+      <p:sp>
+        <p:nvSpPr>
+          <p:cNvPr id="6" name="TextBox 5"/>
           <p:cNvSpPr txBox="1"/>
           <p:nvPr/>
         </p:nvSpPr>
         <p:spPr>
           <a:xfrm>
-            <a:off x="685800" y="2606040"/>
-            <a:ext cx="5212080" cy="3108960"/>
+            <a:off x="3246120" y="2103120"/>
+            <a:ext cx="8092440" cy="914400"/>
           </a:xfrm>
           <a:prstGeom prst="rect">
             <a:avLst/>
@@ -6793,95 +6738,82 @@
           <a:noFill/>
         </p:spPr>
         <p:txBody>
-          <a:bodyPr wrap="square" anchor="t" lIns="45720" rIns="45720" tIns="27432" bIns="27432">
+          <a:bodyPr wrap="square" anchor="ctr" lIns="45720" rIns="45720" tIns="27432" bIns="27432">
             <a:spAutoFit/>
           </a:bodyPr>
           <a:lstStyle/>
           <a:p>
             <a:pPr algn="l">
               <a:lnSpc>
-                <a:spcPct val="130000"/>
+                <a:spcPct val="100000"/>
               </a:lnSpc>
             </a:pPr>
             <a:r>
-              <a:rPr sz="2400" b="0">
+              <a:rPr sz="2200" b="0">
                 <a:solidFill>
                   <a:srgbClr val="0F2419"/>
                 </a:solidFill>
                 <a:latin typeface="Calibri"/>
               </a:rPr>
-              <a:t>Credit buyers and corporates</a:t>
-            </a:r>
-          </a:p>
-          <a:p>
-            <a:pPr algn="l">
-              <a:lnSpc>
-                <a:spcPct val="130000"/>
-              </a:lnSpc>
-            </a:pPr>
-            <a:r>
-              <a:rPr sz="2400" b="0">
-                <a:solidFill>
-                  <a:srgbClr val="0F2419"/>
-                </a:solidFill>
-                <a:latin typeface="Calibri"/>
-              </a:rPr>
-              <a:t>Registries and auditors</a:t>
-            </a:r>
-          </a:p>
-          <a:p>
-            <a:pPr algn="l">
-              <a:lnSpc>
-                <a:spcPct val="130000"/>
-              </a:lnSpc>
-            </a:pPr>
-            <a:r>
-              <a:rPr sz="2400" b="0">
-                <a:solidFill>
-                  <a:srgbClr val="0F2419"/>
-                </a:solidFill>
-                <a:latin typeface="Calibri"/>
-              </a:rPr>
-              <a:t>Insurers and banks financing credits</a:t>
-            </a:r>
-          </a:p>
-          <a:p>
-            <a:pPr algn="l">
-              <a:lnSpc>
-                <a:spcPct val="130000"/>
-              </a:lnSpc>
-            </a:pPr>
-            <a:r>
-              <a:rPr sz="2400" b="1">
-                <a:solidFill>
-                  <a:srgbClr val="0C3D2B"/>
-                </a:solidFill>
-                <a:latin typeface="Calibri"/>
-              </a:rPr>
-              <a:t>Model: </a:t>
-            </a:r>
-            <a:r>
-              <a:rPr sz="2400" b="0">
-                <a:solidFill>
-                  <a:srgbClr val="0F2419"/>
-                </a:solidFill>
-                <a:latin typeface="Calibri"/>
-              </a:rPr>
-              <a:t>subscription per monitored project; public status as the trust signal</a:t>
-            </a:r>
-          </a:p>
-        </p:txBody>
-      </p:sp>
-      <p:sp>
-        <p:nvSpPr>
-          <p:cNvPr id="6" name="TextBox 5"/>
+              <a:t>QAOA picked the best 3 of 8 parcels in 71% of valid runs on ibm_fez. Random: 1.8%.</a:t>
+            </a:r>
+          </a:p>
+        </p:txBody>
+      </p:sp>
+      <p:sp>
+        <p:nvSpPr>
+          <p:cNvPr id="7" name="Rectangle 6"/>
+          <p:cNvSpPr/>
+          <p:nvPr/>
+        </p:nvSpPr>
+        <p:spPr>
+          <a:xfrm>
+            <a:off x="685800" y="3154679"/>
+            <a:ext cx="10835640" cy="914400"/>
+          </a:xfrm>
+          <a:prstGeom prst="rect">
+            <a:avLst/>
+          </a:prstGeom>
+          <a:solidFill>
+            <a:srgbClr val="E6F4EC"/>
+          </a:solidFill>
+          <a:ln>
+            <a:noFill/>
+          </a:ln>
+          <a:effectLst/>
+        </p:spPr>
+        <p:style>
+          <a:lnRef idx="1">
+            <a:schemeClr val="accent1"/>
+          </a:lnRef>
+          <a:fillRef idx="3">
+            <a:schemeClr val="accent1"/>
+          </a:fillRef>
+          <a:effectRef idx="2">
+            <a:schemeClr val="accent1"/>
+          </a:effectRef>
+          <a:fontRef idx="minor">
+            <a:schemeClr val="lt1"/>
+          </a:fontRef>
+        </p:style>
+        <p:txBody>
+          <a:bodyPr rtlCol="0" anchor="ctr"/>
+          <a:lstStyle/>
+          <a:p>
+            <a:pPr algn="ctr"/>
+          </a:p>
+        </p:txBody>
+      </p:sp>
+      <p:sp>
+        <p:nvSpPr>
+          <p:cNvPr id="8" name="TextBox 7"/>
           <p:cNvSpPr txBox="1"/>
           <p:nvPr/>
         </p:nvSpPr>
         <p:spPr>
           <a:xfrm>
-            <a:off x="6309360" y="2103120"/>
-            <a:ext cx="5212080" cy="457200"/>
+            <a:off x="868680" y="3154679"/>
+            <a:ext cx="2377440" cy="914400"/>
           </a:xfrm>
           <a:prstGeom prst="rect">
             <a:avLst/>
@@ -6889,7 +6821,7 @@
           <a:noFill/>
         </p:spPr>
         <p:txBody>
-          <a:bodyPr wrap="square" anchor="t" lIns="45720" rIns="45720" tIns="27432" bIns="27432">
+          <a:bodyPr wrap="square" anchor="ctr" lIns="45720" rIns="45720" tIns="27432" bIns="27432">
             <a:spAutoFit/>
           </a:bodyPr>
           <a:lstStyle/>
@@ -6900,27 +6832,27 @@
               </a:lnSpc>
             </a:pPr>
             <a:r>
-              <a:rPr sz="2600" b="1">
+              <a:rPr sz="2400" b="1">
                 <a:solidFill>
                   <a:srgbClr val="0C3D2B"/>
                 </a:solidFill>
                 <a:latin typeface="Calibri"/>
               </a:rPr>
-              <a:t>Maturity and next steps</a:t>
-            </a:r>
-          </a:p>
-        </p:txBody>
-      </p:sp>
-      <p:sp>
-        <p:nvSpPr>
-          <p:cNvPr id="7" name="TextBox 6"/>
+              <a:t>Needs</a:t>
+            </a:r>
+          </a:p>
+        </p:txBody>
+      </p:sp>
+      <p:sp>
+        <p:nvSpPr>
+          <p:cNvPr id="9" name="TextBox 8"/>
           <p:cNvSpPr txBox="1"/>
           <p:nvPr/>
         </p:nvSpPr>
         <p:spPr>
           <a:xfrm>
-            <a:off x="6309360" y="2606040"/>
-            <a:ext cx="5212080" cy="3474720"/>
+            <a:off x="3246120" y="3154679"/>
+            <a:ext cx="8092440" cy="914400"/>
           </a:xfrm>
           <a:prstGeom prst="rect">
             <a:avLst/>
@@ -6928,122 +6860,82 @@
           <a:noFill/>
         </p:spPr>
         <p:txBody>
-          <a:bodyPr wrap="square" anchor="t" lIns="45720" rIns="45720" tIns="27432" bIns="27432">
+          <a:bodyPr wrap="square" anchor="ctr" lIns="45720" rIns="45720" tIns="27432" bIns="27432">
             <a:spAutoFit/>
           </a:bodyPr>
           <a:lstStyle/>
           <a:p>
             <a:pPr algn="l">
               <a:lnSpc>
-                <a:spcPct val="130000"/>
+                <a:spcPct val="100000"/>
               </a:lnSpc>
             </a:pPr>
             <a:r>
-              <a:rPr sz="2400" b="1">
-                <a:solidFill>
-                  <a:srgbClr val="0C3D2B"/>
+              <a:rPr sz="2200" b="0">
+                <a:solidFill>
+                  <a:srgbClr val="0F2419"/>
                 </a:solidFill>
                 <a:latin typeface="Calibri"/>
               </a:rPr>
-              <a:t>Now: </a:t>
-            </a:r>
-            <a:r>
-              <a:rPr sz="2400" b="0">
-                <a:solidFill>
-                  <a:srgbClr val="0F2419"/>
-                </a:solidFill>
-                <a:latin typeface="Calibri"/>
-              </a:rPr>
-              <a:t>end-to-end prototype, 4 projects, NFTs on Base Sepolia</a:t>
-            </a:r>
-          </a:p>
-          <a:p>
-            <a:pPr algn="l">
-              <a:lnSpc>
-                <a:spcPct val="130000"/>
-              </a:lnSpc>
-            </a:pPr>
-            <a:r>
-              <a:rPr sz="2400" b="1">
-                <a:solidFill>
-                  <a:srgbClr val="0C3D2B"/>
-                </a:solidFill>
-                <a:latin typeface="Calibri"/>
-              </a:rPr>
-              <a:t>Next: </a:t>
-            </a:r>
-            <a:r>
-              <a:rPr sz="2400" b="0">
-                <a:solidFill>
-                  <a:srgbClr val="0F2419"/>
-                </a:solidFill>
-                <a:latin typeface="Calibri"/>
-              </a:rPr>
-              <a:t>real project carbon data instead of assumptions</a:t>
-            </a:r>
-          </a:p>
-          <a:p>
-            <a:pPr algn="l">
-              <a:lnSpc>
-                <a:spcPct val="130000"/>
-              </a:lnSpc>
-            </a:pPr>
-            <a:r>
-              <a:rPr sz="2400" b="1">
-                <a:solidFill>
-                  <a:srgbClr val="0C3D2B"/>
-                </a:solidFill>
-                <a:latin typeface="Calibri"/>
-              </a:rPr>
-              <a:t>Then: </a:t>
-            </a:r>
-            <a:r>
-              <a:rPr sz="2400" b="0">
-                <a:solidFill>
-                  <a:srgbClr val="0F2419"/>
-                </a:solidFill>
-                <a:latin typeface="Calibri"/>
-              </a:rPr>
-              <a:t>validate against audited projects</a:t>
-            </a:r>
-          </a:p>
-          <a:p>
-            <a:pPr algn="l">
-              <a:lnSpc>
-                <a:spcPct val="130000"/>
-              </a:lnSpc>
-            </a:pPr>
-            <a:r>
-              <a:rPr sz="2400" b="1">
-                <a:solidFill>
-                  <a:srgbClr val="0C3D2B"/>
-                </a:solidFill>
-                <a:latin typeface="Calibri"/>
-              </a:rPr>
-              <a:t>Later: </a:t>
-            </a:r>
-            <a:r>
-              <a:rPr sz="2400" b="0">
-                <a:solidFill>
-                  <a:srgbClr val="0F2419"/>
-                </a:solidFill>
-                <a:latin typeface="Calibri"/>
-              </a:rPr>
-              <a:t>quantum steps as hardware matures</a:t>
-            </a:r>
-          </a:p>
-        </p:txBody>
-      </p:sp>
-      <p:sp>
-        <p:nvSpPr>
-          <p:cNvPr id="8" name="TextBox 7"/>
+              <a:t>Error-corrected hardware: gates about 3,000x more accurate than today's.</a:t>
+            </a:r>
+          </a:p>
+        </p:txBody>
+      </p:sp>
+      <p:sp>
+        <p:nvSpPr>
+          <p:cNvPr id="10" name="Rectangle 9"/>
+          <p:cNvSpPr/>
+          <p:nvPr/>
+        </p:nvSpPr>
+        <p:spPr>
+          <a:xfrm>
+            <a:off x="685800" y="4206240"/>
+            <a:ext cx="10835640" cy="914400"/>
+          </a:xfrm>
+          <a:prstGeom prst="rect">
+            <a:avLst/>
+          </a:prstGeom>
+          <a:solidFill>
+            <a:srgbClr val="E6F4EC"/>
+          </a:solidFill>
+          <a:ln>
+            <a:noFill/>
+          </a:ln>
+          <a:effectLst/>
+        </p:spPr>
+        <p:style>
+          <a:lnRef idx="1">
+            <a:schemeClr val="accent1"/>
+          </a:lnRef>
+          <a:fillRef idx="3">
+            <a:schemeClr val="accent1"/>
+          </a:fillRef>
+          <a:effectRef idx="2">
+            <a:schemeClr val="accent1"/>
+          </a:effectRef>
+          <a:fontRef idx="minor">
+            <a:schemeClr val="lt1"/>
+          </a:fontRef>
+        </p:style>
+        <p:txBody>
+          <a:bodyPr rtlCol="0" anchor="ctr"/>
+          <a:lstStyle/>
+          <a:p>
+            <a:pPr algn="ctr"/>
+          </a:p>
+        </p:txBody>
+      </p:sp>
+      <p:sp>
+        <p:nvSpPr>
+          <p:cNvPr id="11" name="TextBox 10"/>
           <p:cNvSpPr txBox="1"/>
           <p:nvPr/>
         </p:nvSpPr>
         <p:spPr>
           <a:xfrm>
-            <a:off x="640080" y="6400800"/>
-            <a:ext cx="5486400" cy="274320"/>
+            <a:off x="868680" y="4206240"/>
+            <a:ext cx="2377440" cy="914400"/>
           </a:xfrm>
           <a:prstGeom prst="rect">
             <a:avLst/>
@@ -7051,7 +6943,7 @@
           <a:noFill/>
         </p:spPr>
         <p:txBody>
-          <a:bodyPr wrap="square" anchor="t" lIns="45720" rIns="45720" tIns="27432" bIns="27432">
+          <a:bodyPr wrap="square" anchor="ctr" lIns="45720" rIns="45720" tIns="27432" bIns="27432">
             <a:spAutoFit/>
           </a:bodyPr>
           <a:lstStyle/>
@@ -7062,6 +6954,206 @@
               </a:lnSpc>
             </a:pPr>
             <a:r>
+              <a:rPr sz="2400" b="1">
+                <a:solidFill>
+                  <a:srgbClr val="0C3D2B"/>
+                </a:solidFill>
+                <a:latin typeface="Calibri"/>
+              </a:rPr>
+              <a:t>Then</a:t>
+            </a:r>
+          </a:p>
+        </p:txBody>
+      </p:sp>
+      <p:sp>
+        <p:nvSpPr>
+          <p:cNvPr id="12" name="TextBox 11"/>
+          <p:cNvSpPr txBox="1"/>
+          <p:nvPr/>
+        </p:nvSpPr>
+        <p:spPr>
+          <a:xfrm>
+            <a:off x="3246120" y="4206240"/>
+            <a:ext cx="8092440" cy="914400"/>
+          </a:xfrm>
+          <a:prstGeom prst="rect">
+            <a:avLst/>
+          </a:prstGeom>
+          <a:noFill/>
+        </p:spPr>
+        <p:txBody>
+          <a:bodyPr wrap="square" anchor="ctr" lIns="45720" rIns="45720" tIns="27432" bIns="27432">
+            <a:spAutoFit/>
+          </a:bodyPr>
+          <a:lstStyle/>
+          <a:p>
+            <a:pPr algn="l">
+              <a:lnSpc>
+                <a:spcPct val="100000"/>
+              </a:lnSpc>
+            </a:pPr>
+            <a:r>
+              <a:rPr sz="2200" b="0">
+                <a:solidFill>
+                  <a:srgbClr val="0F2419"/>
+                </a:solidFill>
+                <a:latin typeface="Calibri"/>
+              </a:rPr>
+              <a:t>QAE needs 2,000 runs where Monte Carlo needs 98,000 for plus or minus 1%. Thousands of projects, weekly.</a:t>
+            </a:r>
+          </a:p>
+        </p:txBody>
+      </p:sp>
+      <p:sp>
+        <p:nvSpPr>
+          <p:cNvPr id="13" name="Rectangle 12"/>
+          <p:cNvSpPr/>
+          <p:nvPr/>
+        </p:nvSpPr>
+        <p:spPr>
+          <a:xfrm>
+            <a:off x="685800" y="5257800"/>
+            <a:ext cx="10835640" cy="914400"/>
+          </a:xfrm>
+          <a:prstGeom prst="rect">
+            <a:avLst/>
+          </a:prstGeom>
+          <a:solidFill>
+            <a:srgbClr val="E6F4EC"/>
+          </a:solidFill>
+          <a:ln>
+            <a:noFill/>
+          </a:ln>
+          <a:effectLst/>
+        </p:spPr>
+        <p:style>
+          <a:lnRef idx="1">
+            <a:schemeClr val="accent1"/>
+          </a:lnRef>
+          <a:fillRef idx="3">
+            <a:schemeClr val="accent1"/>
+          </a:fillRef>
+          <a:effectRef idx="2">
+            <a:schemeClr val="accent1"/>
+          </a:effectRef>
+          <a:fontRef idx="minor">
+            <a:schemeClr val="lt1"/>
+          </a:fontRef>
+        </p:style>
+        <p:txBody>
+          <a:bodyPr rtlCol="0" anchor="ctr"/>
+          <a:lstStyle/>
+          <a:p>
+            <a:pPr algn="ctr"/>
+          </a:p>
+        </p:txBody>
+      </p:sp>
+      <p:sp>
+        <p:nvSpPr>
+          <p:cNvPr id="14" name="TextBox 13"/>
+          <p:cNvSpPr txBox="1"/>
+          <p:nvPr/>
+        </p:nvSpPr>
+        <p:spPr>
+          <a:xfrm>
+            <a:off x="868680" y="5257800"/>
+            <a:ext cx="2377440" cy="914400"/>
+          </a:xfrm>
+          <a:prstGeom prst="rect">
+            <a:avLst/>
+          </a:prstGeom>
+          <a:noFill/>
+        </p:spPr>
+        <p:txBody>
+          <a:bodyPr wrap="square" anchor="ctr" lIns="45720" rIns="45720" tIns="27432" bIns="27432">
+            <a:spAutoFit/>
+          </a:bodyPr>
+          <a:lstStyle/>
+          <a:p>
+            <a:pPr algn="l">
+              <a:lnSpc>
+                <a:spcPct val="105000"/>
+              </a:lnSpc>
+            </a:pPr>
+            <a:r>
+              <a:rPr sz="2400" b="1">
+                <a:solidFill>
+                  <a:srgbClr val="0C3D2B"/>
+                </a:solidFill>
+                <a:latin typeface="Calibri"/>
+              </a:rPr>
+              <a:t>Until then</a:t>
+            </a:r>
+          </a:p>
+        </p:txBody>
+      </p:sp>
+      <p:sp>
+        <p:nvSpPr>
+          <p:cNvPr id="15" name="TextBox 14"/>
+          <p:cNvSpPr txBox="1"/>
+          <p:nvPr/>
+        </p:nvSpPr>
+        <p:spPr>
+          <a:xfrm>
+            <a:off x="3246120" y="5257800"/>
+            <a:ext cx="8092440" cy="914400"/>
+          </a:xfrm>
+          <a:prstGeom prst="rect">
+            <a:avLst/>
+          </a:prstGeom>
+          <a:noFill/>
+        </p:spPr>
+        <p:txBody>
+          <a:bodyPr wrap="square" anchor="ctr" lIns="45720" rIns="45720" tIns="27432" bIns="27432">
+            <a:spAutoFit/>
+          </a:bodyPr>
+          <a:lstStyle/>
+          <a:p>
+            <a:pPr algn="l">
+              <a:lnSpc>
+                <a:spcPct val="100000"/>
+              </a:lnSpc>
+            </a:pPr>
+            <a:r>
+              <a:rPr sz="2200" b="0">
+                <a:solidFill>
+                  <a:srgbClr val="0F2419"/>
+                </a:solidFill>
+                <a:latin typeface="Calibri"/>
+              </a:rPr>
+              <a:t>Classical methods win at every size we can run.</a:t>
+            </a:r>
+          </a:p>
+        </p:txBody>
+      </p:sp>
+      <p:sp>
+        <p:nvSpPr>
+          <p:cNvPr id="16" name="TextBox 15"/>
+          <p:cNvSpPr txBox="1"/>
+          <p:nvPr/>
+        </p:nvSpPr>
+        <p:spPr>
+          <a:xfrm>
+            <a:off x="640080" y="6400800"/>
+            <a:ext cx="5486400" cy="274320"/>
+          </a:xfrm>
+          <a:prstGeom prst="rect">
+            <a:avLst/>
+          </a:prstGeom>
+          <a:noFill/>
+        </p:spPr>
+        <p:txBody>
+          <a:bodyPr wrap="square" anchor="t" lIns="45720" rIns="45720" tIns="27432" bIns="27432">
+            <a:spAutoFit/>
+          </a:bodyPr>
+          <a:lstStyle/>
+          <a:p>
+            <a:pPr algn="l">
+              <a:lnSpc>
+                <a:spcPct val="105000"/>
+              </a:lnSpc>
+            </a:pPr>
+            <a:r>
               <a:rPr sz="1200" b="0">
                 <a:solidFill>
                   <a:srgbClr val="587063"/>
@@ -7075,7 +7167,7 @@
       </p:sp>
       <p:sp>
         <p:nvSpPr>
-          <p:cNvPr id="9" name="TextBox 8"/>
+          <p:cNvPr id="17" name="TextBox 16"/>
           <p:cNvSpPr txBox="1"/>
           <p:nvPr/>
         </p:nvSpPr>
@@ -7164,7 +7256,7 @@
                 </a:solidFill>
                 <a:latin typeface="Calibri"/>
               </a:rPr>
-              <a:t>From matching engine to a live public verdict</a:t>
+              <a:t>Who pays: the people who rely on credits</a:t>
             </a:r>
           </a:p>
         </p:txBody>
@@ -7215,234 +7307,14 @@
       </p:sp>
       <p:sp>
         <p:nvSpPr>
-          <p:cNvPr id="4" name="TextBox 3"/>
-          <p:cNvSpPr txBox="1"/>
-          <p:nvPr/>
-        </p:nvSpPr>
-        <p:spPr>
-          <a:xfrm>
-            <a:off x="685800" y="2103120"/>
-            <a:ext cx="3931920" cy="457200"/>
-          </a:xfrm>
-          <a:prstGeom prst="rect">
-            <a:avLst/>
-          </a:prstGeom>
-          <a:noFill/>
-        </p:spPr>
-        <p:txBody>
-          <a:bodyPr wrap="square" anchor="t" lIns="45720" rIns="45720" tIns="27432" bIns="27432">
-            <a:spAutoFit/>
-          </a:bodyPr>
-          <a:lstStyle/>
-          <a:p>
-            <a:pPr algn="l">
-              <a:lnSpc>
-                <a:spcPct val="105000"/>
-              </a:lnSpc>
-            </a:pPr>
-            <a:r>
-              <a:rPr sz="2600" b="1">
-                <a:solidFill>
-                  <a:srgbClr val="0C3D2B"/>
-                </a:solidFill>
-                <a:latin typeface="Calibri"/>
-              </a:rPr>
-              <a:t>Started with</a:t>
-            </a:r>
-          </a:p>
-        </p:txBody>
-      </p:sp>
-      <p:sp>
-        <p:nvSpPr>
-          <p:cNvPr id="5" name="TextBox 4"/>
-          <p:cNvSpPr txBox="1"/>
-          <p:nvPr/>
-        </p:nvSpPr>
-        <p:spPr>
-          <a:xfrm>
-            <a:off x="685800" y="2606040"/>
-            <a:ext cx="3931920" cy="2377440"/>
-          </a:xfrm>
-          <a:prstGeom prst="rect">
-            <a:avLst/>
-          </a:prstGeom>
-          <a:noFill/>
-        </p:spPr>
-        <p:txBody>
-          <a:bodyPr wrap="square" anchor="t" lIns="45720" rIns="45720" tIns="27432" bIns="27432">
-            <a:spAutoFit/>
-          </a:bodyPr>
-          <a:lstStyle/>
-          <a:p>
-            <a:pPr algn="l">
-              <a:lnSpc>
-                <a:spcPct val="120000"/>
-              </a:lnSpc>
-            </a:pPr>
-            <a:r>
-              <a:rPr sz="2200" b="0">
-                <a:solidFill>
-                  <a:srgbClr val="0F2419"/>
-                </a:solidFill>
-                <a:latin typeface="Calibri"/>
-              </a:rPr>
-              <a:t>Parcel-matching engine: finds forest that looks like the project</a:t>
-            </a:r>
-          </a:p>
-        </p:txBody>
-      </p:sp>
-      <p:sp>
-        <p:nvSpPr>
-          <p:cNvPr id="6" name="TextBox 5"/>
-          <p:cNvSpPr txBox="1"/>
-          <p:nvPr/>
-        </p:nvSpPr>
-        <p:spPr>
-          <a:xfrm>
-            <a:off x="4937760" y="2103120"/>
-            <a:ext cx="6583680" cy="457200"/>
-          </a:xfrm>
-          <a:prstGeom prst="rect">
-            <a:avLst/>
-          </a:prstGeom>
-          <a:noFill/>
-        </p:spPr>
-        <p:txBody>
-          <a:bodyPr wrap="square" anchor="t" lIns="45720" rIns="45720" tIns="27432" bIns="27432">
-            <a:spAutoFit/>
-          </a:bodyPr>
-          <a:lstStyle/>
-          <a:p>
-            <a:pPr algn="l">
-              <a:lnSpc>
-                <a:spcPct val="105000"/>
-              </a:lnSpc>
-            </a:pPr>
-            <a:r>
-              <a:rPr sz="2600" b="1">
-                <a:solidFill>
-                  <a:srgbClr val="0C3D2B"/>
-                </a:solidFill>
-                <a:latin typeface="Calibri"/>
-              </a:rPr>
-              <a:t>Built at the event</a:t>
-            </a:r>
-          </a:p>
-        </p:txBody>
-      </p:sp>
-      <p:sp>
-        <p:nvSpPr>
-          <p:cNvPr id="7" name="TextBox 6"/>
-          <p:cNvSpPr txBox="1"/>
-          <p:nvPr/>
-        </p:nvSpPr>
-        <p:spPr>
-          <a:xfrm>
-            <a:off x="4937760" y="2606040"/>
-            <a:ext cx="6583680" cy="2743200"/>
-          </a:xfrm>
-          <a:prstGeom prst="rect">
-            <a:avLst/>
-          </a:prstGeom>
-          <a:noFill/>
-        </p:spPr>
-        <p:txBody>
-          <a:bodyPr wrap="square" anchor="t" lIns="45720" rIns="45720" tIns="27432" bIns="27432">
-            <a:spAutoFit/>
-          </a:bodyPr>
-          <a:lstStyle/>
-          <a:p>
-            <a:pPr algn="l">
-              <a:lnSpc>
-                <a:spcPct val="115000"/>
-              </a:lnSpc>
-            </a:pPr>
-            <a:r>
-              <a:rPr sz="2100" b="0">
-                <a:solidFill>
-                  <a:srgbClr val="0F2419"/>
-                </a:solidFill>
-                <a:latin typeface="Calibri"/>
-              </a:rPr>
-              <a:t>Quantum selection, run on IBM Fez, benchmarked against classical</a:t>
-            </a:r>
-          </a:p>
-          <a:p>
-            <a:pPr algn="l">
-              <a:lnSpc>
-                <a:spcPct val="115000"/>
-              </a:lnSpc>
-            </a:pPr>
-            <a:r>
-              <a:rPr sz="2100" b="0">
-                <a:solidFill>
-                  <a:srgbClr val="0F2419"/>
-                </a:solidFill>
-                <a:latin typeface="Calibri"/>
-              </a:rPr>
-              <a:t>Weekly radar monitoring and avoided CO2e</a:t>
-            </a:r>
-          </a:p>
-          <a:p>
-            <a:pPr algn="l">
-              <a:lnSpc>
-                <a:spcPct val="115000"/>
-              </a:lnSpc>
-            </a:pPr>
-            <a:r>
-              <a:rPr sz="2100" b="0">
-                <a:solidFill>
-                  <a:srgbClr val="0F2419"/>
-                </a:solidFill>
-                <a:latin typeface="Calibri"/>
-              </a:rPr>
-              <a:t>Amplitude estimation simulation</a:t>
-            </a:r>
-          </a:p>
-          <a:p>
-            <a:pPr algn="l">
-              <a:lnSpc>
-                <a:spcPct val="115000"/>
-              </a:lnSpc>
-            </a:pPr>
-            <a:r>
-              <a:rPr sz="2100" b="0">
-                <a:solidFill>
-                  <a:srgbClr val="0F2419"/>
-                </a:solidFill>
-                <a:latin typeface="Calibri"/>
-              </a:rPr>
-              <a:t>Five-status NFT on Base Sepolia</a:t>
-            </a:r>
-          </a:p>
-          <a:p>
-            <a:pPr algn="l">
-              <a:lnSpc>
-                <a:spcPct val="115000"/>
-              </a:lnSpc>
-            </a:pPr>
-            <a:r>
-              <a:rPr sz="2100" b="0">
-                <a:solidFill>
-                  <a:srgbClr val="0F2419"/>
-                </a:solidFill>
-                <a:latin typeface="Calibri"/>
-              </a:rPr>
-              <a:t>Dashboard: upload a project, no code</a:t>
-            </a:r>
-          </a:p>
-        </p:txBody>
-      </p:sp>
-      <p:sp>
-        <p:nvSpPr>
-          <p:cNvPr id="8" name="Rectangle 7"/>
+          <p:cNvPr id="4" name="Rectangle 3"/>
           <p:cNvSpPr/>
           <p:nvPr/>
         </p:nvSpPr>
         <p:spPr>
           <a:xfrm>
-            <a:off x="685800" y="5257800"/>
-            <a:ext cx="10835640" cy="685800"/>
+            <a:off x="685800" y="2194560"/>
+            <a:ext cx="10835640" cy="658368"/>
           </a:xfrm>
           <a:prstGeom prst="rect">
             <a:avLst/>
@@ -7479,14 +7351,14 @@
       </p:sp>
       <p:sp>
         <p:nvSpPr>
-          <p:cNvPr id="9" name="TextBox 8"/>
+          <p:cNvPr id="5" name="TextBox 4"/>
           <p:cNvSpPr txBox="1"/>
           <p:nvPr/>
         </p:nvSpPr>
         <p:spPr>
           <a:xfrm>
-            <a:off x="868680" y="5257800"/>
-            <a:ext cx="10469880" cy="685800"/>
+            <a:off x="868680" y="2194560"/>
+            <a:ext cx="2377440" cy="658368"/>
           </a:xfrm>
           <a:prstGeom prst="rect">
             <a:avLst/>
@@ -7505,36 +7377,110 @@
               </a:lnSpc>
             </a:pPr>
             <a:r>
-              <a:rPr sz="1900" b="1">
+              <a:rPr sz="2200" b="1">
                 <a:solidFill>
                   <a:srgbClr val="0C3D2B"/>
                 </a:solidFill>
                 <a:latin typeface="Calibri"/>
               </a:rPr>
-              <a:t>Built on: </a:t>
-            </a:r>
-            <a:r>
-              <a:rPr sz="1900" b="0">
+              <a:t>Customers</a:t>
+            </a:r>
+          </a:p>
+        </p:txBody>
+      </p:sp>
+      <p:sp>
+        <p:nvSpPr>
+          <p:cNvPr id="6" name="TextBox 5"/>
+          <p:cNvSpPr txBox="1"/>
+          <p:nvPr/>
+        </p:nvSpPr>
+        <p:spPr>
+          <a:xfrm>
+            <a:off x="3246120" y="2194560"/>
+            <a:ext cx="8092440" cy="658368"/>
+          </a:xfrm>
+          <a:prstGeom prst="rect">
+            <a:avLst/>
+          </a:prstGeom>
+          <a:noFill/>
+        </p:spPr>
+        <p:txBody>
+          <a:bodyPr wrap="square" anchor="ctr" lIns="45720" rIns="45720" tIns="27432" bIns="27432">
+            <a:spAutoFit/>
+          </a:bodyPr>
+          <a:lstStyle/>
+          <a:p>
+            <a:pPr algn="l">
+              <a:lnSpc>
+                <a:spcPct val="100000"/>
+              </a:lnSpc>
+            </a:pPr>
+            <a:r>
+              <a:rPr sz="2000" b="0">
                 <a:solidFill>
                   <a:srgbClr val="0F2419"/>
                 </a:solidFill>
                 <a:latin typeface="Calibri"/>
               </a:rPr>
-              <a:t>Google Earth Engine · RADD radar alerts · Qiskit · IBM Quantum · Base Sepolia · IPFS</a:t>
-            </a:r>
-          </a:p>
-        </p:txBody>
-      </p:sp>
-      <p:sp>
-        <p:nvSpPr>
-          <p:cNvPr id="10" name="TextBox 9"/>
+              <a:t>Credit buyers, registries, insurers, banks.</a:t>
+            </a:r>
+          </a:p>
+        </p:txBody>
+      </p:sp>
+      <p:sp>
+        <p:nvSpPr>
+          <p:cNvPr id="7" name="Rectangle 6"/>
+          <p:cNvSpPr/>
+          <p:nvPr/>
+        </p:nvSpPr>
+        <p:spPr>
+          <a:xfrm>
+            <a:off x="685800" y="2962656"/>
+            <a:ext cx="10835640" cy="658368"/>
+          </a:xfrm>
+          <a:prstGeom prst="rect">
+            <a:avLst/>
+          </a:prstGeom>
+          <a:solidFill>
+            <a:srgbClr val="E6F4EC"/>
+          </a:solidFill>
+          <a:ln>
+            <a:noFill/>
+          </a:ln>
+          <a:effectLst/>
+        </p:spPr>
+        <p:style>
+          <a:lnRef idx="1">
+            <a:schemeClr val="accent1"/>
+          </a:lnRef>
+          <a:fillRef idx="3">
+            <a:schemeClr val="accent1"/>
+          </a:fillRef>
+          <a:effectRef idx="2">
+            <a:schemeClr val="accent1"/>
+          </a:effectRef>
+          <a:fontRef idx="minor">
+            <a:schemeClr val="lt1"/>
+          </a:fontRef>
+        </p:style>
+        <p:txBody>
+          <a:bodyPr rtlCol="0" anchor="ctr"/>
+          <a:lstStyle/>
+          <a:p>
+            <a:pPr algn="ctr"/>
+          </a:p>
+        </p:txBody>
+      </p:sp>
+      <p:sp>
+        <p:nvSpPr>
+          <p:cNvPr id="8" name="TextBox 7"/>
           <p:cNvSpPr txBox="1"/>
           <p:nvPr/>
         </p:nvSpPr>
         <p:spPr>
           <a:xfrm>
-            <a:off x="685800" y="5989320"/>
-            <a:ext cx="10835640" cy="457200"/>
+            <a:off x="868680" y="2962656"/>
+            <a:ext cx="2377440" cy="658368"/>
           </a:xfrm>
           <a:prstGeom prst="rect">
             <a:avLst/>
@@ -7542,7 +7488,7 @@
           <a:noFill/>
         </p:spPr>
         <p:txBody>
-          <a:bodyPr wrap="square" anchor="t" lIns="45720" rIns="45720" tIns="27432" bIns="27432">
+          <a:bodyPr wrap="square" anchor="ctr" lIns="45720" rIns="45720" tIns="27432" bIns="27432">
             <a:spAutoFit/>
           </a:bodyPr>
           <a:lstStyle/>
@@ -7553,13 +7499,457 @@
               </a:lnSpc>
             </a:pPr>
             <a:r>
-              <a:rPr sz="2600" b="1">
+              <a:rPr sz="2200" b="1">
                 <a:solidFill>
                   <a:srgbClr val="0C3D2B"/>
                 </a:solidFill>
                 <a:latin typeface="Calibri"/>
               </a:rPr>
-              <a:t>Trust in carbon credits, checked every week.</a:t>
+              <a:t>Revenue</a:t>
+            </a:r>
+          </a:p>
+        </p:txBody>
+      </p:sp>
+      <p:sp>
+        <p:nvSpPr>
+          <p:cNvPr id="9" name="TextBox 8"/>
+          <p:cNvSpPr txBox="1"/>
+          <p:nvPr/>
+        </p:nvSpPr>
+        <p:spPr>
+          <a:xfrm>
+            <a:off x="3246120" y="2962656"/>
+            <a:ext cx="8092440" cy="658368"/>
+          </a:xfrm>
+          <a:prstGeom prst="rect">
+            <a:avLst/>
+          </a:prstGeom>
+          <a:noFill/>
+        </p:spPr>
+        <p:txBody>
+          <a:bodyPr wrap="square" anchor="ctr" lIns="45720" rIns="45720" tIns="27432" bIns="27432">
+            <a:spAutoFit/>
+          </a:bodyPr>
+          <a:lstStyle/>
+          <a:p>
+            <a:pPr algn="l">
+              <a:lnSpc>
+                <a:spcPct val="100000"/>
+              </a:lnSpc>
+            </a:pPr>
+            <a:r>
+              <a:rPr sz="2000" b="0">
+                <a:solidFill>
+                  <a:srgbClr val="0F2419"/>
+                </a:solidFill>
+                <a:latin typeface="Calibri"/>
+              </a:rPr>
+              <a:t>Subscription per monitored project.</a:t>
+            </a:r>
+          </a:p>
+        </p:txBody>
+      </p:sp>
+      <p:sp>
+        <p:nvSpPr>
+          <p:cNvPr id="10" name="Rectangle 9"/>
+          <p:cNvSpPr/>
+          <p:nvPr/>
+        </p:nvSpPr>
+        <p:spPr>
+          <a:xfrm>
+            <a:off x="685800" y="3730752"/>
+            <a:ext cx="10835640" cy="658368"/>
+          </a:xfrm>
+          <a:prstGeom prst="rect">
+            <a:avLst/>
+          </a:prstGeom>
+          <a:solidFill>
+            <a:srgbClr val="E6F4EC"/>
+          </a:solidFill>
+          <a:ln>
+            <a:noFill/>
+          </a:ln>
+          <a:effectLst/>
+        </p:spPr>
+        <p:style>
+          <a:lnRef idx="1">
+            <a:schemeClr val="accent1"/>
+          </a:lnRef>
+          <a:fillRef idx="3">
+            <a:schemeClr val="accent1"/>
+          </a:fillRef>
+          <a:effectRef idx="2">
+            <a:schemeClr val="accent1"/>
+          </a:effectRef>
+          <a:fontRef idx="minor">
+            <a:schemeClr val="lt1"/>
+          </a:fontRef>
+        </p:style>
+        <p:txBody>
+          <a:bodyPr rtlCol="0" anchor="ctr"/>
+          <a:lstStyle/>
+          <a:p>
+            <a:pPr algn="ctr"/>
+          </a:p>
+        </p:txBody>
+      </p:sp>
+      <p:sp>
+        <p:nvSpPr>
+          <p:cNvPr id="11" name="TextBox 10"/>
+          <p:cNvSpPr txBox="1"/>
+          <p:nvPr/>
+        </p:nvSpPr>
+        <p:spPr>
+          <a:xfrm>
+            <a:off x="868680" y="3730752"/>
+            <a:ext cx="2377440" cy="658368"/>
+          </a:xfrm>
+          <a:prstGeom prst="rect">
+            <a:avLst/>
+          </a:prstGeom>
+          <a:noFill/>
+        </p:spPr>
+        <p:txBody>
+          <a:bodyPr wrap="square" anchor="ctr" lIns="45720" rIns="45720" tIns="27432" bIns="27432">
+            <a:spAutoFit/>
+          </a:bodyPr>
+          <a:lstStyle/>
+          <a:p>
+            <a:pPr algn="l">
+              <a:lnSpc>
+                <a:spcPct val="105000"/>
+              </a:lnSpc>
+            </a:pPr>
+            <a:r>
+              <a:rPr sz="2200" b="1">
+                <a:solidFill>
+                  <a:srgbClr val="0C3D2B"/>
+                </a:solidFill>
+                <a:latin typeface="Calibri"/>
+              </a:rPr>
+              <a:t>Status</a:t>
+            </a:r>
+          </a:p>
+        </p:txBody>
+      </p:sp>
+      <p:sp>
+        <p:nvSpPr>
+          <p:cNvPr id="12" name="TextBox 11"/>
+          <p:cNvSpPr txBox="1"/>
+          <p:nvPr/>
+        </p:nvSpPr>
+        <p:spPr>
+          <a:xfrm>
+            <a:off x="3246120" y="3730752"/>
+            <a:ext cx="8092440" cy="658368"/>
+          </a:xfrm>
+          <a:prstGeom prst="rect">
+            <a:avLst/>
+          </a:prstGeom>
+          <a:noFill/>
+        </p:spPr>
+        <p:txBody>
+          <a:bodyPr wrap="square" anchor="ctr" lIns="45720" rIns="45720" tIns="27432" bIns="27432">
+            <a:spAutoFit/>
+          </a:bodyPr>
+          <a:lstStyle/>
+          <a:p>
+            <a:pPr algn="l">
+              <a:lnSpc>
+                <a:spcPct val="100000"/>
+              </a:lnSpc>
+            </a:pPr>
+            <a:r>
+              <a:rPr sz="2000" b="0">
+                <a:solidFill>
+                  <a:srgbClr val="0F2419"/>
+                </a:solidFill>
+                <a:latin typeface="Calibri"/>
+              </a:rPr>
+              <a:t>Prototype on 4 projects. NFTs on Base Sepolia (test network).</a:t>
+            </a:r>
+          </a:p>
+        </p:txBody>
+      </p:sp>
+      <p:sp>
+        <p:nvSpPr>
+          <p:cNvPr id="13" name="Rectangle 12"/>
+          <p:cNvSpPr/>
+          <p:nvPr/>
+        </p:nvSpPr>
+        <p:spPr>
+          <a:xfrm>
+            <a:off x="685800" y="4498848"/>
+            <a:ext cx="10835640" cy="658368"/>
+          </a:xfrm>
+          <a:prstGeom prst="rect">
+            <a:avLst/>
+          </a:prstGeom>
+          <a:solidFill>
+            <a:srgbClr val="E6F4EC"/>
+          </a:solidFill>
+          <a:ln>
+            <a:noFill/>
+          </a:ln>
+          <a:effectLst/>
+        </p:spPr>
+        <p:style>
+          <a:lnRef idx="1">
+            <a:schemeClr val="accent1"/>
+          </a:lnRef>
+          <a:fillRef idx="3">
+            <a:schemeClr val="accent1"/>
+          </a:fillRef>
+          <a:effectRef idx="2">
+            <a:schemeClr val="accent1"/>
+          </a:effectRef>
+          <a:fontRef idx="minor">
+            <a:schemeClr val="lt1"/>
+          </a:fontRef>
+        </p:style>
+        <p:txBody>
+          <a:bodyPr rtlCol="0" anchor="ctr"/>
+          <a:lstStyle/>
+          <a:p>
+            <a:pPr algn="ctr"/>
+          </a:p>
+        </p:txBody>
+      </p:sp>
+      <p:sp>
+        <p:nvSpPr>
+          <p:cNvPr id="14" name="TextBox 13"/>
+          <p:cNvSpPr txBox="1"/>
+          <p:nvPr/>
+        </p:nvSpPr>
+        <p:spPr>
+          <a:xfrm>
+            <a:off x="868680" y="4498848"/>
+            <a:ext cx="2377440" cy="658368"/>
+          </a:xfrm>
+          <a:prstGeom prst="rect">
+            <a:avLst/>
+          </a:prstGeom>
+          <a:noFill/>
+        </p:spPr>
+        <p:txBody>
+          <a:bodyPr wrap="square" anchor="ctr" lIns="45720" rIns="45720" tIns="27432" bIns="27432">
+            <a:spAutoFit/>
+          </a:bodyPr>
+          <a:lstStyle/>
+          <a:p>
+            <a:pPr algn="l">
+              <a:lnSpc>
+                <a:spcPct val="105000"/>
+              </a:lnSpc>
+            </a:pPr>
+            <a:r>
+              <a:rPr sz="2200" b="1">
+                <a:solidFill>
+                  <a:srgbClr val="0C3D2B"/>
+                </a:solidFill>
+                <a:latin typeface="Calibri"/>
+              </a:rPr>
+              <a:t>Built here</a:t>
+            </a:r>
+          </a:p>
+        </p:txBody>
+      </p:sp>
+      <p:sp>
+        <p:nvSpPr>
+          <p:cNvPr id="15" name="TextBox 14"/>
+          <p:cNvSpPr txBox="1"/>
+          <p:nvPr/>
+        </p:nvSpPr>
+        <p:spPr>
+          <a:xfrm>
+            <a:off x="3246120" y="4498848"/>
+            <a:ext cx="8092440" cy="658368"/>
+          </a:xfrm>
+          <a:prstGeom prst="rect">
+            <a:avLst/>
+          </a:prstGeom>
+          <a:noFill/>
+        </p:spPr>
+        <p:txBody>
+          <a:bodyPr wrap="square" anchor="ctr" lIns="45720" rIns="45720" tIns="27432" bIns="27432">
+            <a:spAutoFit/>
+          </a:bodyPr>
+          <a:lstStyle/>
+          <a:p>
+            <a:pPr algn="l">
+              <a:lnSpc>
+                <a:spcPct val="100000"/>
+              </a:lnSpc>
+            </a:pPr>
+            <a:r>
+              <a:rPr sz="2000" b="0">
+                <a:solidFill>
+                  <a:srgbClr val="0F2419"/>
+                </a:solidFill>
+                <a:latin typeface="Calibri"/>
+              </a:rPr>
+              <a:t>Quantum runs, monitoring, NFT status, upload dashboard.</a:t>
+            </a:r>
+          </a:p>
+        </p:txBody>
+      </p:sp>
+      <p:sp>
+        <p:nvSpPr>
+          <p:cNvPr id="16" name="Rectangle 15"/>
+          <p:cNvSpPr/>
+          <p:nvPr/>
+        </p:nvSpPr>
+        <p:spPr>
+          <a:xfrm>
+            <a:off x="685800" y="5266944"/>
+            <a:ext cx="10835640" cy="658368"/>
+          </a:xfrm>
+          <a:prstGeom prst="rect">
+            <a:avLst/>
+          </a:prstGeom>
+          <a:solidFill>
+            <a:srgbClr val="E6F4EC"/>
+          </a:solidFill>
+          <a:ln>
+            <a:noFill/>
+          </a:ln>
+          <a:effectLst/>
+        </p:spPr>
+        <p:style>
+          <a:lnRef idx="1">
+            <a:schemeClr val="accent1"/>
+          </a:lnRef>
+          <a:fillRef idx="3">
+            <a:schemeClr val="accent1"/>
+          </a:fillRef>
+          <a:effectRef idx="2">
+            <a:schemeClr val="accent1"/>
+          </a:effectRef>
+          <a:fontRef idx="minor">
+            <a:schemeClr val="lt1"/>
+          </a:fontRef>
+        </p:style>
+        <p:txBody>
+          <a:bodyPr rtlCol="0" anchor="ctr"/>
+          <a:lstStyle/>
+          <a:p>
+            <a:pPr algn="ctr"/>
+          </a:p>
+        </p:txBody>
+      </p:sp>
+      <p:sp>
+        <p:nvSpPr>
+          <p:cNvPr id="17" name="TextBox 16"/>
+          <p:cNvSpPr txBox="1"/>
+          <p:nvPr/>
+        </p:nvSpPr>
+        <p:spPr>
+          <a:xfrm>
+            <a:off x="868680" y="5266944"/>
+            <a:ext cx="2377440" cy="658368"/>
+          </a:xfrm>
+          <a:prstGeom prst="rect">
+            <a:avLst/>
+          </a:prstGeom>
+          <a:noFill/>
+        </p:spPr>
+        <p:txBody>
+          <a:bodyPr wrap="square" anchor="ctr" lIns="45720" rIns="45720" tIns="27432" bIns="27432">
+            <a:spAutoFit/>
+          </a:bodyPr>
+          <a:lstStyle/>
+          <a:p>
+            <a:pPr algn="l">
+              <a:lnSpc>
+                <a:spcPct val="105000"/>
+              </a:lnSpc>
+            </a:pPr>
+            <a:r>
+              <a:rPr sz="2200" b="1">
+                <a:solidFill>
+                  <a:srgbClr val="0C3D2B"/>
+                </a:solidFill>
+                <a:latin typeface="Calibri"/>
+              </a:rPr>
+              <a:t>Next</a:t>
+            </a:r>
+          </a:p>
+        </p:txBody>
+      </p:sp>
+      <p:sp>
+        <p:nvSpPr>
+          <p:cNvPr id="18" name="TextBox 17"/>
+          <p:cNvSpPr txBox="1"/>
+          <p:nvPr/>
+        </p:nvSpPr>
+        <p:spPr>
+          <a:xfrm>
+            <a:off x="3246120" y="5266944"/>
+            <a:ext cx="8092440" cy="658368"/>
+          </a:xfrm>
+          <a:prstGeom prst="rect">
+            <a:avLst/>
+          </a:prstGeom>
+          <a:noFill/>
+        </p:spPr>
+        <p:txBody>
+          <a:bodyPr wrap="square" anchor="ctr" lIns="45720" rIns="45720" tIns="27432" bIns="27432">
+            <a:spAutoFit/>
+          </a:bodyPr>
+          <a:lstStyle/>
+          <a:p>
+            <a:pPr algn="l">
+              <a:lnSpc>
+                <a:spcPct val="100000"/>
+              </a:lnSpc>
+            </a:pPr>
+            <a:r>
+              <a:rPr sz="2000" b="0">
+                <a:solidFill>
+                  <a:srgbClr val="0F2419"/>
+                </a:solidFill>
+                <a:latin typeface="Calibri"/>
+              </a:rPr>
+              <a:t>Replace assumed carbon densities with project data.</a:t>
+            </a:r>
+          </a:p>
+        </p:txBody>
+      </p:sp>
+      <p:sp>
+        <p:nvSpPr>
+          <p:cNvPr id="19" name="TextBox 18"/>
+          <p:cNvSpPr txBox="1"/>
+          <p:nvPr/>
+        </p:nvSpPr>
+        <p:spPr>
+          <a:xfrm>
+            <a:off x="685800" y="5989320"/>
+            <a:ext cx="10835640" cy="365760"/>
+          </a:xfrm>
+          <a:prstGeom prst="rect">
+            <a:avLst/>
+          </a:prstGeom>
+          <a:noFill/>
+        </p:spPr>
+        <p:txBody>
+          <a:bodyPr wrap="square" anchor="t" lIns="45720" rIns="45720" tIns="27432" bIns="27432">
+            <a:spAutoFit/>
+          </a:bodyPr>
+          <a:lstStyle/>
+          <a:p>
+            <a:pPr algn="l">
+              <a:lnSpc>
+                <a:spcPct val="105000"/>
+              </a:lnSpc>
+            </a:pPr>
+            <a:r>
+              <a:rPr sz="1500" b="0">
+                <a:solidFill>
+                  <a:srgbClr val="587063"/>
+                </a:solidFill>
+                <a:latin typeface="Calibri"/>
+              </a:rPr>
+              <a:t>Built with: Google Earth Engine, RADD radar alerts, Qiskit, IBM Quantum, Base Sepolia, IPFS</a:t>
             </a:r>
           </a:p>
         </p:txBody>

--- a/docs/Qanopy_pitch.pptx
+++ b/docs/Qanopy_pitch.pptx
@@ -508,7 +508,7 @@
           <a:lstStyle/>
           <a:p>
             <a:r>
-              <a:t>Carbon credits pay for forest that was not cut down. Who checks that, week by week? Today, credits are checked in periodic audits. We built a system that checks them every week.</a:t>
+              <a:t>Companies pay to protect forests. The trees keep carbon out of the air. How do you know a forest was really saved? Today, auditors check now and then. We check every week.</a:t>
             </a:r>
           </a:p>
         </p:txBody>
@@ -578,7 +578,7 @@
           <a:lstStyle/>
           <a:p>
             <a:r>
-              <a:t>A carbon credit pays for forest that stays standing. The baseline, the loss that would have happened without the project, is estimated in project documents. Auditors check it periodically. Buyers and banks have no continuous evidence.</a:t>
+              <a:t>A carbon credit is a payment to protect a forest. To prove it worked, you must show how much forest would have been cut without the project. That never happened, so it is guessed on paper. Nobody watches week by week.</a:t>
             </a:r>
           </a:p>
         </p:txBody>
@@ -648,7 +648,7 @@
           <a:lstStyle/>
           <a:p>
             <a:r>
-              <a:t>Qanopy takes a project boundary and selects 50 similar forest parcels. It reads satellite radar alerts for the project and the parcels every week. The difference is the avoided forest loss. Qanopy converts it to tons of CO2 and compares it with the project's claim. The result is published as a five-level NFT status. Four projects run today.</a:t>
+              <a:t>Take the protected forest. Find 50 similar patches nearby that are not protected. Satellites with radar see trees disappear every week, even through clouds. If the protected forest loses less, the difference is forest saved. We turn that into carbon dioxide and compare it with the promise. The score goes on a blockchain as an NFT: a public record nobody can quietly change.</a:t>
             </a:r>
           </a:p>
         </p:txBody>
@@ -718,7 +718,7 @@
           <a:lstStyle/>
           <a:p>
             <a:r>
-              <a:t>This is the dashboard for ALGAR in Brazil. The project lost 0.58% of its forest. The comparison parcels lost 4.61%. That is 5,741 hectares avoided, or 31% of the amount claimed so far. The status is Worst. We read this as a flag to investigate.</a:t>
+              <a:t>Here is ALGAR in Brazil. The protected forest lost 0.58% of its trees. The look-alikes lost 4.61%. That is about 8,000 football pitches saved, or 31% of the promise so far. The score is Worst, a warning to look closer.</a:t>
             </a:r>
           </a:p>
         </p:txBody>
@@ -788,7 +788,7 @@
           <a:lstStyle/>
           <a:p>
             <a:r>
-              <a:t>Quantum amplitude estimation, or QAE, estimates an average with fewer samples than classical Monte Carlo. We ran it on IBM's ibm_fez. A one-qubit test had lower error than Monte Carlo at five of eight budgets, up to 16 times lower. At 262,000 calls, hardware noise removed the advantage. The full 50-parcel circuit lost its signal after one Grover step. Today's hardware shows the advantage at small scale only.</a:t>
+              <a:t>Now the quantum part. A normal computer estimates an average like a poll: it asks random questions. Ten times more precision needs a hundred times more questions. Quantum amplitude estimation needs only ten times more. We ran it on IBM's quantum computer. It beat the normal method at five of eight sizes, up to sixteen times better. But quantum chips make small mistakes, and at the biggest size they cancelled the advantage.</a:t>
             </a:r>
           </a:p>
         </p:txBody>
@@ -858,7 +858,7 @@
           <a:lstStyle/>
           <a:p>
             <a:r>
-              <a:t>Quantum helps when the scale grows. We also ran parcel selection on ibm_fez. It found the best set in 71% of valid runs on a small problem. For plus or minus 1%, QAE needs about 2,000 runs where Monte Carlo needs 98,000. That matters when every run is a costly simulation, over thousands of projects, every week. It needs gates about 3,000 times better than today's. Until then, classical methods win at every size we can run.</a:t>
+              <a:t>Today, normal computers win at every size we can run. We also asked the quantum computer to pick the best three of eight patches. It found the best choice in 71% of valid runs, against 1.8% for guessing. Later, one-percent precision needs about 98,000 questions by polling and 2,000 by quantum. That matters when each question is a heavy simulation and we watch thousands of projects. Chips must first make 3,000 times fewer mistakes.</a:t>
             </a:r>
           </a:p>
         </p:txBody>
@@ -928,7 +928,7 @@
           <a:lstStyle/>
           <a:p>
             <a:r>
-              <a:t>Buyers, registries, insurers and banks need to rely on credits. They would pay a subscription per monitored project. Today a working prototype covers four projects, with NFTs on a test network. The parcel-matching engine existed first. At this event we added the quantum runs, the monitoring, the NFT status and the dashboard. Next, we replace assumed carbon densities with project data.</a:t>
+              <a:t>Credit buyers, registries, insurers and banks need to trust credits. They would pay a subscription per project. We have a working prototype on four projects. The NFTs are on a test blockchain, not real money. Next, we replace our guess of how much carbon a forest holds with project data.</a:t>
             </a:r>
           </a:p>
         </p:txBody>
@@ -3986,8 +3986,8 @@
         </p:nvSpPr>
         <p:spPr>
           <a:xfrm>
-            <a:off x="822960" y="1554480"/>
-            <a:ext cx="10515600" cy="2560320"/>
+            <a:off x="822960" y="1371600"/>
+            <a:ext cx="10515600" cy="2926080"/>
           </a:xfrm>
           <a:prstGeom prst="rect">
             <a:avLst/>
@@ -4006,13 +4006,13 @@
               </a:lnSpc>
             </a:pPr>
             <a:r>
-              <a:rPr sz="5800" b="1">
+              <a:rPr sz="5200" b="1">
                 <a:solidFill>
                   <a:srgbClr val="FFFFFF"/>
                 </a:solidFill>
                 <a:latin typeface="Calibri"/>
               </a:rPr>
-              <a:t>Who checks that a carbon credit saved a forest?</a:t>
+              <a:t>A company pays to protect a forest. How do you know the forest was really saved?</a:t>
             </a:r>
           </a:p>
         </p:txBody>
@@ -4025,7 +4025,7 @@
         </p:nvSpPr>
         <p:spPr>
           <a:xfrm>
-            <a:off x="822960" y="4480560"/>
+            <a:off x="822960" y="4572000"/>
             <a:ext cx="10058400" cy="822960"/>
           </a:xfrm>
           <a:prstGeom prst="rect">
@@ -4051,7 +4051,7 @@
                 </a:solidFill>
                 <a:latin typeface="Calibri"/>
               </a:rPr>
-              <a:t>Qanopy checks it every week.</a:t>
+              <a:t>Qanopy checks, every week.</a:t>
             </a:r>
           </a:p>
         </p:txBody>
@@ -4147,7 +4147,7 @@
                 </a:solidFill>
                 <a:latin typeface="Calibri"/>
               </a:rPr>
-              <a:t>Credit buyers cannot check a credit between audits</a:t>
+              <a:t>You cannot see a forest that was never cut down</a:t>
             </a:r>
           </a:p>
         </p:txBody>
@@ -4204,8 +4204,8 @@
         </p:nvSpPr>
         <p:spPr>
           <a:xfrm>
-            <a:off x="685800" y="2286000"/>
-            <a:ext cx="10835640" cy="1097280"/>
+            <a:off x="685800" y="2194560"/>
+            <a:ext cx="10835640" cy="1188720"/>
           </a:xfrm>
           <a:prstGeom prst="rect">
             <a:avLst/>
@@ -4248,8 +4248,8 @@
         </p:nvSpPr>
         <p:spPr>
           <a:xfrm>
-            <a:off x="868680" y="2286000"/>
-            <a:ext cx="2377440" cy="1097280"/>
+            <a:off x="868680" y="2194560"/>
+            <a:ext cx="2377440" cy="1188720"/>
           </a:xfrm>
           <a:prstGeom prst="rect">
             <a:avLst/>
@@ -4274,7 +4274,7 @@
                 </a:solidFill>
                 <a:latin typeface="Calibri"/>
               </a:rPr>
-              <a:t>The credit</a:t>
+              <a:t>The promise</a:t>
             </a:r>
           </a:p>
         </p:txBody>
@@ -4287,8 +4287,8 @@
         </p:nvSpPr>
         <p:spPr>
           <a:xfrm>
-            <a:off x="3246120" y="2286000"/>
-            <a:ext cx="8092440" cy="1097280"/>
+            <a:off x="3246120" y="2194560"/>
+            <a:ext cx="8092440" cy="1188720"/>
           </a:xfrm>
           <a:prstGeom prst="rect">
             <a:avLst/>
@@ -4313,7 +4313,7 @@
                 </a:solidFill>
                 <a:latin typeface="Calibri"/>
               </a:rPr>
-              <a:t>Pays for forest that stays standing.</a:t>
+              <a:t>Pay to protect a forest. The trees keep carbon out of the air.</a:t>
             </a:r>
           </a:p>
         </p:txBody>
@@ -4326,8 +4326,8 @@
         </p:nvSpPr>
         <p:spPr>
           <a:xfrm>
-            <a:off x="685800" y="3584448"/>
-            <a:ext cx="10835640" cy="1097280"/>
+            <a:off x="685800" y="3566160"/>
+            <a:ext cx="10835640" cy="1188720"/>
           </a:xfrm>
           <a:prstGeom prst="rect">
             <a:avLst/>
@@ -4370,8 +4370,8 @@
         </p:nvSpPr>
         <p:spPr>
           <a:xfrm>
-            <a:off x="868680" y="3584448"/>
-            <a:ext cx="2377440" cy="1097280"/>
+            <a:off x="868680" y="3566160"/>
+            <a:ext cx="2377440" cy="1188720"/>
           </a:xfrm>
           <a:prstGeom prst="rect">
             <a:avLst/>
@@ -4396,7 +4396,7 @@
                 </a:solidFill>
                 <a:latin typeface="Calibri"/>
               </a:rPr>
-              <a:t>The baseline</a:t>
+              <a:t>The catch</a:t>
             </a:r>
           </a:p>
         </p:txBody>
@@ -4409,8 +4409,8 @@
         </p:nvSpPr>
         <p:spPr>
           <a:xfrm>
-            <a:off x="3246120" y="3584448"/>
-            <a:ext cx="8092440" cy="1097280"/>
+            <a:off x="3246120" y="3566160"/>
+            <a:ext cx="8092440" cy="1188720"/>
           </a:xfrm>
           <a:prstGeom prst="rect">
             <a:avLst/>
@@ -4435,7 +4435,7 @@
                 </a:solidFill>
                 <a:latin typeface="Calibri"/>
               </a:rPr>
-              <a:t>Estimated in project documents.</a:t>
+              <a:t>To prove it worked, you must know what would have happened without the project. That never happened, so it is guessed.</a:t>
             </a:r>
           </a:p>
         </p:txBody>
@@ -4448,8 +4448,8 @@
         </p:nvSpPr>
         <p:spPr>
           <a:xfrm>
-            <a:off x="685800" y="4882896"/>
-            <a:ext cx="10835640" cy="1097280"/>
+            <a:off x="685800" y="4937760"/>
+            <a:ext cx="10835640" cy="1188720"/>
           </a:xfrm>
           <a:prstGeom prst="rect">
             <a:avLst/>
@@ -4492,8 +4492,8 @@
         </p:nvSpPr>
         <p:spPr>
           <a:xfrm>
-            <a:off x="868680" y="4882896"/>
-            <a:ext cx="2377440" cy="1097280"/>
+            <a:off x="868680" y="4937760"/>
+            <a:ext cx="2377440" cy="1188720"/>
           </a:xfrm>
           <a:prstGeom prst="rect">
             <a:avLst/>
@@ -4531,8 +4531,8 @@
         </p:nvSpPr>
         <p:spPr>
           <a:xfrm>
-            <a:off x="3246120" y="4882896"/>
-            <a:ext cx="8092440" cy="1097280"/>
+            <a:off x="3246120" y="4937760"/>
+            <a:ext cx="8092440" cy="1188720"/>
           </a:xfrm>
           <a:prstGeom prst="rect">
             <a:avLst/>
@@ -4557,7 +4557,7 @@
                 </a:solidFill>
                 <a:latin typeface="Calibri"/>
               </a:rPr>
-              <a:t>A periodic audit, not continuous evidence.</a:t>
+              <a:t>Auditors look now and then. Nobody watches every week.</a:t>
             </a:r>
           </a:p>
         </p:txBody>
@@ -4686,13 +4686,13 @@
               </a:lnSpc>
             </a:pPr>
             <a:r>
-              <a:rPr sz="4000" b="1">
+              <a:rPr sz="3600" b="1">
                 <a:solidFill>
                   <a:srgbClr val="0C3D2B"/>
                 </a:solidFill>
                 <a:latin typeface="Calibri"/>
               </a:rPr>
-              <a:t>Qanopy compares each project with similar forest</a:t>
+              <a:t>We compare protected forest with look-alike forest</a:t>
             </a:r>
           </a:p>
         </p:txBody>
@@ -4749,8 +4749,8 @@
         </p:nvSpPr>
         <p:spPr>
           <a:xfrm>
-            <a:off x="685800" y="2286000"/>
-            <a:ext cx="2057400" cy="1828800"/>
+            <a:off x="685800" y="2194560"/>
+            <a:ext cx="2057400" cy="1737360"/>
           </a:xfrm>
           <a:prstGeom prst="homePlate">
             <a:avLst/>
@@ -4793,7 +4793,7 @@
         </p:nvSpPr>
         <p:spPr>
           <a:xfrm>
-            <a:off x="822960" y="2423160"/>
+            <a:off x="822960" y="2331720"/>
             <a:ext cx="1508760" cy="548640"/>
           </a:xfrm>
           <a:prstGeom prst="rect">
@@ -4832,8 +4832,8 @@
         </p:nvSpPr>
         <p:spPr>
           <a:xfrm>
-            <a:off x="822960" y="3017520"/>
-            <a:ext cx="1508760" cy="1005840"/>
+            <a:off x="822960" y="2926080"/>
+            <a:ext cx="1508760" cy="914400"/>
           </a:xfrm>
           <a:prstGeom prst="rect">
             <a:avLst/>
@@ -4858,8 +4858,8 @@
                 </a:solidFill>
                 <a:latin typeface="Calibri"/>
               </a:rPr>
-              <a:t>project
-boundary</a:t>
+              <a:t>the project's
+map file</a:t>
             </a:r>
           </a:p>
         </p:txBody>
@@ -4872,8 +4872,8 @@
         </p:nvSpPr>
         <p:spPr>
           <a:xfrm>
-            <a:off x="2880360" y="2286000"/>
-            <a:ext cx="2057400" cy="1828800"/>
+            <a:off x="2880360" y="2194560"/>
+            <a:ext cx="2057400" cy="1737360"/>
           </a:xfrm>
           <a:prstGeom prst="homePlate">
             <a:avLst/>
@@ -4916,7 +4916,7 @@
         </p:nvSpPr>
         <p:spPr>
           <a:xfrm>
-            <a:off x="3017520" y="2423160"/>
+            <a:off x="3017520" y="2331720"/>
             <a:ext cx="1508760" cy="548640"/>
           </a:xfrm>
           <a:prstGeom prst="rect">
@@ -4955,8 +4955,8 @@
         </p:nvSpPr>
         <p:spPr>
           <a:xfrm>
-            <a:off x="3017520" y="3017520"/>
-            <a:ext cx="1508760" cy="1005840"/>
+            <a:off x="3017520" y="2926080"/>
+            <a:ext cx="1508760" cy="914400"/>
           </a:xfrm>
           <a:prstGeom prst="rect">
             <a:avLst/>
@@ -4981,8 +4981,8 @@
                 </a:solidFill>
                 <a:latin typeface="Calibri"/>
               </a:rPr>
-              <a:t>50 similar
-forest parcels</a:t>
+              <a:t>50 look-alike
+forest patches</a:t>
             </a:r>
           </a:p>
         </p:txBody>
@@ -4995,8 +4995,8 @@
         </p:nvSpPr>
         <p:spPr>
           <a:xfrm>
-            <a:off x="5074920" y="2286000"/>
-            <a:ext cx="2057400" cy="1828800"/>
+            <a:off x="5074920" y="2194560"/>
+            <a:ext cx="2057400" cy="1737360"/>
           </a:xfrm>
           <a:prstGeom prst="homePlate">
             <a:avLst/>
@@ -5039,7 +5039,7 @@
         </p:nvSpPr>
         <p:spPr>
           <a:xfrm>
-            <a:off x="5212080" y="2423160"/>
+            <a:off x="5212080" y="2331720"/>
             <a:ext cx="1508760" cy="548640"/>
           </a:xfrm>
           <a:prstGeom prst="rect">
@@ -5078,8 +5078,8 @@
         </p:nvSpPr>
         <p:spPr>
           <a:xfrm>
-            <a:off x="5212080" y="3017520"/>
-            <a:ext cx="1508760" cy="1005840"/>
+            <a:off x="5212080" y="2926080"/>
+            <a:ext cx="1508760" cy="914400"/>
           </a:xfrm>
           <a:prstGeom prst="rect">
             <a:avLst/>
@@ -5104,8 +5104,8 @@
                 </a:solidFill>
                 <a:latin typeface="Calibri"/>
               </a:rPr>
-              <a:t>weekly satellite
-radar alerts</a:t>
+              <a:t>weekly radar
+from satellites</a:t>
             </a:r>
           </a:p>
         </p:txBody>
@@ -5118,8 +5118,8 @@
         </p:nvSpPr>
         <p:spPr>
           <a:xfrm>
-            <a:off x="7269479" y="2286000"/>
-            <a:ext cx="2057400" cy="1828800"/>
+            <a:off x="7269479" y="2194560"/>
+            <a:ext cx="2057400" cy="1737360"/>
           </a:xfrm>
           <a:prstGeom prst="homePlate">
             <a:avLst/>
@@ -5162,7 +5162,7 @@
         </p:nvSpPr>
         <p:spPr>
           <a:xfrm>
-            <a:off x="7406640" y="2423160"/>
+            <a:off x="7406640" y="2331720"/>
             <a:ext cx="1508760" cy="548640"/>
           </a:xfrm>
           <a:prstGeom prst="rect">
@@ -5201,8 +5201,8 @@
         </p:nvSpPr>
         <p:spPr>
           <a:xfrm>
-            <a:off x="7406640" y="3017520"/>
-            <a:ext cx="1508760" cy="1005840"/>
+            <a:off x="7406640" y="2926080"/>
+            <a:ext cx="1508760" cy="914400"/>
           </a:xfrm>
           <a:prstGeom prst="rect">
             <a:avLst/>
@@ -5227,8 +5227,8 @@
                 </a:solidFill>
                 <a:latin typeface="Calibri"/>
               </a:rPr>
-              <a:t>avoided loss
-in tons of CO2e</a:t>
+              <a:t>forest saved,
+in tons of CO2</a:t>
             </a:r>
           </a:p>
         </p:txBody>
@@ -5241,8 +5241,8 @@
         </p:nvSpPr>
         <p:spPr>
           <a:xfrm>
-            <a:off x="9464040" y="2286000"/>
-            <a:ext cx="2057400" cy="1828800"/>
+            <a:off x="9464040" y="2194560"/>
+            <a:ext cx="2057400" cy="1737360"/>
           </a:xfrm>
           <a:prstGeom prst="homePlate">
             <a:avLst/>
@@ -5285,7 +5285,7 @@
         </p:nvSpPr>
         <p:spPr>
           <a:xfrm>
-            <a:off x="9601200" y="2423160"/>
+            <a:off x="9601200" y="2331720"/>
             <a:ext cx="1508760" cy="548640"/>
           </a:xfrm>
           <a:prstGeom prst="rect">
@@ -5324,8 +5324,8 @@
         </p:nvSpPr>
         <p:spPr>
           <a:xfrm>
-            <a:off x="9601200" y="3017520"/>
-            <a:ext cx="1508760" cy="1005840"/>
+            <a:off x="9601200" y="2926080"/>
+            <a:ext cx="1508760" cy="914400"/>
           </a:xfrm>
           <a:prstGeom prst="rect">
             <a:avLst/>
@@ -5350,8 +5350,8 @@
                 </a:solidFill>
                 <a:latin typeface="Calibri"/>
               </a:rPr>
-              <a:t>five-level
-NFT status</a:t>
+              <a:t>a public score
+as an NFT</a:t>
             </a:r>
           </a:p>
         </p:txBody>
@@ -5364,8 +5364,8 @@
         </p:nvSpPr>
         <p:spPr>
           <a:xfrm>
-            <a:off x="685800" y="4434840"/>
-            <a:ext cx="10835640" cy="777240"/>
+            <a:off x="685800" y="4251960"/>
+            <a:ext cx="10835640" cy="868680"/>
           </a:xfrm>
           <a:prstGeom prst="rect">
             <a:avLst/>
@@ -5408,8 +5408,8 @@
         </p:nvSpPr>
         <p:spPr>
           <a:xfrm>
-            <a:off x="868680" y="4434840"/>
-            <a:ext cx="2377440" cy="777240"/>
+            <a:off x="868680" y="4251960"/>
+            <a:ext cx="2743200" cy="868680"/>
           </a:xfrm>
           <a:prstGeom prst="rect">
             <a:avLst/>
@@ -5434,7 +5434,7 @@
                 </a:solidFill>
                 <a:latin typeface="Calibri"/>
               </a:rPr>
-              <a:t>Any project</a:t>
+              <a:t>What is an NFT?</a:t>
             </a:r>
           </a:p>
         </p:txBody>
@@ -5447,8 +5447,8 @@
         </p:nvSpPr>
         <p:spPr>
           <a:xfrm>
-            <a:off x="3246120" y="4434840"/>
-            <a:ext cx="8092440" cy="777240"/>
+            <a:off x="3611880" y="4251960"/>
+            <a:ext cx="7726679" cy="868680"/>
           </a:xfrm>
           <a:prstGeom prst="rect">
             <a:avLst/>
@@ -5473,7 +5473,7 @@
                 </a:solidFill>
                 <a:latin typeface="Calibri"/>
               </a:rPr>
-              <a:t>Upload a KML file in the dashboard. No code.</a:t>
+              <a:t>A public record on a blockchain. Anyone can read it. Nobody can quietly change it.</a:t>
             </a:r>
           </a:p>
         </p:txBody>
@@ -5486,8 +5486,8 @@
         </p:nvSpPr>
         <p:spPr>
           <a:xfrm>
-            <a:off x="685800" y="5349240"/>
-            <a:ext cx="10835640" cy="777240"/>
+            <a:off x="685800" y="5257800"/>
+            <a:ext cx="10835640" cy="868680"/>
           </a:xfrm>
           <a:prstGeom prst="rect">
             <a:avLst/>
@@ -5530,8 +5530,8 @@
         </p:nvSpPr>
         <p:spPr>
           <a:xfrm>
-            <a:off x="868680" y="5349240"/>
-            <a:ext cx="2377440" cy="777240"/>
+            <a:off x="868680" y="5257800"/>
+            <a:ext cx="2743200" cy="868680"/>
           </a:xfrm>
           <a:prstGeom prst="rect">
             <a:avLst/>
@@ -5556,7 +5556,7 @@
                 </a:solidFill>
                 <a:latin typeface="Calibri"/>
               </a:rPr>
-              <a:t>Live now</a:t>
+              <a:t>Any project</a:t>
             </a:r>
           </a:p>
         </p:txBody>
@@ -5569,8 +5569,8 @@
         </p:nvSpPr>
         <p:spPr>
           <a:xfrm>
-            <a:off x="3246120" y="5349240"/>
-            <a:ext cx="8092440" cy="777240"/>
+            <a:off x="3611880" y="5257800"/>
+            <a:ext cx="7726679" cy="868680"/>
           </a:xfrm>
           <a:prstGeom prst="rect">
             <a:avLst/>
@@ -5595,7 +5595,7 @@
                 </a:solidFill>
                 <a:latin typeface="Calibri"/>
               </a:rPr>
-              <a:t>Four projects: two in Brazil, one in Cambodia, one in Bolivia.</a:t>
+              <a:t>Upload a map file. Four projects run today.</a:t>
             </a:r>
           </a:p>
         </p:txBody>
@@ -5724,13 +5724,13 @@
               </a:lnSpc>
             </a:pPr>
             <a:r>
-              <a:rPr sz="3600" b="1">
+              <a:rPr sz="3400" b="1">
                 <a:solidFill>
                   <a:srgbClr val="0C3D2B"/>
                 </a:solidFill>
                 <a:latin typeface="Calibri"/>
               </a:rPr>
-              <a:t>ALGAR, Brazil: 31% of the claim so far</a:t>
+              <a:t>ALGAR, Brazil: 31% of the promise delivered so far</a:t>
             </a:r>
           </a:p>
         </p:txBody>
@@ -5831,22 +5831,22 @@
               </a:lnSpc>
             </a:pPr>
             <a:r>
-              <a:rPr sz="2100" b="1">
+              <a:rPr sz="2000" b="1">
                 <a:solidFill>
                   <a:srgbClr val="0C3D2B"/>
                 </a:solidFill>
                 <a:latin typeface="Calibri"/>
               </a:rPr>
-              <a:t>Project loss 0.58%. Parcel loss 4.61%. </a:t>
-            </a:r>
-            <a:r>
-              <a:rPr sz="2100" b="0">
+              <a:t>Protected forest lost 0.58%. Look-alikes lost 4.61%. </a:t>
+            </a:r>
+            <a:r>
+              <a:rPr sz="2000" b="0">
                 <a:solidFill>
                   <a:srgbClr val="0F2419"/>
                 </a:solidFill>
                 <a:latin typeface="Calibri"/>
               </a:rPr>
-              <a:t>Status: Worst. A flag to investigate.</a:t>
+              <a:t>Score: Worst. A warning to look closer.</a:t>
             </a:r>
           </a:p>
         </p:txBody>
@@ -5975,13 +5975,13 @@
               </a:lnSpc>
             </a:pPr>
             <a:r>
-              <a:rPr sz="3600" b="1">
+              <a:rPr sz="3400" b="1">
                 <a:solidFill>
                   <a:srgbClr val="0C3D2B"/>
                 </a:solidFill>
                 <a:latin typeface="Calibri"/>
               </a:rPr>
-              <a:t>QAE ran on IBM's 156-qubit ibm_fez</a:t>
+              <a:t>We tested a quantum shortcut on IBM's quantum computer</a:t>
             </a:r>
           </a:p>
         </p:txBody>
@@ -6063,7 +6063,7 @@
         <p:spPr>
           <a:xfrm>
             <a:off x="6858000" y="1783080"/>
-            <a:ext cx="4709160" cy="1188720"/>
+            <a:ext cx="4709160" cy="1234440"/>
           </a:xfrm>
           <a:prstGeom prst="rect">
             <a:avLst/>
@@ -6107,7 +6107,7 @@
         <p:spPr>
           <a:xfrm>
             <a:off x="7040880" y="1783080"/>
-            <a:ext cx="1325880" cy="1188720"/>
+            <a:ext cx="1188720" cy="1234440"/>
           </a:xfrm>
           <a:prstGeom prst="rect">
             <a:avLst/>
@@ -6126,13 +6126,13 @@
               </a:lnSpc>
             </a:pPr>
             <a:r>
-              <a:rPr sz="2200" b="1">
+              <a:rPr sz="2100" b="1">
                 <a:solidFill>
                   <a:srgbClr val="0C3D2B"/>
                 </a:solidFill>
                 <a:latin typeface="Calibri"/>
               </a:rPr>
-              <a:t>Small test</a:t>
+              <a:t>Idea</a:t>
             </a:r>
           </a:p>
         </p:txBody>
@@ -6145,8 +6145,8 @@
         </p:nvSpPr>
         <p:spPr>
           <a:xfrm>
-            <a:off x="8366760" y="1783080"/>
-            <a:ext cx="3017520" cy="1188720"/>
+            <a:off x="8229600" y="1783080"/>
+            <a:ext cx="3154680" cy="1234440"/>
           </a:xfrm>
           <a:prstGeom prst="rect">
             <a:avLst/>
@@ -6165,13 +6165,13 @@
               </a:lnSpc>
             </a:pPr>
             <a:r>
-              <a:rPr sz="2000" b="0">
+              <a:rPr sz="1900" b="0">
                 <a:solidFill>
                   <a:srgbClr val="0F2419"/>
                 </a:solidFill>
                 <a:latin typeface="Calibri"/>
               </a:rPr>
-              <a:t>1 qubit. Error below Monte Carlo at 5 of 8 budgets, up to 16x.</a:t>
+              <a:t>A poll needs many random questions. A quantum computer can ask smarter ones.</a:t>
             </a:r>
           </a:p>
         </p:txBody>
@@ -6184,8 +6184,8 @@
         </p:nvSpPr>
         <p:spPr>
           <a:xfrm>
-            <a:off x="6858000" y="3154680"/>
-            <a:ext cx="4709160" cy="1188720"/>
+            <a:off x="6858000" y="3200400"/>
+            <a:ext cx="4709160" cy="1234440"/>
           </a:xfrm>
           <a:prstGeom prst="rect">
             <a:avLst/>
@@ -6228,8 +6228,8 @@
         </p:nvSpPr>
         <p:spPr>
           <a:xfrm>
-            <a:off x="7040880" y="3154680"/>
-            <a:ext cx="1325880" cy="1188720"/>
+            <a:off x="7040880" y="3200400"/>
+            <a:ext cx="1188720" cy="1234440"/>
           </a:xfrm>
           <a:prstGeom prst="rect">
             <a:avLst/>
@@ -6248,13 +6248,13 @@
               </a:lnSpc>
             </a:pPr>
             <a:r>
-              <a:rPr sz="2200" b="1">
+              <a:rPr sz="2100" b="1">
                 <a:solidFill>
                   <a:srgbClr val="0C3D2B"/>
                 </a:solidFill>
                 <a:latin typeface="Calibri"/>
               </a:rPr>
-              <a:t>Real size</a:t>
+              <a:t>Result</a:t>
             </a:r>
           </a:p>
         </p:txBody>
@@ -6267,8 +6267,8 @@
         </p:nvSpPr>
         <p:spPr>
           <a:xfrm>
-            <a:off x="8366760" y="3154680"/>
-            <a:ext cx="3017520" cy="1188720"/>
+            <a:off x="8229600" y="3200400"/>
+            <a:ext cx="3154680" cy="1234440"/>
           </a:xfrm>
           <a:prstGeom prst="rect">
             <a:avLst/>
@@ -6287,13 +6287,13 @@
               </a:lnSpc>
             </a:pPr>
             <a:r>
-              <a:rPr sz="2000" b="0">
+              <a:rPr sz="1900" b="0">
                 <a:solidFill>
                   <a:srgbClr val="0F2419"/>
                 </a:solidFill>
                 <a:latin typeface="Calibri"/>
               </a:rPr>
-              <a:t>50 parcels, 865 two-qubit gates. Signal gone after 1 Grover step.</a:t>
+              <a:t>Up to 16 times more accurate at 5 of 8 sizes.</a:t>
             </a:r>
           </a:p>
         </p:txBody>
@@ -6306,8 +6306,8 @@
         </p:nvSpPr>
         <p:spPr>
           <a:xfrm>
-            <a:off x="6858000" y="4526280"/>
-            <a:ext cx="4709160" cy="1188720"/>
+            <a:off x="6858000" y="4617720"/>
+            <a:ext cx="4709160" cy="1234440"/>
           </a:xfrm>
           <a:prstGeom prst="rect">
             <a:avLst/>
@@ -6350,8 +6350,8 @@
         </p:nvSpPr>
         <p:spPr>
           <a:xfrm>
-            <a:off x="7040880" y="4526280"/>
-            <a:ext cx="1325880" cy="1188720"/>
+            <a:off x="7040880" y="4617720"/>
+            <a:ext cx="1188720" cy="1234440"/>
           </a:xfrm>
           <a:prstGeom prst="rect">
             <a:avLst/>
@@ -6370,7 +6370,7 @@
               </a:lnSpc>
             </a:pPr>
             <a:r>
-              <a:rPr sz="2200" b="1">
+              <a:rPr sz="2100" b="1">
                 <a:solidFill>
                   <a:srgbClr val="0C3D2B"/>
                 </a:solidFill>
@@ -6389,8 +6389,8 @@
         </p:nvSpPr>
         <p:spPr>
           <a:xfrm>
-            <a:off x="8366760" y="4526280"/>
-            <a:ext cx="3017520" cy="1188720"/>
+            <a:off x="8229600" y="4617720"/>
+            <a:ext cx="3154680" cy="1234440"/>
           </a:xfrm>
           <a:prstGeom prst="rect">
             <a:avLst/>
@@ -6409,13 +6409,13 @@
               </a:lnSpc>
             </a:pPr>
             <a:r>
-              <a:rPr sz="2000" b="0">
+              <a:rPr sz="1900" b="0">
                 <a:solidFill>
                   <a:srgbClr val="0F2419"/>
                 </a:solidFill>
                 <a:latin typeface="Calibri"/>
               </a:rPr>
-              <a:t>At 262,000 calls, hardware noise removes the edge.</a:t>
+              <a:t>Chip mistakes pile up. At the biggest size the edge was gone.</a:t>
             </a:r>
           </a:p>
         </p:txBody>
@@ -6428,8 +6428,8 @@
         </p:nvSpPr>
         <p:spPr>
           <a:xfrm>
-            <a:off x="6858000" y="5806440"/>
-            <a:ext cx="4754880" cy="457200"/>
+            <a:off x="6858000" y="5760720"/>
+            <a:ext cx="4754880" cy="548640"/>
           </a:xfrm>
           <a:prstGeom prst="rect">
             <a:avLst/>
@@ -6454,7 +6454,7 @@
                 </a:solidFill>
                 <a:latin typeface="Calibri"/>
               </a:rPr>
-              <a:t>One hardware run per point. Monte Carlo shown as expected error.</a:t>
+              <a:t>Qubit = quantum bit. One test run per point on IBM's 156-qubit chip.</a:t>
             </a:r>
           </a:p>
         </p:txBody>
@@ -6589,7 +6589,7 @@
                 </a:solidFill>
                 <a:latin typeface="Calibri"/>
               </a:rPr>
-              <a:t>Quantum pays off when the scale grows</a:t>
+              <a:t>Quantum could save computing time at large scale</a:t>
             </a:r>
           </a:p>
         </p:txBody>
@@ -6646,7 +6646,7 @@
         </p:nvSpPr>
         <p:spPr>
           <a:xfrm>
-            <a:off x="685800" y="2103120"/>
+            <a:off x="685800" y="2011680"/>
             <a:ext cx="10835640" cy="914400"/>
           </a:xfrm>
           <a:prstGeom prst="rect">
@@ -6690,8 +6690,8 @@
         </p:nvSpPr>
         <p:spPr>
           <a:xfrm>
-            <a:off x="868680" y="2103120"/>
-            <a:ext cx="2377440" cy="914400"/>
+            <a:off x="868680" y="2011680"/>
+            <a:ext cx="2194560" cy="914400"/>
           </a:xfrm>
           <a:prstGeom prst="rect">
             <a:avLst/>
@@ -6710,13 +6710,13 @@
               </a:lnSpc>
             </a:pPr>
             <a:r>
-              <a:rPr sz="2400" b="1">
+              <a:rPr sz="2200" b="1">
                 <a:solidFill>
                   <a:srgbClr val="0C3D2B"/>
                 </a:solidFill>
                 <a:latin typeface="Calibri"/>
               </a:rPr>
-              <a:t>Ran</a:t>
+              <a:t>Today</a:t>
             </a:r>
           </a:p>
         </p:txBody>
@@ -6729,8 +6729,8 @@
         </p:nvSpPr>
         <p:spPr>
           <a:xfrm>
-            <a:off x="3246120" y="2103120"/>
-            <a:ext cx="8092440" cy="914400"/>
+            <a:off x="3063239" y="2011680"/>
+            <a:ext cx="8275319" cy="914400"/>
           </a:xfrm>
           <a:prstGeom prst="rect">
             <a:avLst/>
@@ -6749,13 +6749,13 @@
               </a:lnSpc>
             </a:pPr>
             <a:r>
-              <a:rPr sz="2200" b="0">
+              <a:rPr sz="2000" b="0">
                 <a:solidFill>
                   <a:srgbClr val="0F2419"/>
                 </a:solidFill>
                 <a:latin typeface="Calibri"/>
               </a:rPr>
-              <a:t>QAOA picked the best 3 of 8 parcels in 71% of valid runs on ibm_fez. Random: 1.8%.</a:t>
+              <a:t>Normal computers win at every size we can run. Our quantum parts are tests.</a:t>
             </a:r>
           </a:p>
         </p:txBody>
@@ -6768,7 +6768,7 @@
         </p:nvSpPr>
         <p:spPr>
           <a:xfrm>
-            <a:off x="685800" y="3154679"/>
+            <a:off x="685800" y="3035808"/>
             <a:ext cx="10835640" cy="914400"/>
           </a:xfrm>
           <a:prstGeom prst="rect">
@@ -6812,8 +6812,8 @@
         </p:nvSpPr>
         <p:spPr>
           <a:xfrm>
-            <a:off x="868680" y="3154679"/>
-            <a:ext cx="2377440" cy="914400"/>
+            <a:off x="868680" y="3035808"/>
+            <a:ext cx="2194560" cy="914400"/>
           </a:xfrm>
           <a:prstGeom prst="rect">
             <a:avLst/>
@@ -6832,13 +6832,13 @@
               </a:lnSpc>
             </a:pPr>
             <a:r>
-              <a:rPr sz="2400" b="1">
+              <a:rPr sz="2200" b="1">
                 <a:solidFill>
                   <a:srgbClr val="0C3D2B"/>
                 </a:solidFill>
                 <a:latin typeface="Calibri"/>
               </a:rPr>
-              <a:t>Needs</a:t>
+              <a:t>Also tested</a:t>
             </a:r>
           </a:p>
         </p:txBody>
@@ -6851,8 +6851,8 @@
         </p:nvSpPr>
         <p:spPr>
           <a:xfrm>
-            <a:off x="3246120" y="3154679"/>
-            <a:ext cx="8092440" cy="914400"/>
+            <a:off x="3063239" y="3035808"/>
+            <a:ext cx="8275319" cy="914400"/>
           </a:xfrm>
           <a:prstGeom prst="rect">
             <a:avLst/>
@@ -6871,13 +6871,13 @@
               </a:lnSpc>
             </a:pPr>
             <a:r>
-              <a:rPr sz="2200" b="0">
+              <a:rPr sz="2000" b="0">
                 <a:solidFill>
                   <a:srgbClr val="0F2419"/>
                 </a:solidFill>
                 <a:latin typeface="Calibri"/>
               </a:rPr>
-              <a:t>Error-corrected hardware: gates about 3,000x more accurate than today's.</a:t>
+              <a:t>Picking the best 3 of 8 forest patches: found in 71% of valid runs. Guessing: 1.8%.</a:t>
             </a:r>
           </a:p>
         </p:txBody>
@@ -6890,7 +6890,7 @@
         </p:nvSpPr>
         <p:spPr>
           <a:xfrm>
-            <a:off x="685800" y="4206240"/>
+            <a:off x="685800" y="4059936"/>
             <a:ext cx="10835640" cy="914400"/>
           </a:xfrm>
           <a:prstGeom prst="rect">
@@ -6934,8 +6934,8 @@
         </p:nvSpPr>
         <p:spPr>
           <a:xfrm>
-            <a:off x="868680" y="4206240"/>
-            <a:ext cx="2377440" cy="914400"/>
+            <a:off x="868680" y="4059936"/>
+            <a:ext cx="2194560" cy="914400"/>
           </a:xfrm>
           <a:prstGeom prst="rect">
             <a:avLst/>
@@ -6954,13 +6954,13 @@
               </a:lnSpc>
             </a:pPr>
             <a:r>
-              <a:rPr sz="2400" b="1">
+              <a:rPr sz="2200" b="1">
                 <a:solidFill>
                   <a:srgbClr val="0C3D2B"/>
                 </a:solidFill>
                 <a:latin typeface="Calibri"/>
               </a:rPr>
-              <a:t>Then</a:t>
+              <a:t>Later</a:t>
             </a:r>
           </a:p>
         </p:txBody>
@@ -6973,8 +6973,8 @@
         </p:nvSpPr>
         <p:spPr>
           <a:xfrm>
-            <a:off x="3246120" y="4206240"/>
-            <a:ext cx="8092440" cy="914400"/>
+            <a:off x="3063239" y="4059936"/>
+            <a:ext cx="8275319" cy="914400"/>
           </a:xfrm>
           <a:prstGeom prst="rect">
             <a:avLst/>
@@ -6993,13 +6993,13 @@
               </a:lnSpc>
             </a:pPr>
             <a:r>
-              <a:rPr sz="2200" b="0">
+              <a:rPr sz="2000" b="0">
                 <a:solidFill>
                   <a:srgbClr val="0F2419"/>
                 </a:solidFill>
                 <a:latin typeface="Calibri"/>
               </a:rPr>
-              <a:t>QAE needs 2,000 runs where Monte Carlo needs 98,000 for plus or minus 1%. Thousands of projects, weekly.</a:t>
+              <a:t>For 1% precision, polling needs about 98,000 questions and quantum about 2,000. That helps when each question is a heavy simulation.</a:t>
             </a:r>
           </a:p>
         </p:txBody>
@@ -7012,7 +7012,7 @@
         </p:nvSpPr>
         <p:spPr>
           <a:xfrm>
-            <a:off x="685800" y="5257800"/>
+            <a:off x="685800" y="5084064"/>
             <a:ext cx="10835640" cy="914400"/>
           </a:xfrm>
           <a:prstGeom prst="rect">
@@ -7056,8 +7056,8 @@
         </p:nvSpPr>
         <p:spPr>
           <a:xfrm>
-            <a:off x="868680" y="5257800"/>
-            <a:ext cx="2377440" cy="914400"/>
+            <a:off x="868680" y="5084064"/>
+            <a:ext cx="2194560" cy="914400"/>
           </a:xfrm>
           <a:prstGeom prst="rect">
             <a:avLst/>
@@ -7076,13 +7076,13 @@
               </a:lnSpc>
             </a:pPr>
             <a:r>
-              <a:rPr sz="2400" b="1">
+              <a:rPr sz="2200" b="1">
                 <a:solidFill>
                   <a:srgbClr val="0C3D2B"/>
                 </a:solidFill>
                 <a:latin typeface="Calibri"/>
               </a:rPr>
-              <a:t>Until then</a:t>
+              <a:t>Needed</a:t>
             </a:r>
           </a:p>
         </p:txBody>
@@ -7095,8 +7095,8 @@
         </p:nvSpPr>
         <p:spPr>
           <a:xfrm>
-            <a:off x="3246120" y="5257800"/>
-            <a:ext cx="8092440" cy="914400"/>
+            <a:off x="3063239" y="5084064"/>
+            <a:ext cx="8275319" cy="914400"/>
           </a:xfrm>
           <a:prstGeom prst="rect">
             <a:avLst/>
@@ -7115,13 +7115,13 @@
               </a:lnSpc>
             </a:pPr>
             <a:r>
-              <a:rPr sz="2200" b="0">
+              <a:rPr sz="2000" b="0">
                 <a:solidFill>
                   <a:srgbClr val="0F2419"/>
                 </a:solidFill>
                 <a:latin typeface="Calibri"/>
               </a:rPr>
-              <a:t>Classical methods win at every size we can run.</a:t>
+              <a:t>Chips that make about 3,000 times fewer mistakes.</a:t>
             </a:r>
           </a:p>
         </p:txBody>
@@ -7256,7 +7256,7 @@
                 </a:solidFill>
                 <a:latin typeface="Calibri"/>
               </a:rPr>
-              <a:t>Who pays: the people who rely on credits</a:t>
+              <a:t>Who would pay for this</a:t>
             </a:r>
           </a:p>
         </p:txBody>
@@ -7313,8 +7313,8 @@
         </p:nvSpPr>
         <p:spPr>
           <a:xfrm>
-            <a:off x="685800" y="2194560"/>
-            <a:ext cx="10835640" cy="658368"/>
+            <a:off x="685800" y="2011680"/>
+            <a:ext cx="10835640" cy="713232"/>
           </a:xfrm>
           <a:prstGeom prst="rect">
             <a:avLst/>
@@ -7357,8 +7357,8 @@
         </p:nvSpPr>
         <p:spPr>
           <a:xfrm>
-            <a:off x="868680" y="2194560"/>
-            <a:ext cx="2377440" cy="658368"/>
+            <a:off x="868680" y="2011680"/>
+            <a:ext cx="2377440" cy="713232"/>
           </a:xfrm>
           <a:prstGeom prst="rect">
             <a:avLst/>
@@ -7383,7 +7383,7 @@
                 </a:solidFill>
                 <a:latin typeface="Calibri"/>
               </a:rPr>
-              <a:t>Customers</a:t>
+              <a:t>Who pays</a:t>
             </a:r>
           </a:p>
         </p:txBody>
@@ -7396,8 +7396,8 @@
         </p:nvSpPr>
         <p:spPr>
           <a:xfrm>
-            <a:off x="3246120" y="2194560"/>
-            <a:ext cx="8092440" cy="658368"/>
+            <a:off x="3246120" y="2011680"/>
+            <a:ext cx="8092440" cy="713232"/>
           </a:xfrm>
           <a:prstGeom prst="rect">
             <a:avLst/>
@@ -7422,7 +7422,7 @@
                 </a:solidFill>
                 <a:latin typeface="Calibri"/>
               </a:rPr>
-              <a:t>Credit buyers, registries, insurers, banks.</a:t>
+              <a:t>Credit buyers, registries, insurers and banks. They need to trust credits.</a:t>
             </a:r>
           </a:p>
         </p:txBody>
@@ -7435,8 +7435,8 @@
         </p:nvSpPr>
         <p:spPr>
           <a:xfrm>
-            <a:off x="685800" y="2962656"/>
-            <a:ext cx="10835640" cy="658368"/>
+            <a:off x="685800" y="2834640"/>
+            <a:ext cx="10835640" cy="713232"/>
           </a:xfrm>
           <a:prstGeom prst="rect">
             <a:avLst/>
@@ -7479,8 +7479,8 @@
         </p:nvSpPr>
         <p:spPr>
           <a:xfrm>
-            <a:off x="868680" y="2962656"/>
-            <a:ext cx="2377440" cy="658368"/>
+            <a:off x="868680" y="2834640"/>
+            <a:ext cx="2377440" cy="713232"/>
           </a:xfrm>
           <a:prstGeom prst="rect">
             <a:avLst/>
@@ -7505,7 +7505,7 @@
                 </a:solidFill>
                 <a:latin typeface="Calibri"/>
               </a:rPr>
-              <a:t>Revenue</a:t>
+              <a:t>How</a:t>
             </a:r>
           </a:p>
         </p:txBody>
@@ -7518,8 +7518,8 @@
         </p:nvSpPr>
         <p:spPr>
           <a:xfrm>
-            <a:off x="3246120" y="2962656"/>
-            <a:ext cx="8092440" cy="658368"/>
+            <a:off x="3246120" y="2834640"/>
+            <a:ext cx="8092440" cy="713232"/>
           </a:xfrm>
           <a:prstGeom prst="rect">
             <a:avLst/>
@@ -7544,7 +7544,7 @@
                 </a:solidFill>
                 <a:latin typeface="Calibri"/>
               </a:rPr>
-              <a:t>Subscription per monitored project.</a:t>
+              <a:t>A subscription for each project we monitor.</a:t>
             </a:r>
           </a:p>
         </p:txBody>
@@ -7557,8 +7557,8 @@
         </p:nvSpPr>
         <p:spPr>
           <a:xfrm>
-            <a:off x="685800" y="3730752"/>
-            <a:ext cx="10835640" cy="658368"/>
+            <a:off x="685800" y="3657600"/>
+            <a:ext cx="10835640" cy="713232"/>
           </a:xfrm>
           <a:prstGeom prst="rect">
             <a:avLst/>
@@ -7601,8 +7601,8 @@
         </p:nvSpPr>
         <p:spPr>
           <a:xfrm>
-            <a:off x="868680" y="3730752"/>
-            <a:ext cx="2377440" cy="658368"/>
+            <a:off x="868680" y="3657600"/>
+            <a:ext cx="2377440" cy="713232"/>
           </a:xfrm>
           <a:prstGeom prst="rect">
             <a:avLst/>
@@ -7627,7 +7627,7 @@
                 </a:solidFill>
                 <a:latin typeface="Calibri"/>
               </a:rPr>
-              <a:t>Status</a:t>
+              <a:t>Today</a:t>
             </a:r>
           </a:p>
         </p:txBody>
@@ -7640,8 +7640,8 @@
         </p:nvSpPr>
         <p:spPr>
           <a:xfrm>
-            <a:off x="3246120" y="3730752"/>
-            <a:ext cx="8092440" cy="658368"/>
+            <a:off x="3246120" y="3657600"/>
+            <a:ext cx="8092440" cy="713232"/>
           </a:xfrm>
           <a:prstGeom prst="rect">
             <a:avLst/>
@@ -7666,7 +7666,7 @@
                 </a:solidFill>
                 <a:latin typeface="Calibri"/>
               </a:rPr>
-              <a:t>Prototype on 4 projects. NFTs on Base Sepolia (test network).</a:t>
+              <a:t>Working prototype on 4 projects. NFTs on a test blockchain, not real money.</a:t>
             </a:r>
           </a:p>
         </p:txBody>
@@ -7679,8 +7679,8 @@
         </p:nvSpPr>
         <p:spPr>
           <a:xfrm>
-            <a:off x="685800" y="4498848"/>
-            <a:ext cx="10835640" cy="658368"/>
+            <a:off x="685800" y="4480560"/>
+            <a:ext cx="10835640" cy="713232"/>
           </a:xfrm>
           <a:prstGeom prst="rect">
             <a:avLst/>
@@ -7723,8 +7723,8 @@
         </p:nvSpPr>
         <p:spPr>
           <a:xfrm>
-            <a:off x="868680" y="4498848"/>
-            <a:ext cx="2377440" cy="658368"/>
+            <a:off x="868680" y="4480560"/>
+            <a:ext cx="2377440" cy="713232"/>
           </a:xfrm>
           <a:prstGeom prst="rect">
             <a:avLst/>
@@ -7762,8 +7762,8 @@
         </p:nvSpPr>
         <p:spPr>
           <a:xfrm>
-            <a:off x="3246120" y="4498848"/>
-            <a:ext cx="8092440" cy="658368"/>
+            <a:off x="3246120" y="4480560"/>
+            <a:ext cx="8092440" cy="713232"/>
           </a:xfrm>
           <a:prstGeom prst="rect">
             <a:avLst/>
@@ -7788,7 +7788,7 @@
                 </a:solidFill>
                 <a:latin typeface="Calibri"/>
               </a:rPr>
-              <a:t>Quantum runs, monitoring, NFT status, upload dashboard.</a:t>
+              <a:t>Quantum tests, weekly monitoring, NFT score, upload page.</a:t>
             </a:r>
           </a:p>
         </p:txBody>
@@ -7801,8 +7801,8 @@
         </p:nvSpPr>
         <p:spPr>
           <a:xfrm>
-            <a:off x="685800" y="5266944"/>
-            <a:ext cx="10835640" cy="658368"/>
+            <a:off x="685800" y="5303520"/>
+            <a:ext cx="10835640" cy="713232"/>
           </a:xfrm>
           <a:prstGeom prst="rect">
             <a:avLst/>
@@ -7845,8 +7845,8 @@
         </p:nvSpPr>
         <p:spPr>
           <a:xfrm>
-            <a:off x="868680" y="5266944"/>
-            <a:ext cx="2377440" cy="658368"/>
+            <a:off x="868680" y="5303520"/>
+            <a:ext cx="2377440" cy="713232"/>
           </a:xfrm>
           <a:prstGeom prst="rect">
             <a:avLst/>
@@ -7884,8 +7884,8 @@
         </p:nvSpPr>
         <p:spPr>
           <a:xfrm>
-            <a:off x="3246120" y="5266944"/>
-            <a:ext cx="8092440" cy="658368"/>
+            <a:off x="3246120" y="5303520"/>
+            <a:ext cx="8092440" cy="713232"/>
           </a:xfrm>
           <a:prstGeom prst="rect">
             <a:avLst/>
@@ -7910,7 +7910,7 @@
                 </a:solidFill>
                 <a:latin typeface="Calibri"/>
               </a:rPr>
-              <a:t>Replace assumed carbon densities with project data.</a:t>
+              <a:t>Use real carbon data from each project instead of our guess.</a:t>
             </a:r>
           </a:p>
         </p:txBody>
@@ -7949,7 +7949,7 @@
                 </a:solidFill>
                 <a:latin typeface="Calibri"/>
               </a:rPr>
-              <a:t>Built with: Google Earth Engine, RADD radar alerts, Qiskit, IBM Quantum, Base Sepolia, IPFS</a:t>
+              <a:t>Built with: Google Earth Engine, radar satellite data, Qiskit, IBM Quantum, Base Sepolia, IPFS</a:t>
             </a:r>
           </a:p>
         </p:txBody>

--- a/docs/Qanopy_pitch.pptx
+++ b/docs/Qanopy_pitch.pptx
@@ -12,6 +12,7 @@
     <p:sldId id="260" r:id="rId12"/>
     <p:sldId id="261" r:id="rId13"/>
     <p:sldId id="262" r:id="rId14"/>
+    <p:sldId id="263" r:id="rId15"/>
   </p:sldIdLst>
   <p:sldSz cx="12191695" cy="6858000" type="screen4x3"/>
   <p:notesSz cx="6858000" cy="9144000"/>
@@ -858,7 +859,7 @@
           <a:lstStyle/>
           <a:p>
             <a:r>
-              <a:t>Today, normal computers win at every size we can run. We also asked the quantum computer to pick the best three of eight patches. It found the best choice in 71% of valid runs, against 1.8% for guessing. Later, one-percent precision needs about 98,000 questions by polling and 2,000 by quantum. That matters when each question is a heavy simulation and we watch thousands of projects. Chips must first make 3,000 times fewer mistakes.</a:t>
+              <a:t>Why does quantum matter later? Today we compute the average exactly, so we do not need it. It pays off when the check becomes a heavy computer simulation, like a model of where forest will be cut. Then every question is expensive, and the number of questions decides the cost. The more precise you want the answer, the more quantum saves: about 4 times fewer questions at 10% precision, about 430 times fewer at 0.1%.</a:t>
             </a:r>
           </a:p>
         </p:txBody>
@@ -928,7 +929,77 @@
           <a:lstStyle/>
           <a:p>
             <a:r>
-              <a:t>Credit buyers, registries, insurers and banks need to trust credits. They would pay a subscription per project. We have a working prototype on four projects. The NFTs are on a test blockchain, not real money. Next, we replace our guess of how much carbon a forest holds with project data.</a:t>
+              <a:t>Here is what that means. Take 1,000 projects, checked once a week, and say one simulation takes one second. For 1% precision, the normal method needs about 2 years of computing. The quantum method needs about 20 days. At 0.1% precision, it is 229 years against 196 days. The catch: chips must first make 2,400 times fewer mistakes, and each quantum run costs more. Until then, normal computers do the work.</a:t>
+            </a:r>
+          </a:p>
+        </p:txBody>
+      </p:sp>
+      <p:sp>
+        <p:nvSpPr>
+          <p:cNvPr id="4" name="Slide Number Placeholder 3"/>
+          <p:cNvSpPr>
+            <a:spLocks noGrp="1"/>
+          </p:cNvSpPr>
+          <p:nvPr>
+            <p:ph type="sldNum" idx="5" sz="quarter"/>
+          </p:nvPr>
+        </p:nvSpPr>
+        <p:spPr/>
+      </p:sp>
+    </p:spTree>
+  </p:cSld>
+  <p:clrMapOvr>
+    <a:masterClrMapping/>
+  </p:clrMapOvr>
+</p:notes>
+</file>
+
+<file path=ppt/notesSlides/notesSlide8.xml><?xml version="1.0" encoding="utf-8"?>
+<p:notes xmlns:a="http://schemas.openxmlformats.org/drawingml/2006/main" xmlns:p="http://schemas.openxmlformats.org/presentationml/2006/main" xmlns:r="http://schemas.openxmlformats.org/officeDocument/2006/relationships">
+  <p:cSld>
+    <p:spTree>
+      <p:nvGrpSpPr>
+        <p:cNvPr id="1" name=""/>
+        <p:cNvGrpSpPr/>
+        <p:nvPr/>
+      </p:nvGrpSpPr>
+      <p:grpSpPr>
+        <a:xfrm>
+          <a:off x="0" y="0"/>
+          <a:ext cx="0" cy="0"/>
+          <a:chOff x="0" y="0"/>
+          <a:chExt cx="0" cy="0"/>
+        </a:xfrm>
+      </p:grpSpPr>
+      <p:sp>
+        <p:nvSpPr>
+          <p:cNvPr id="2" name="Slide Image Placeholder 1"/>
+          <p:cNvSpPr>
+            <a:spLocks noGrp="1"/>
+          </p:cNvSpPr>
+          <p:nvPr>
+            <p:ph type="sldImg" idx="2"/>
+          </p:nvPr>
+        </p:nvSpPr>
+        <p:spPr/>
+      </p:sp>
+      <p:sp>
+        <p:nvSpPr>
+          <p:cNvPr id="3" name="Notes Placeholder 2"/>
+          <p:cNvSpPr>
+            <a:spLocks noGrp="1"/>
+          </p:cNvSpPr>
+          <p:nvPr>
+            <p:ph type="body" idx="3" sz="quarter"/>
+          </p:nvPr>
+        </p:nvSpPr>
+        <p:spPr/>
+        <p:txBody>
+          <a:bodyPr/>
+          <a:lstStyle/>
+          <a:p>
+            <a:r>
+              <a:t>Credit buyers, registries, insurers and banks need to trust credits. They would pay a subscription per project. We have a working prototype on four projects, with NFTs on a test blockchain. Next, we replace our guess of how much carbon a forest holds with project data.</a:t>
             </a:r>
           </a:p>
         </p:txBody>
@@ -4692,7 +4763,7 @@
                 </a:solidFill>
                 <a:latin typeface="Calibri"/>
               </a:rPr>
-              <a:t>We compare protected forest with look-alike forest</a:t>
+              <a:t>We compare the protected forest with look-alike forest nearby</a:t>
             </a:r>
           </a:p>
         </p:txBody>
@@ -6563,7 +6634,7 @@
         </p:nvSpPr>
         <p:spPr>
           <a:xfrm>
-            <a:off x="640080" y="502920"/>
+            <a:off x="640080" y="365760"/>
             <a:ext cx="10881360" cy="1188720"/>
           </a:xfrm>
           <a:prstGeom prst="rect">
@@ -6583,13 +6654,13 @@
               </a:lnSpc>
             </a:pPr>
             <a:r>
-              <a:rPr sz="4000" b="1">
+              <a:rPr sz="3400" b="1">
                 <a:solidFill>
                   <a:srgbClr val="0C3D2B"/>
                 </a:solidFill>
                 <a:latin typeface="Calibri"/>
               </a:rPr>
-              <a:t>Quantum could save computing time at large scale</a:t>
+              <a:t>The more precise the check, the more quantum saves</a:t>
             </a:r>
           </a:p>
         </p:txBody>
@@ -6602,7 +6673,7 @@
         </p:nvSpPr>
         <p:spPr>
           <a:xfrm>
-            <a:off x="685800" y="1764792"/>
+            <a:off x="685800" y="1234440"/>
             <a:ext cx="1097280" cy="64008"/>
           </a:xfrm>
           <a:prstGeom prst="rect">
@@ -6638,16 +6709,40 @@
           </a:p>
         </p:txBody>
       </p:sp>
-      <p:sp>
-        <p:nvSpPr>
-          <p:cNvPr id="4" name="Rectangle 3"/>
+      <p:pic>
+        <p:nvPicPr>
+          <p:cNvPr id="4" name="Picture 3" descr="chart_precision.png"/>
+          <p:cNvPicPr>
+            <a:picLocks noChangeAspect="1"/>
+          </p:cNvPicPr>
+          <p:nvPr/>
+        </p:nvPicPr>
+        <p:blipFill>
+          <a:blip r:embed="rId3"/>
+          <a:stretch>
+            <a:fillRect/>
+          </a:stretch>
+        </p:blipFill>
+        <p:spPr>
+          <a:xfrm>
+            <a:off x="548640" y="1600200"/>
+            <a:ext cx="6035040" cy="4023360"/>
+          </a:xfrm>
+          <a:prstGeom prst="rect">
+            <a:avLst/>
+          </a:prstGeom>
+        </p:spPr>
+      </p:pic>
+      <p:sp>
+        <p:nvSpPr>
+          <p:cNvPr id="5" name="Rectangle 4"/>
           <p:cNvSpPr/>
           <p:nvPr/>
         </p:nvSpPr>
         <p:spPr>
           <a:xfrm>
-            <a:off x="685800" y="2011680"/>
-            <a:ext cx="10835640" cy="914400"/>
+            <a:off x="6858000" y="1783080"/>
+            <a:ext cx="4709160" cy="1234440"/>
           </a:xfrm>
           <a:prstGeom prst="rect">
             <a:avLst/>
@@ -6684,14 +6779,14 @@
       </p:sp>
       <p:sp>
         <p:nvSpPr>
-          <p:cNvPr id="5" name="TextBox 4"/>
+          <p:cNvPr id="6" name="TextBox 5"/>
           <p:cNvSpPr txBox="1"/>
           <p:nvPr/>
         </p:nvSpPr>
         <p:spPr>
           <a:xfrm>
-            <a:off x="868680" y="2011680"/>
-            <a:ext cx="2194560" cy="914400"/>
+            <a:off x="7040880" y="1783080"/>
+            <a:ext cx="1188720" cy="1234440"/>
           </a:xfrm>
           <a:prstGeom prst="rect">
             <a:avLst/>
@@ -6710,7 +6805,7 @@
               </a:lnSpc>
             </a:pPr>
             <a:r>
-              <a:rPr sz="2200" b="1">
+              <a:rPr sz="2100" b="1">
                 <a:solidFill>
                   <a:srgbClr val="0C3D2B"/>
                 </a:solidFill>
@@ -6723,14 +6818,14 @@
       </p:sp>
       <p:sp>
         <p:nvSpPr>
-          <p:cNvPr id="6" name="TextBox 5"/>
+          <p:cNvPr id="7" name="TextBox 6"/>
           <p:cNvSpPr txBox="1"/>
           <p:nvPr/>
         </p:nvSpPr>
         <p:spPr>
           <a:xfrm>
-            <a:off x="3063239" y="2011680"/>
-            <a:ext cx="8275319" cy="914400"/>
+            <a:off x="8229600" y="1783080"/>
+            <a:ext cx="3154680" cy="1234440"/>
           </a:xfrm>
           <a:prstGeom prst="rect">
             <a:avLst/>
@@ -6749,27 +6844,27 @@
               </a:lnSpc>
             </a:pPr>
             <a:r>
-              <a:rPr sz="2000" b="0">
+              <a:rPr sz="1900" b="0">
                 <a:solidFill>
                   <a:srgbClr val="0F2419"/>
                 </a:solidFill>
                 <a:latin typeface="Calibri"/>
               </a:rPr>
-              <a:t>Normal computers win at every size we can run. Our quantum parts are tests.</a:t>
-            </a:r>
-          </a:p>
-        </p:txBody>
-      </p:sp>
-      <p:sp>
-        <p:nvSpPr>
-          <p:cNvPr id="7" name="Rectangle 6"/>
+              <a:t>We compute the average exactly. No quantum needed.</a:t>
+            </a:r>
+          </a:p>
+        </p:txBody>
+      </p:sp>
+      <p:sp>
+        <p:nvSpPr>
+          <p:cNvPr id="8" name="Rectangle 7"/>
           <p:cNvSpPr/>
           <p:nvPr/>
         </p:nvSpPr>
         <p:spPr>
           <a:xfrm>
-            <a:off x="685800" y="3035808"/>
-            <a:ext cx="10835640" cy="914400"/>
+            <a:off x="6858000" y="3200400"/>
+            <a:ext cx="4709160" cy="1234440"/>
           </a:xfrm>
           <a:prstGeom prst="rect">
             <a:avLst/>
@@ -6806,14 +6901,14 @@
       </p:sp>
       <p:sp>
         <p:nvSpPr>
-          <p:cNvPr id="8" name="TextBox 7"/>
+          <p:cNvPr id="9" name="TextBox 8"/>
           <p:cNvSpPr txBox="1"/>
           <p:nvPr/>
         </p:nvSpPr>
         <p:spPr>
           <a:xfrm>
-            <a:off x="868680" y="3035808"/>
-            <a:ext cx="2194560" cy="914400"/>
+            <a:off x="7040880" y="3200400"/>
+            <a:ext cx="1188720" cy="1234440"/>
           </a:xfrm>
           <a:prstGeom prst="rect">
             <a:avLst/>
@@ -6832,27 +6927,27 @@
               </a:lnSpc>
             </a:pPr>
             <a:r>
-              <a:rPr sz="2200" b="1">
+              <a:rPr sz="2100" b="1">
                 <a:solidFill>
                   <a:srgbClr val="0C3D2B"/>
                 </a:solidFill>
                 <a:latin typeface="Calibri"/>
               </a:rPr>
-              <a:t>Also tested</a:t>
-            </a:r>
-          </a:p>
-        </p:txBody>
-      </p:sp>
-      <p:sp>
-        <p:nvSpPr>
-          <p:cNvPr id="9" name="TextBox 8"/>
+              <a:t>Later</a:t>
+            </a:r>
+          </a:p>
+        </p:txBody>
+      </p:sp>
+      <p:sp>
+        <p:nvSpPr>
+          <p:cNvPr id="10" name="TextBox 9"/>
           <p:cNvSpPr txBox="1"/>
           <p:nvPr/>
         </p:nvSpPr>
         <p:spPr>
           <a:xfrm>
-            <a:off x="3063239" y="3035808"/>
-            <a:ext cx="8275319" cy="914400"/>
+            <a:off x="8229600" y="3200400"/>
+            <a:ext cx="3154680" cy="1234440"/>
           </a:xfrm>
           <a:prstGeom prst="rect">
             <a:avLst/>
@@ -6871,27 +6966,27 @@
               </a:lnSpc>
             </a:pPr>
             <a:r>
-              <a:rPr sz="2000" b="0">
+              <a:rPr sz="1900" b="0">
                 <a:solidFill>
                   <a:srgbClr val="0F2419"/>
                 </a:solidFill>
                 <a:latin typeface="Calibri"/>
               </a:rPr>
-              <a:t>Picking the best 3 of 8 forest patches: found in 71% of valid runs. Guessing: 1.8%.</a:t>
-            </a:r>
-          </a:p>
-        </p:txBody>
-      </p:sp>
-      <p:sp>
-        <p:nvSpPr>
-          <p:cNvPr id="10" name="Rectangle 9"/>
+              <a:t>If the check becomes a heavy simulation, every question is costly.</a:t>
+            </a:r>
+          </a:p>
+        </p:txBody>
+      </p:sp>
+      <p:sp>
+        <p:nvSpPr>
+          <p:cNvPr id="11" name="Rectangle 10"/>
           <p:cNvSpPr/>
           <p:nvPr/>
         </p:nvSpPr>
         <p:spPr>
           <a:xfrm>
-            <a:off x="685800" y="4059936"/>
-            <a:ext cx="10835640" cy="914400"/>
+            <a:off x="6858000" y="4617720"/>
+            <a:ext cx="4709160" cy="1234440"/>
           </a:xfrm>
           <a:prstGeom prst="rect">
             <a:avLst/>
@@ -6928,14 +7023,14 @@
       </p:sp>
       <p:sp>
         <p:nvSpPr>
-          <p:cNvPr id="11" name="TextBox 10"/>
+          <p:cNvPr id="12" name="TextBox 11"/>
           <p:cNvSpPr txBox="1"/>
           <p:nvPr/>
         </p:nvSpPr>
         <p:spPr>
           <a:xfrm>
-            <a:off x="868680" y="4059936"/>
-            <a:ext cx="2194560" cy="914400"/>
+            <a:off x="7040880" y="4617720"/>
+            <a:ext cx="1188720" cy="1234440"/>
           </a:xfrm>
           <a:prstGeom prst="rect">
             <a:avLst/>
@@ -6954,27 +7049,27 @@
               </a:lnSpc>
             </a:pPr>
             <a:r>
-              <a:rPr sz="2200" b="1">
+              <a:rPr sz="2100" b="1">
                 <a:solidFill>
                   <a:srgbClr val="0C3D2B"/>
                 </a:solidFill>
                 <a:latin typeface="Calibri"/>
               </a:rPr>
-              <a:t>Later</a:t>
-            </a:r>
-          </a:p>
-        </p:txBody>
-      </p:sp>
-      <p:sp>
-        <p:nvSpPr>
-          <p:cNvPr id="12" name="TextBox 11"/>
+              <a:t>The gap</a:t>
+            </a:r>
+          </a:p>
+        </p:txBody>
+      </p:sp>
+      <p:sp>
+        <p:nvSpPr>
+          <p:cNvPr id="13" name="TextBox 12"/>
           <p:cNvSpPr txBox="1"/>
           <p:nvPr/>
         </p:nvSpPr>
         <p:spPr>
           <a:xfrm>
-            <a:off x="3063239" y="4059936"/>
-            <a:ext cx="8275319" cy="914400"/>
+            <a:off x="8229600" y="4617720"/>
+            <a:ext cx="3154680" cy="1234440"/>
           </a:xfrm>
           <a:prstGeom prst="rect">
             <a:avLst/>
@@ -6993,58 +7088,14 @@
               </a:lnSpc>
             </a:pPr>
             <a:r>
-              <a:rPr sz="2000" b="0">
+              <a:rPr sz="1900" b="0">
                 <a:solidFill>
                   <a:srgbClr val="0F2419"/>
                 </a:solidFill>
                 <a:latin typeface="Calibri"/>
               </a:rPr>
-              <a:t>For 1% precision, polling needs about 98,000 questions and quantum about 2,000. That helps when each question is a heavy simulation.</a:t>
-            </a:r>
-          </a:p>
-        </p:txBody>
-      </p:sp>
-      <p:sp>
-        <p:nvSpPr>
-          <p:cNvPr id="13" name="Rectangle 12"/>
-          <p:cNvSpPr/>
-          <p:nvPr/>
-        </p:nvSpPr>
-        <p:spPr>
-          <a:xfrm>
-            <a:off x="685800" y="5084064"/>
-            <a:ext cx="10835640" cy="914400"/>
-          </a:xfrm>
-          <a:prstGeom prst="rect">
-            <a:avLst/>
-          </a:prstGeom>
-          <a:solidFill>
-            <a:srgbClr val="E6F4EC"/>
-          </a:solidFill>
-          <a:ln>
-            <a:noFill/>
-          </a:ln>
-          <a:effectLst/>
-        </p:spPr>
-        <p:style>
-          <a:lnRef idx="1">
-            <a:schemeClr val="accent1"/>
-          </a:lnRef>
-          <a:fillRef idx="3">
-            <a:schemeClr val="accent1"/>
-          </a:fillRef>
-          <a:effectRef idx="2">
-            <a:schemeClr val="accent1"/>
-          </a:effectRef>
-          <a:fontRef idx="minor">
-            <a:schemeClr val="lt1"/>
-          </a:fontRef>
-        </p:style>
-        <p:txBody>
-          <a:bodyPr rtlCol="0" anchor="ctr"/>
-          <a:lstStyle/>
-          <a:p>
-            <a:pPr algn="ctr"/>
+              <a:t>Quantum saves 4x at 10% precision and 430x at 0.1%.</a:t>
+            </a:r>
           </a:p>
         </p:txBody>
       </p:sp>
@@ -7056,8 +7107,8 @@
         </p:nvSpPr>
         <p:spPr>
           <a:xfrm>
-            <a:off x="868680" y="5084064"/>
-            <a:ext cx="2194560" cy="914400"/>
+            <a:off x="6858000" y="5943600"/>
+            <a:ext cx="4754880" cy="548640"/>
           </a:xfrm>
           <a:prstGeom prst="rect">
             <a:avLst/>
@@ -7065,7 +7116,7 @@
           <a:noFill/>
         </p:spPr>
         <p:txBody>
-          <a:bodyPr wrap="square" anchor="ctr" lIns="45720" rIns="45720" tIns="27432" bIns="27432">
+          <a:bodyPr wrap="square" anchor="t" lIns="45720" rIns="45720" tIns="27432" bIns="27432">
             <a:spAutoFit/>
           </a:bodyPr>
           <a:lstStyle/>
@@ -7076,13 +7127,13 @@
               </a:lnSpc>
             </a:pPr>
             <a:r>
-              <a:rPr sz="2200" b="1">
-                <a:solidFill>
-                  <a:srgbClr val="0C3D2B"/>
+              <a:rPr sz="1300" b="0">
+                <a:solidFill>
+                  <a:srgbClr val="587063"/>
                 </a:solidFill>
                 <a:latin typeface="Calibri"/>
               </a:rPr>
-              <a:t>Needed</a:t>
+              <a:t>Number of questions for this project, from the formulas in our code.</a:t>
             </a:r>
           </a:p>
         </p:txBody>
@@ -7090,45 +7141,6 @@
       <p:sp>
         <p:nvSpPr>
           <p:cNvPr id="15" name="TextBox 14"/>
-          <p:cNvSpPr txBox="1"/>
-          <p:nvPr/>
-        </p:nvSpPr>
-        <p:spPr>
-          <a:xfrm>
-            <a:off x="3063239" y="5084064"/>
-            <a:ext cx="8275319" cy="914400"/>
-          </a:xfrm>
-          <a:prstGeom prst="rect">
-            <a:avLst/>
-          </a:prstGeom>
-          <a:noFill/>
-        </p:spPr>
-        <p:txBody>
-          <a:bodyPr wrap="square" anchor="ctr" lIns="45720" rIns="45720" tIns="27432" bIns="27432">
-            <a:spAutoFit/>
-          </a:bodyPr>
-          <a:lstStyle/>
-          <a:p>
-            <a:pPr algn="l">
-              <a:lnSpc>
-                <a:spcPct val="100000"/>
-              </a:lnSpc>
-            </a:pPr>
-            <a:r>
-              <a:rPr sz="2000" b="0">
-                <a:solidFill>
-                  <a:srgbClr val="0F2419"/>
-                </a:solidFill>
-                <a:latin typeface="Calibri"/>
-              </a:rPr>
-              <a:t>Chips that make about 3,000 times fewer mistakes.</a:t>
-            </a:r>
-          </a:p>
-        </p:txBody>
-      </p:sp>
-      <p:sp>
-        <p:nvSpPr>
-          <p:cNvPr id="16" name="TextBox 15"/>
           <p:cNvSpPr txBox="1"/>
           <p:nvPr/>
         </p:nvSpPr>
@@ -7167,7 +7179,7 @@
       </p:sp>
       <p:sp>
         <p:nvSpPr>
-          <p:cNvPr id="17" name="TextBox 16"/>
+          <p:cNvPr id="16" name="TextBox 15"/>
           <p:cNvSpPr txBox="1"/>
           <p:nvPr/>
         </p:nvSpPr>
@@ -7213,6 +7225,614 @@
 </file>
 
 <file path=ppt/slides/slide7.xml><?xml version="1.0" encoding="utf-8"?>
+<p:sld xmlns:a="http://schemas.openxmlformats.org/drawingml/2006/main" xmlns:p="http://schemas.openxmlformats.org/presentationml/2006/main" xmlns:r="http://schemas.openxmlformats.org/officeDocument/2006/relationships">
+  <p:cSld>
+    <p:spTree>
+      <p:nvGrpSpPr>
+        <p:cNvPr id="1" name=""/>
+        <p:cNvGrpSpPr/>
+        <p:nvPr/>
+      </p:nvGrpSpPr>
+      <p:grpSpPr/>
+      <p:sp>
+        <p:nvSpPr>
+          <p:cNvPr id="2" name="TextBox 1"/>
+          <p:cNvSpPr txBox="1"/>
+          <p:nvPr/>
+        </p:nvSpPr>
+        <p:spPr>
+          <a:xfrm>
+            <a:off x="640080" y="365760"/>
+            <a:ext cx="10881360" cy="1188720"/>
+          </a:xfrm>
+          <a:prstGeom prst="rect">
+            <a:avLst/>
+          </a:prstGeom>
+          <a:noFill/>
+        </p:spPr>
+        <p:txBody>
+          <a:bodyPr wrap="square" anchor="t" lIns="45720" rIns="45720" tIns="27432" bIns="27432">
+            <a:spAutoFit/>
+          </a:bodyPr>
+          <a:lstStyle/>
+          <a:p>
+            <a:pPr algn="l">
+              <a:lnSpc>
+                <a:spcPct val="95000"/>
+              </a:lnSpc>
+            </a:pPr>
+            <a:r>
+              <a:rPr sz="3400" b="1">
+                <a:solidFill>
+                  <a:srgbClr val="0C3D2B"/>
+                </a:solidFill>
+                <a:latin typeface="Calibri"/>
+              </a:rPr>
+              <a:t>What it saves: 1,000 projects, checked every week</a:t>
+            </a:r>
+          </a:p>
+        </p:txBody>
+      </p:sp>
+      <p:sp>
+        <p:nvSpPr>
+          <p:cNvPr id="3" name="Rectangle 2"/>
+          <p:cNvSpPr/>
+          <p:nvPr/>
+        </p:nvSpPr>
+        <p:spPr>
+          <a:xfrm>
+            <a:off x="685800" y="1234440"/>
+            <a:ext cx="1097280" cy="64008"/>
+          </a:xfrm>
+          <a:prstGeom prst="rect">
+            <a:avLst/>
+          </a:prstGeom>
+          <a:solidFill>
+            <a:srgbClr val="15935F"/>
+          </a:solidFill>
+          <a:ln>
+            <a:noFill/>
+          </a:ln>
+          <a:effectLst/>
+        </p:spPr>
+        <p:style>
+          <a:lnRef idx="1">
+            <a:schemeClr val="accent1"/>
+          </a:lnRef>
+          <a:fillRef idx="3">
+            <a:schemeClr val="accent1"/>
+          </a:fillRef>
+          <a:effectRef idx="2">
+            <a:schemeClr val="accent1"/>
+          </a:effectRef>
+          <a:fontRef idx="minor">
+            <a:schemeClr val="lt1"/>
+          </a:fontRef>
+        </p:style>
+        <p:txBody>
+          <a:bodyPr rtlCol="0" anchor="ctr"/>
+          <a:lstStyle/>
+          <a:p>
+            <a:pPr algn="ctr"/>
+          </a:p>
+        </p:txBody>
+      </p:sp>
+      <p:pic>
+        <p:nvPicPr>
+          <p:cNvPr id="4" name="Picture 3" descr="chart_days.png"/>
+          <p:cNvPicPr>
+            <a:picLocks noChangeAspect="1"/>
+          </p:cNvPicPr>
+          <p:nvPr/>
+        </p:nvPicPr>
+        <p:blipFill>
+          <a:blip r:embed="rId3"/>
+          <a:stretch>
+            <a:fillRect/>
+          </a:stretch>
+        </p:blipFill>
+        <p:spPr>
+          <a:xfrm>
+            <a:off x="548640" y="1600200"/>
+            <a:ext cx="6035040" cy="4023360"/>
+          </a:xfrm>
+          <a:prstGeom prst="rect">
+            <a:avLst/>
+          </a:prstGeom>
+        </p:spPr>
+      </p:pic>
+      <p:sp>
+        <p:nvSpPr>
+          <p:cNvPr id="5" name="Rectangle 4"/>
+          <p:cNvSpPr/>
+          <p:nvPr/>
+        </p:nvSpPr>
+        <p:spPr>
+          <a:xfrm>
+            <a:off x="6858000" y="1783080"/>
+            <a:ext cx="4709160" cy="1234440"/>
+          </a:xfrm>
+          <a:prstGeom prst="rect">
+            <a:avLst/>
+          </a:prstGeom>
+          <a:solidFill>
+            <a:srgbClr val="E6F4EC"/>
+          </a:solidFill>
+          <a:ln>
+            <a:noFill/>
+          </a:ln>
+          <a:effectLst/>
+        </p:spPr>
+        <p:style>
+          <a:lnRef idx="1">
+            <a:schemeClr val="accent1"/>
+          </a:lnRef>
+          <a:fillRef idx="3">
+            <a:schemeClr val="accent1"/>
+          </a:fillRef>
+          <a:effectRef idx="2">
+            <a:schemeClr val="accent1"/>
+          </a:effectRef>
+          <a:fontRef idx="minor">
+            <a:schemeClr val="lt1"/>
+          </a:fontRef>
+        </p:style>
+        <p:txBody>
+          <a:bodyPr rtlCol="0" anchor="ctr"/>
+          <a:lstStyle/>
+          <a:p>
+            <a:pPr algn="ctr"/>
+          </a:p>
+        </p:txBody>
+      </p:sp>
+      <p:sp>
+        <p:nvSpPr>
+          <p:cNvPr id="6" name="TextBox 5"/>
+          <p:cNvSpPr txBox="1"/>
+          <p:nvPr/>
+        </p:nvSpPr>
+        <p:spPr>
+          <a:xfrm>
+            <a:off x="7040880" y="1783080"/>
+            <a:ext cx="1325880" cy="1234440"/>
+          </a:xfrm>
+          <a:prstGeom prst="rect">
+            <a:avLst/>
+          </a:prstGeom>
+          <a:noFill/>
+        </p:spPr>
+        <p:txBody>
+          <a:bodyPr wrap="square" anchor="ctr" lIns="45720" rIns="45720" tIns="27432" bIns="27432">
+            <a:spAutoFit/>
+          </a:bodyPr>
+          <a:lstStyle/>
+          <a:p>
+            <a:pPr algn="l">
+              <a:lnSpc>
+                <a:spcPct val="105000"/>
+              </a:lnSpc>
+            </a:pPr>
+            <a:r>
+              <a:rPr sz="2100" b="1">
+                <a:solidFill>
+                  <a:srgbClr val="0C3D2B"/>
+                </a:solidFill>
+                <a:latin typeface="Calibri"/>
+              </a:rPr>
+              <a:t>Example</a:t>
+            </a:r>
+          </a:p>
+        </p:txBody>
+      </p:sp>
+      <p:sp>
+        <p:nvSpPr>
+          <p:cNvPr id="7" name="TextBox 6"/>
+          <p:cNvSpPr txBox="1"/>
+          <p:nvPr/>
+        </p:nvSpPr>
+        <p:spPr>
+          <a:xfrm>
+            <a:off x="8366760" y="1783080"/>
+            <a:ext cx="3017520" cy="1234440"/>
+          </a:xfrm>
+          <a:prstGeom prst="rect">
+            <a:avLst/>
+          </a:prstGeom>
+          <a:noFill/>
+        </p:spPr>
+        <p:txBody>
+          <a:bodyPr wrap="square" anchor="ctr" lIns="45720" rIns="45720" tIns="27432" bIns="27432">
+            <a:spAutoFit/>
+          </a:bodyPr>
+          <a:lstStyle/>
+          <a:p>
+            <a:pPr algn="l">
+              <a:lnSpc>
+                <a:spcPct val="100000"/>
+              </a:lnSpc>
+            </a:pPr>
+            <a:r>
+              <a:rPr sz="1900" b="0">
+                <a:solidFill>
+                  <a:srgbClr val="0F2419"/>
+                </a:solidFill>
+                <a:latin typeface="Calibri"/>
+              </a:rPr>
+              <a:t>1,000 projects, one estimate each, one simulation takes 1 second.</a:t>
+            </a:r>
+          </a:p>
+        </p:txBody>
+      </p:sp>
+      <p:sp>
+        <p:nvSpPr>
+          <p:cNvPr id="8" name="Rectangle 7"/>
+          <p:cNvSpPr/>
+          <p:nvPr/>
+        </p:nvSpPr>
+        <p:spPr>
+          <a:xfrm>
+            <a:off x="6858000" y="3200400"/>
+            <a:ext cx="4709160" cy="1234440"/>
+          </a:xfrm>
+          <a:prstGeom prst="rect">
+            <a:avLst/>
+          </a:prstGeom>
+          <a:solidFill>
+            <a:srgbClr val="E6F4EC"/>
+          </a:solidFill>
+          <a:ln>
+            <a:noFill/>
+          </a:ln>
+          <a:effectLst/>
+        </p:spPr>
+        <p:style>
+          <a:lnRef idx="1">
+            <a:schemeClr val="accent1"/>
+          </a:lnRef>
+          <a:fillRef idx="3">
+            <a:schemeClr val="accent1"/>
+          </a:fillRef>
+          <a:effectRef idx="2">
+            <a:schemeClr val="accent1"/>
+          </a:effectRef>
+          <a:fontRef idx="minor">
+            <a:schemeClr val="lt1"/>
+          </a:fontRef>
+        </p:style>
+        <p:txBody>
+          <a:bodyPr rtlCol="0" anchor="ctr"/>
+          <a:lstStyle/>
+          <a:p>
+            <a:pPr algn="ctr"/>
+          </a:p>
+        </p:txBody>
+      </p:sp>
+      <p:sp>
+        <p:nvSpPr>
+          <p:cNvPr id="9" name="TextBox 8"/>
+          <p:cNvSpPr txBox="1"/>
+          <p:nvPr/>
+        </p:nvSpPr>
+        <p:spPr>
+          <a:xfrm>
+            <a:off x="7040880" y="3200400"/>
+            <a:ext cx="1325880" cy="1234440"/>
+          </a:xfrm>
+          <a:prstGeom prst="rect">
+            <a:avLst/>
+          </a:prstGeom>
+          <a:noFill/>
+        </p:spPr>
+        <p:txBody>
+          <a:bodyPr wrap="square" anchor="ctr" lIns="45720" rIns="45720" tIns="27432" bIns="27432">
+            <a:spAutoFit/>
+          </a:bodyPr>
+          <a:lstStyle/>
+          <a:p>
+            <a:pPr algn="l">
+              <a:lnSpc>
+                <a:spcPct val="105000"/>
+              </a:lnSpc>
+            </a:pPr>
+            <a:r>
+              <a:rPr sz="2100" b="1">
+                <a:solidFill>
+                  <a:srgbClr val="0C3D2B"/>
+                </a:solidFill>
+                <a:latin typeface="Calibri"/>
+              </a:rPr>
+              <a:t>Payoff</a:t>
+            </a:r>
+          </a:p>
+        </p:txBody>
+      </p:sp>
+      <p:sp>
+        <p:nvSpPr>
+          <p:cNvPr id="10" name="TextBox 9"/>
+          <p:cNvSpPr txBox="1"/>
+          <p:nvPr/>
+        </p:nvSpPr>
+        <p:spPr>
+          <a:xfrm>
+            <a:off x="8366760" y="3200400"/>
+            <a:ext cx="3017520" cy="1234440"/>
+          </a:xfrm>
+          <a:prstGeom prst="rect">
+            <a:avLst/>
+          </a:prstGeom>
+          <a:noFill/>
+        </p:spPr>
+        <p:txBody>
+          <a:bodyPr wrap="square" anchor="ctr" lIns="45720" rIns="45720" tIns="27432" bIns="27432">
+            <a:spAutoFit/>
+          </a:bodyPr>
+          <a:lstStyle/>
+          <a:p>
+            <a:pPr algn="l">
+              <a:lnSpc>
+                <a:spcPct val="100000"/>
+              </a:lnSpc>
+            </a:pPr>
+            <a:r>
+              <a:rPr sz="1900" b="0">
+                <a:solidFill>
+                  <a:srgbClr val="0F2419"/>
+                </a:solidFill>
+                <a:latin typeface="Calibri"/>
+              </a:rPr>
+              <a:t>1% precision: 2.3 years of computing becomes 20 days.</a:t>
+            </a:r>
+          </a:p>
+        </p:txBody>
+      </p:sp>
+      <p:sp>
+        <p:nvSpPr>
+          <p:cNvPr id="11" name="Rectangle 10"/>
+          <p:cNvSpPr/>
+          <p:nvPr/>
+        </p:nvSpPr>
+        <p:spPr>
+          <a:xfrm>
+            <a:off x="6858000" y="4617720"/>
+            <a:ext cx="4709160" cy="1234440"/>
+          </a:xfrm>
+          <a:prstGeom prst="rect">
+            <a:avLst/>
+          </a:prstGeom>
+          <a:solidFill>
+            <a:srgbClr val="E6F4EC"/>
+          </a:solidFill>
+          <a:ln>
+            <a:noFill/>
+          </a:ln>
+          <a:effectLst/>
+        </p:spPr>
+        <p:style>
+          <a:lnRef idx="1">
+            <a:schemeClr val="accent1"/>
+          </a:lnRef>
+          <a:fillRef idx="3">
+            <a:schemeClr val="accent1"/>
+          </a:fillRef>
+          <a:effectRef idx="2">
+            <a:schemeClr val="accent1"/>
+          </a:effectRef>
+          <a:fontRef idx="minor">
+            <a:schemeClr val="lt1"/>
+          </a:fontRef>
+        </p:style>
+        <p:txBody>
+          <a:bodyPr rtlCol="0" anchor="ctr"/>
+          <a:lstStyle/>
+          <a:p>
+            <a:pPr algn="ctr"/>
+          </a:p>
+        </p:txBody>
+      </p:sp>
+      <p:sp>
+        <p:nvSpPr>
+          <p:cNvPr id="12" name="TextBox 11"/>
+          <p:cNvSpPr txBox="1"/>
+          <p:nvPr/>
+        </p:nvSpPr>
+        <p:spPr>
+          <a:xfrm>
+            <a:off x="7040880" y="4617720"/>
+            <a:ext cx="1325880" cy="1234440"/>
+          </a:xfrm>
+          <a:prstGeom prst="rect">
+            <a:avLst/>
+          </a:prstGeom>
+          <a:noFill/>
+        </p:spPr>
+        <p:txBody>
+          <a:bodyPr wrap="square" anchor="ctr" lIns="45720" rIns="45720" tIns="27432" bIns="27432">
+            <a:spAutoFit/>
+          </a:bodyPr>
+          <a:lstStyle/>
+          <a:p>
+            <a:pPr algn="l">
+              <a:lnSpc>
+                <a:spcPct val="105000"/>
+              </a:lnSpc>
+            </a:pPr>
+            <a:r>
+              <a:rPr sz="2100" b="1">
+                <a:solidFill>
+                  <a:srgbClr val="0C3D2B"/>
+                </a:solidFill>
+                <a:latin typeface="Calibri"/>
+              </a:rPr>
+              <a:t>Catch</a:t>
+            </a:r>
+          </a:p>
+        </p:txBody>
+      </p:sp>
+      <p:sp>
+        <p:nvSpPr>
+          <p:cNvPr id="13" name="TextBox 12"/>
+          <p:cNvSpPr txBox="1"/>
+          <p:nvPr/>
+        </p:nvSpPr>
+        <p:spPr>
+          <a:xfrm>
+            <a:off x="8366760" y="4617720"/>
+            <a:ext cx="3017520" cy="1234440"/>
+          </a:xfrm>
+          <a:prstGeom prst="rect">
+            <a:avLst/>
+          </a:prstGeom>
+          <a:noFill/>
+        </p:spPr>
+        <p:txBody>
+          <a:bodyPr wrap="square" anchor="ctr" lIns="45720" rIns="45720" tIns="27432" bIns="27432">
+            <a:spAutoFit/>
+          </a:bodyPr>
+          <a:lstStyle/>
+          <a:p>
+            <a:pPr algn="l">
+              <a:lnSpc>
+                <a:spcPct val="100000"/>
+              </a:lnSpc>
+            </a:pPr>
+            <a:r>
+              <a:rPr sz="1900" b="0">
+                <a:solidFill>
+                  <a:srgbClr val="0F2419"/>
+                </a:solidFill>
+                <a:latin typeface="Calibri"/>
+              </a:rPr>
+              <a:t>Chips need 2,400 times fewer mistakes. Quantum runs cost more.</a:t>
+            </a:r>
+          </a:p>
+        </p:txBody>
+      </p:sp>
+      <p:sp>
+        <p:nvSpPr>
+          <p:cNvPr id="14" name="TextBox 13"/>
+          <p:cNvSpPr txBox="1"/>
+          <p:nvPr/>
+        </p:nvSpPr>
+        <p:spPr>
+          <a:xfrm>
+            <a:off x="6858000" y="5943600"/>
+            <a:ext cx="4754880" cy="548640"/>
+          </a:xfrm>
+          <a:prstGeom prst="rect">
+            <a:avLst/>
+          </a:prstGeom>
+          <a:noFill/>
+        </p:spPr>
+        <p:txBody>
+          <a:bodyPr wrap="square" anchor="t" lIns="45720" rIns="45720" tIns="27432" bIns="27432">
+            <a:spAutoFit/>
+          </a:bodyPr>
+          <a:lstStyle/>
+          <a:p>
+            <a:pPr algn="l">
+              <a:lnSpc>
+                <a:spcPct val="105000"/>
+              </a:lnSpc>
+            </a:pPr>
+            <a:r>
+              <a:rPr sz="1300" b="0">
+                <a:solidFill>
+                  <a:srgbClr val="587063"/>
+                </a:solidFill>
+                <a:latin typeface="Calibri"/>
+              </a:rPr>
+              <a:t>Example numbers, not a forecast. Run counts from the formulas in our code.</a:t>
+            </a:r>
+          </a:p>
+        </p:txBody>
+      </p:sp>
+      <p:sp>
+        <p:nvSpPr>
+          <p:cNvPr id="15" name="TextBox 14"/>
+          <p:cNvSpPr txBox="1"/>
+          <p:nvPr/>
+        </p:nvSpPr>
+        <p:spPr>
+          <a:xfrm>
+            <a:off x="640080" y="6400800"/>
+            <a:ext cx="5486400" cy="274320"/>
+          </a:xfrm>
+          <a:prstGeom prst="rect">
+            <a:avLst/>
+          </a:prstGeom>
+          <a:noFill/>
+        </p:spPr>
+        <p:txBody>
+          <a:bodyPr wrap="square" anchor="t" lIns="45720" rIns="45720" tIns="27432" bIns="27432">
+            <a:spAutoFit/>
+          </a:bodyPr>
+          <a:lstStyle/>
+          <a:p>
+            <a:pPr algn="l">
+              <a:lnSpc>
+                <a:spcPct val="105000"/>
+              </a:lnSpc>
+            </a:pPr>
+            <a:r>
+              <a:rPr sz="1200" b="0">
+                <a:solidFill>
+                  <a:srgbClr val="587063"/>
+                </a:solidFill>
+                <a:latin typeface="Calibri"/>
+              </a:rPr>
+              <a:t>Qanopy · Carbon credit verification</a:t>
+            </a:r>
+          </a:p>
+        </p:txBody>
+      </p:sp>
+      <p:sp>
+        <p:nvSpPr>
+          <p:cNvPr id="16" name="TextBox 15"/>
+          <p:cNvSpPr txBox="1"/>
+          <p:nvPr/>
+        </p:nvSpPr>
+        <p:spPr>
+          <a:xfrm>
+            <a:off x="10881360" y="6400800"/>
+            <a:ext cx="731520" cy="274320"/>
+          </a:xfrm>
+          <a:prstGeom prst="rect">
+            <a:avLst/>
+          </a:prstGeom>
+          <a:noFill/>
+        </p:spPr>
+        <p:txBody>
+          <a:bodyPr wrap="square" anchor="t" lIns="45720" rIns="45720" tIns="27432" bIns="27432">
+            <a:spAutoFit/>
+          </a:bodyPr>
+          <a:lstStyle/>
+          <a:p>
+            <a:pPr algn="r">
+              <a:lnSpc>
+                <a:spcPct val="105000"/>
+              </a:lnSpc>
+            </a:pPr>
+            <a:r>
+              <a:rPr sz="1200" b="0">
+                <a:solidFill>
+                  <a:srgbClr val="587063"/>
+                </a:solidFill>
+                <a:latin typeface="Calibri"/>
+              </a:rPr>
+              <a:t>7</a:t>
+            </a:r>
+          </a:p>
+        </p:txBody>
+      </p:sp>
+    </p:spTree>
+  </p:cSld>
+  <p:clrMapOvr>
+    <a:masterClrMapping/>
+  </p:clrMapOvr>
+</p:sld>
+</file>
+
+<file path=ppt/slides/slide8.xml><?xml version="1.0" encoding="utf-8"?>
 <p:sld xmlns:a="http://schemas.openxmlformats.org/drawingml/2006/main" xmlns:p="http://schemas.openxmlformats.org/presentationml/2006/main" xmlns:r="http://schemas.openxmlformats.org/officeDocument/2006/relationships">
   <p:cSld>
     <p:spTree>

--- a/docs/Qanopy_pitch.pptx
+++ b/docs/Qanopy_pitch.pptx
@@ -859,7 +859,7 @@
           <a:lstStyle/>
           <a:p>
             <a:r>
-              <a:t>Why does quantum matter later? Today we compute the average exactly, so we do not need it. It pays off when the check becomes a heavy computer simulation, like a model of where forest will be cut. Then every question is expensive, and the number of questions decides the cost. The more precise you want the answer, the more quantum saves: about 4 times fewer questions at 10% precision, about 430 times fewer at 0.1%.</a:t>
+              <a:t>So what is the real bottleneck? It is not computing. It is how sure we are. For ALGAR, the answer is 5,741 hectares, give or take about 3,100. That wide range comes from comparing against only 50 look-alike patches. More, better-matched patches would narrow it. Four times as many halves the uncertainty. A hundred times as many cuts it to a tenth. But choosing and measuring thousands of patches is far harder.</a:t>
             </a:r>
           </a:p>
         </p:txBody>
@@ -929,7 +929,7 @@
           <a:lstStyle/>
           <a:p>
             <a:r>
-              <a:t>Here is what that means. Take 1,000 projects, checked once a week, and say one simulation takes one second. For 1% precision, the normal method needs about 2 years of computing. The quantum method needs about 20 days. At 0.1% precision, it is 229 years against 196 days. The catch: chips must first make 2,400 times fewer mistakes, and each quantum run costs more. Until then, normal computers do the work.</a:t>
+              <a:t>Here is where quantum could help, in theory. First, choosing. Picking the best 50 of 200 patches has a number of possible choices with 48 digits. With thousands of patches it is far beyond checking. QAOA is a quantum method for searching such choices. Second, measuring. If each patch needs a heavy simulation, quantum amplitude estimation needs about 43 times fewer runs for one-percent precision. The catch: neither is proven to beat the best normal methods here, and chips need 2,400 times fewer mistakes first.</a:t>
             </a:r>
           </a:p>
         </p:txBody>
@@ -6660,7 +6660,7 @@
                 </a:solidFill>
                 <a:latin typeface="Calibri"/>
               </a:rPr>
-              <a:t>The more precise the check, the more quantum saves</a:t>
+              <a:t>The real bottleneck: how sure we can be</a:t>
             </a:r>
           </a:p>
         </p:txBody>
@@ -6711,7 +6711,7 @@
       </p:sp>
       <p:pic>
         <p:nvPicPr>
-          <p:cNvPr id="4" name="Picture 3" descr="chart_precision.png"/>
+          <p:cNvPr id="4" name="Picture 3" descr="chart_uncertainty.png"/>
           <p:cNvPicPr>
             <a:picLocks noChangeAspect="1"/>
           </p:cNvPicPr>
@@ -6786,7 +6786,7 @@
         <p:spPr>
           <a:xfrm>
             <a:off x="7040880" y="1783080"/>
-            <a:ext cx="1188720" cy="1234440"/>
+            <a:ext cx="1325880" cy="1234440"/>
           </a:xfrm>
           <a:prstGeom prst="rect">
             <a:avLst/>
@@ -6824,8 +6824,8 @@
         </p:nvSpPr>
         <p:spPr>
           <a:xfrm>
-            <a:off x="8229600" y="1783080"/>
-            <a:ext cx="3154680" cy="1234440"/>
+            <a:off x="8366760" y="1783080"/>
+            <a:ext cx="3017520" cy="1234440"/>
           </a:xfrm>
           <a:prstGeom prst="rect">
             <a:avLst/>
@@ -6850,7 +6850,7 @@
                 </a:solidFill>
                 <a:latin typeface="Calibri"/>
               </a:rPr>
-              <a:t>We compute the average exactly. No quantum needed.</a:t>
+              <a:t>ALGAR: 5,741 hectares saved, give or take 3,100. Only 50 look-alikes.</a:t>
             </a:r>
           </a:p>
         </p:txBody>
@@ -6908,7 +6908,7 @@
         <p:spPr>
           <a:xfrm>
             <a:off x="7040880" y="3200400"/>
-            <a:ext cx="1188720" cy="1234440"/>
+            <a:ext cx="1325880" cy="1234440"/>
           </a:xfrm>
           <a:prstGeom prst="rect">
             <a:avLst/>
@@ -6933,7 +6933,7 @@
                 </a:solidFill>
                 <a:latin typeface="Calibri"/>
               </a:rPr>
-              <a:t>Later</a:t>
+              <a:t>The fix</a:t>
             </a:r>
           </a:p>
         </p:txBody>
@@ -6946,8 +6946,8 @@
         </p:nvSpPr>
         <p:spPr>
           <a:xfrm>
-            <a:off x="8229600" y="3200400"/>
-            <a:ext cx="3154680" cy="1234440"/>
+            <a:off x="8366760" y="3200400"/>
+            <a:ext cx="3017520" cy="1234440"/>
           </a:xfrm>
           <a:prstGeom prst="rect">
             <a:avLst/>
@@ -6972,7 +6972,7 @@
                 </a:solidFill>
                 <a:latin typeface="Calibri"/>
               </a:rPr>
-              <a:t>If the check becomes a heavy simulation, every question is costly.</a:t>
+              <a:t>More, better look-alikes. 4x as many halves the uncertainty.</a:t>
             </a:r>
           </a:p>
         </p:txBody>
@@ -7030,7 +7030,7 @@
         <p:spPr>
           <a:xfrm>
             <a:off x="7040880" y="4617720"/>
-            <a:ext cx="1188720" cy="1234440"/>
+            <a:ext cx="1325880" cy="1234440"/>
           </a:xfrm>
           <a:prstGeom prst="rect">
             <a:avLst/>
@@ -7055,7 +7055,7 @@
                 </a:solidFill>
                 <a:latin typeface="Calibri"/>
               </a:rPr>
-              <a:t>The gap</a:t>
+              <a:t>The catch</a:t>
             </a:r>
           </a:p>
         </p:txBody>
@@ -7068,8 +7068,8 @@
         </p:nvSpPr>
         <p:spPr>
           <a:xfrm>
-            <a:off x="8229600" y="4617720"/>
-            <a:ext cx="3154680" cy="1234440"/>
+            <a:off x="8366760" y="4617720"/>
+            <a:ext cx="3017520" cy="1234440"/>
           </a:xfrm>
           <a:prstGeom prst="rect">
             <a:avLst/>
@@ -7094,7 +7094,7 @@
                 </a:solidFill>
                 <a:latin typeface="Calibri"/>
               </a:rPr>
-              <a:t>Quantum saves 4x at 10% precision and 430x at 0.1%.</a:t>
+              <a:t>Choosing and measuring thousands of them is far harder.</a:t>
             </a:r>
           </a:p>
         </p:txBody>
@@ -7127,13 +7127,13 @@
               </a:lnSpc>
             </a:pPr>
             <a:r>
-              <a:rPr sz="1300" b="0">
+              <a:rPr sz="1200" b="0">
                 <a:solidFill>
                   <a:srgbClr val="587063"/>
                 </a:solidFill>
                 <a:latin typeface="Calibri"/>
               </a:rPr>
-              <a:t>Number of questions for this project, from the formulas in our code.</a:t>
+              <a:t>Assumes extra look-alikes are as good as the first 50. Uncertainty shrinks with the square root of the count.</a:t>
             </a:r>
           </a:p>
         </p:txBody>
@@ -7268,7 +7268,7 @@
                 </a:solidFill>
                 <a:latin typeface="Calibri"/>
               </a:rPr>
-              <a:t>What it saves: 1,000 projects, checked every week</a:t>
+              <a:t>Where quantum could help fix it</a:t>
             </a:r>
           </a:p>
         </p:txBody>
@@ -7319,7 +7319,7 @@
       </p:sp>
       <p:pic>
         <p:nvPicPr>
-          <p:cNvPr id="4" name="Picture 3" descr="chart_days.png"/>
+          <p:cNvPr id="4" name="Picture 3" descr="chart_choices.png"/>
           <p:cNvPicPr>
             <a:picLocks noChangeAspect="1"/>
           </p:cNvPicPr>
@@ -7394,7 +7394,7 @@
         <p:spPr>
           <a:xfrm>
             <a:off x="7040880" y="1783080"/>
-            <a:ext cx="1325880" cy="1234440"/>
+            <a:ext cx="1417320" cy="1234440"/>
           </a:xfrm>
           <a:prstGeom prst="rect">
             <a:avLst/>
@@ -7419,7 +7419,7 @@
                 </a:solidFill>
                 <a:latin typeface="Calibri"/>
               </a:rPr>
-              <a:t>Example</a:t>
+              <a:t>Choosing</a:t>
             </a:r>
           </a:p>
         </p:txBody>
@@ -7432,8 +7432,8 @@
         </p:nvSpPr>
         <p:spPr>
           <a:xfrm>
-            <a:off x="8366760" y="1783080"/>
-            <a:ext cx="3017520" cy="1234440"/>
+            <a:off x="8458200" y="1783080"/>
+            <a:ext cx="2926080" cy="1234440"/>
           </a:xfrm>
           <a:prstGeom prst="rect">
             <a:avLst/>
@@ -7458,7 +7458,7 @@
                 </a:solidFill>
                 <a:latin typeface="Calibri"/>
               </a:rPr>
-              <a:t>1,000 projects, one estimate each, one simulation takes 1 second.</a:t>
+              <a:t>QAOA searches choices. Best 50 of 200 parcels: 48 digits of options.</a:t>
             </a:r>
           </a:p>
         </p:txBody>
@@ -7516,7 +7516,7 @@
         <p:spPr>
           <a:xfrm>
             <a:off x="7040880" y="3200400"/>
-            <a:ext cx="1325880" cy="1234440"/>
+            <a:ext cx="1417320" cy="1234440"/>
           </a:xfrm>
           <a:prstGeom prst="rect">
             <a:avLst/>
@@ -7541,7 +7541,7 @@
                 </a:solidFill>
                 <a:latin typeface="Calibri"/>
               </a:rPr>
-              <a:t>Payoff</a:t>
+              <a:t>Measuring</a:t>
             </a:r>
           </a:p>
         </p:txBody>
@@ -7554,8 +7554,8 @@
         </p:nvSpPr>
         <p:spPr>
           <a:xfrm>
-            <a:off x="8366760" y="3200400"/>
-            <a:ext cx="3017520" cy="1234440"/>
+            <a:off x="8458200" y="3200400"/>
+            <a:ext cx="2926080" cy="1234440"/>
           </a:xfrm>
           <a:prstGeom prst="rect">
             <a:avLst/>
@@ -7580,7 +7580,7 @@
                 </a:solidFill>
                 <a:latin typeface="Calibri"/>
               </a:rPr>
-              <a:t>1% precision: 2.3 years of computing becomes 20 days.</a:t>
+              <a:t>QAE needs about 43x fewer runs for 1% precision.</a:t>
             </a:r>
           </a:p>
         </p:txBody>
@@ -7638,7 +7638,7 @@
         <p:spPr>
           <a:xfrm>
             <a:off x="7040880" y="4617720"/>
-            <a:ext cx="1325880" cy="1234440"/>
+            <a:ext cx="1417320" cy="1234440"/>
           </a:xfrm>
           <a:prstGeom prst="rect">
             <a:avLst/>
@@ -7663,7 +7663,7 @@
                 </a:solidFill>
                 <a:latin typeface="Calibri"/>
               </a:rPr>
-              <a:t>Catch</a:t>
+              <a:t>The catch</a:t>
             </a:r>
           </a:p>
         </p:txBody>
@@ -7676,8 +7676,8 @@
         </p:nvSpPr>
         <p:spPr>
           <a:xfrm>
-            <a:off x="8366760" y="4617720"/>
-            <a:ext cx="3017520" cy="1234440"/>
+            <a:off x="8458200" y="4617720"/>
+            <a:ext cx="2926080" cy="1234440"/>
           </a:xfrm>
           <a:prstGeom prst="rect">
             <a:avLst/>
@@ -7702,7 +7702,7 @@
                 </a:solidFill>
                 <a:latin typeface="Calibri"/>
               </a:rPr>
-              <a:t>Chips need 2,400 times fewer mistakes. Quantum runs cost more.</a:t>
+              <a:t>Not proven better than normal methods. Chips need 2,400x fewer mistakes.</a:t>
             </a:r>
           </a:p>
         </p:txBody>
@@ -7735,13 +7735,13 @@
               </a:lnSpc>
             </a:pPr>
             <a:r>
-              <a:rPr sz="1300" b="0">
+              <a:rPr sz="1200" b="0">
                 <a:solidFill>
                   <a:srgbClr val="587063"/>
                 </a:solidFill>
                 <a:latin typeface="Calibri"/>
               </a:rPr>
-              <a:t>Example numbers, not a forecast. Run counts from the formulas in our code.</a:t>
+              <a:t>Chart: ways to pick 50 parcels from a pool. Both speed-ups are theory for our problem.</a:t>
             </a:r>
           </a:p>
         </p:txBody>

--- a/docs/Qanopy_pitch.pptx
+++ b/docs/Qanopy_pitch.pptx
@@ -13,6 +13,7 @@
     <p:sldId id="261" r:id="rId13"/>
     <p:sldId id="262" r:id="rId14"/>
     <p:sldId id="263" r:id="rId15"/>
+    <p:sldId id="264" r:id="rId16"/>
   </p:sldIdLst>
   <p:sldSz cx="12191695" cy="6858000" type="screen4x3"/>
   <p:notesSz cx="6858000" cy="9144000"/>
@@ -1000,6 +1001,76 @@
           <a:p>
             <a:r>
               <a:t>Credit buyers, registries, insurers and banks need to trust credits. They would pay a subscription per project. We have a working prototype on four projects, with NFTs on a test blockchain. Next, we replace our guess of how much carbon a forest holds with project data.</a:t>
+            </a:r>
+          </a:p>
+        </p:txBody>
+      </p:sp>
+      <p:sp>
+        <p:nvSpPr>
+          <p:cNvPr id="4" name="Slide Number Placeholder 3"/>
+          <p:cNvSpPr>
+            <a:spLocks noGrp="1"/>
+          </p:cNvSpPr>
+          <p:nvPr>
+            <p:ph type="sldNum" idx="5" sz="quarter"/>
+          </p:nvPr>
+        </p:nvSpPr>
+        <p:spPr/>
+      </p:sp>
+    </p:spTree>
+  </p:cSld>
+  <p:clrMapOvr>
+    <a:masterClrMapping/>
+  </p:clrMapOvr>
+</p:notes>
+</file>
+
+<file path=ppt/notesSlides/notesSlide9.xml><?xml version="1.0" encoding="utf-8"?>
+<p:notes xmlns:a="http://schemas.openxmlformats.org/drawingml/2006/main" xmlns:p="http://schemas.openxmlformats.org/presentationml/2006/main" xmlns:r="http://schemas.openxmlformats.org/officeDocument/2006/relationships">
+  <p:cSld>
+    <p:spTree>
+      <p:nvGrpSpPr>
+        <p:cNvPr id="1" name=""/>
+        <p:cNvGrpSpPr/>
+        <p:nvPr/>
+      </p:nvGrpSpPr>
+      <p:grpSpPr>
+        <a:xfrm>
+          <a:off x="0" y="0"/>
+          <a:ext cx="0" cy="0"/>
+          <a:chOff x="0" y="0"/>
+          <a:chExt cx="0" cy="0"/>
+        </a:xfrm>
+      </p:grpSpPr>
+      <p:sp>
+        <p:nvSpPr>
+          <p:cNvPr id="2" name="Slide Image Placeholder 1"/>
+          <p:cNvSpPr>
+            <a:spLocks noGrp="1"/>
+          </p:cNvSpPr>
+          <p:nvPr>
+            <p:ph type="sldImg" idx="2"/>
+          </p:nvPr>
+        </p:nvSpPr>
+        <p:spPr/>
+      </p:sp>
+      <p:sp>
+        <p:nvSpPr>
+          <p:cNvPr id="3" name="Notes Placeholder 2"/>
+          <p:cNvSpPr>
+            <a:spLocks noGrp="1"/>
+          </p:cNvSpPr>
+          <p:nvPr>
+            <p:ph type="body" idx="3" sz="quarter"/>
+          </p:nvPr>
+        </p:nvSpPr>
+        <p:spPr/>
+        <p:txBody>
+          <a:bodyPr/>
+          <a:lstStyle/>
+          <a:p>
+            <a:r>
+              <a:t>[BACKUP: not part of the 3-minute pitch. Use it if a judge asks what we tested.] We ran two small experiments on IBM's quantum computer. First, we asked it to pick the best 3 of 8 forest patches. It found the best answer about 7 times in 10 usable answers, while guessing finds it under 2 in 100. But a laptop solves that instantly, and it was a lucky example. Second, we asked it to estimate an average with fewer questions. On a small one-qubit test it beat the normal method at 5 of 8 sizes, up to 16 times. At the biggest size, the chip's mistakes erased the advantage, and our real-size version turned into coin flips. So quantum works on a real chip at tiny scale. It does not help our project today.</a:t>
             </a:r>
           </a:p>
         </p:txBody>
@@ -8570,6 +8641,657 @@
                 <a:latin typeface="Calibri"/>
               </a:rPr>
               <a:t>Built with: Google Earth Engine, radar satellite data, Qiskit, IBM Quantum, Base Sepolia, IPFS</a:t>
+            </a:r>
+          </a:p>
+        </p:txBody>
+      </p:sp>
+    </p:spTree>
+  </p:cSld>
+  <p:clrMapOvr>
+    <a:masterClrMapping/>
+  </p:clrMapOvr>
+</p:sld>
+</file>
+
+<file path=ppt/slides/slide9.xml><?xml version="1.0" encoding="utf-8"?>
+<p:sld xmlns:a="http://schemas.openxmlformats.org/drawingml/2006/main" xmlns:p="http://schemas.openxmlformats.org/presentationml/2006/main" xmlns:r="http://schemas.openxmlformats.org/officeDocument/2006/relationships">
+  <p:cSld>
+    <p:spTree>
+      <p:nvGrpSpPr>
+        <p:cNvPr id="1" name=""/>
+        <p:cNvGrpSpPr/>
+        <p:nvPr/>
+      </p:nvGrpSpPr>
+      <p:grpSpPr/>
+      <p:sp>
+        <p:nvSpPr>
+          <p:cNvPr id="2" name="TextBox 1"/>
+          <p:cNvSpPr txBox="1"/>
+          <p:nvPr/>
+        </p:nvSpPr>
+        <p:spPr>
+          <a:xfrm>
+            <a:off x="640080" y="320040"/>
+            <a:ext cx="10881360" cy="1188720"/>
+          </a:xfrm>
+          <a:prstGeom prst="rect">
+            <a:avLst/>
+          </a:prstGeom>
+          <a:noFill/>
+        </p:spPr>
+        <p:txBody>
+          <a:bodyPr wrap="square" anchor="t" lIns="45720" rIns="45720" tIns="27432" bIns="27432">
+            <a:spAutoFit/>
+          </a:bodyPr>
+          <a:lstStyle/>
+          <a:p>
+            <a:pPr algn="l">
+              <a:lnSpc>
+                <a:spcPct val="95000"/>
+              </a:lnSpc>
+            </a:pPr>
+            <a:r>
+              <a:rPr sz="3200" b="1">
+                <a:solidFill>
+                  <a:srgbClr val="0C3D2B"/>
+                </a:solidFill>
+                <a:latin typeface="Calibri"/>
+              </a:rPr>
+              <a:t>Backup: what we tested on IBM's quantum computer</a:t>
+            </a:r>
+          </a:p>
+        </p:txBody>
+      </p:sp>
+      <p:sp>
+        <p:nvSpPr>
+          <p:cNvPr id="3" name="Rectangle 2"/>
+          <p:cNvSpPr/>
+          <p:nvPr/>
+        </p:nvSpPr>
+        <p:spPr>
+          <a:xfrm>
+            <a:off x="685800" y="1188719"/>
+            <a:ext cx="1097280" cy="64008"/>
+          </a:xfrm>
+          <a:prstGeom prst="rect">
+            <a:avLst/>
+          </a:prstGeom>
+          <a:solidFill>
+            <a:srgbClr val="15935F"/>
+          </a:solidFill>
+          <a:ln>
+            <a:noFill/>
+          </a:ln>
+          <a:effectLst/>
+        </p:spPr>
+        <p:style>
+          <a:lnRef idx="1">
+            <a:schemeClr val="accent1"/>
+          </a:lnRef>
+          <a:fillRef idx="3">
+            <a:schemeClr val="accent1"/>
+          </a:fillRef>
+          <a:effectRef idx="2">
+            <a:schemeClr val="accent1"/>
+          </a:effectRef>
+          <a:fontRef idx="minor">
+            <a:schemeClr val="lt1"/>
+          </a:fontRef>
+        </p:style>
+        <p:txBody>
+          <a:bodyPr rtlCol="0" anchor="ctr"/>
+          <a:lstStyle/>
+          <a:p>
+            <a:pPr algn="ctr"/>
+          </a:p>
+        </p:txBody>
+      </p:sp>
+      <p:sp>
+        <p:nvSpPr>
+          <p:cNvPr id="4" name="Rectangle 3"/>
+          <p:cNvSpPr/>
+          <p:nvPr/>
+        </p:nvSpPr>
+        <p:spPr>
+          <a:xfrm>
+            <a:off x="685800" y="1783080"/>
+            <a:ext cx="5349240" cy="3611880"/>
+          </a:xfrm>
+          <a:prstGeom prst="rect">
+            <a:avLst/>
+          </a:prstGeom>
+          <a:solidFill>
+            <a:srgbClr val="E6F4EC"/>
+          </a:solidFill>
+          <a:ln>
+            <a:noFill/>
+          </a:ln>
+          <a:effectLst/>
+        </p:spPr>
+        <p:style>
+          <a:lnRef idx="1">
+            <a:schemeClr val="accent1"/>
+          </a:lnRef>
+          <a:fillRef idx="3">
+            <a:schemeClr val="accent1"/>
+          </a:fillRef>
+          <a:effectRef idx="2">
+            <a:schemeClr val="accent1"/>
+          </a:effectRef>
+          <a:fontRef idx="minor">
+            <a:schemeClr val="lt1"/>
+          </a:fontRef>
+        </p:style>
+        <p:txBody>
+          <a:bodyPr rtlCol="0" anchor="ctr"/>
+          <a:lstStyle/>
+          <a:p>
+            <a:pPr algn="ctr"/>
+          </a:p>
+        </p:txBody>
+      </p:sp>
+      <p:sp>
+        <p:nvSpPr>
+          <p:cNvPr id="5" name="TextBox 4"/>
+          <p:cNvSpPr txBox="1"/>
+          <p:nvPr/>
+        </p:nvSpPr>
+        <p:spPr>
+          <a:xfrm>
+            <a:off x="868680" y="1847088"/>
+            <a:ext cx="4937760" cy="502920"/>
+          </a:xfrm>
+          <a:prstGeom prst="rect">
+            <a:avLst/>
+          </a:prstGeom>
+          <a:noFill/>
+        </p:spPr>
+        <p:txBody>
+          <a:bodyPr wrap="square" anchor="t" lIns="45720" rIns="45720" tIns="27432" bIns="27432">
+            <a:spAutoFit/>
+          </a:bodyPr>
+          <a:lstStyle/>
+          <a:p>
+            <a:pPr algn="l">
+              <a:lnSpc>
+                <a:spcPct val="105000"/>
+              </a:lnSpc>
+            </a:pPr>
+            <a:r>
+              <a:rPr sz="2400" b="1">
+                <a:solidFill>
+                  <a:srgbClr val="0C3D2B"/>
+                </a:solidFill>
+                <a:latin typeface="Calibri"/>
+              </a:rPr>
+              <a:t>1. Picking patches</a:t>
+            </a:r>
+          </a:p>
+        </p:txBody>
+      </p:sp>
+      <p:sp>
+        <p:nvSpPr>
+          <p:cNvPr id="6" name="TextBox 5"/>
+          <p:cNvSpPr txBox="1"/>
+          <p:nvPr/>
+        </p:nvSpPr>
+        <p:spPr>
+          <a:xfrm>
+            <a:off x="868680" y="2423160"/>
+            <a:ext cx="4983480" cy="2926080"/>
+          </a:xfrm>
+          <a:prstGeom prst="rect">
+            <a:avLst/>
+          </a:prstGeom>
+          <a:noFill/>
+        </p:spPr>
+        <p:txBody>
+          <a:bodyPr wrap="square" anchor="t" lIns="45720" rIns="45720" tIns="27432" bIns="27432">
+            <a:spAutoFit/>
+          </a:bodyPr>
+          <a:lstStyle/>
+          <a:p>
+            <a:pPr algn="l">
+              <a:lnSpc>
+                <a:spcPct val="110000"/>
+              </a:lnSpc>
+            </a:pPr>
+            <a:r>
+              <a:rPr sz="1700" b="1">
+                <a:solidFill>
+                  <a:srgbClr val="0C3D2B"/>
+                </a:solidFill>
+                <a:latin typeface="Calibri"/>
+              </a:rPr>
+              <a:t>Question: </a:t>
+            </a:r>
+            <a:r>
+              <a:rPr sz="1700" b="0">
+                <a:solidFill>
+                  <a:srgbClr val="0F2419"/>
+                </a:solidFill>
+                <a:latin typeface="Calibri"/>
+              </a:rPr>
+              <a:t>Which 3 of 8 forest patches match the project best?</a:t>
+            </a:r>
+          </a:p>
+          <a:p>
+            <a:pPr algn="l">
+              <a:lnSpc>
+                <a:spcPct val="110000"/>
+              </a:lnSpc>
+            </a:pPr>
+            <a:r>
+              <a:rPr sz="1700" b="1">
+                <a:solidFill>
+                  <a:srgbClr val="0C3D2B"/>
+                </a:solidFill>
+                <a:latin typeface="Calibri"/>
+              </a:rPr>
+              <a:t>Result: </a:t>
+            </a:r>
+            <a:r>
+              <a:rPr sz="1700" b="0">
+                <a:solidFill>
+                  <a:srgbClr val="0F2419"/>
+                </a:solidFill>
+                <a:latin typeface="Calibri"/>
+              </a:rPr>
+              <a:t>Best answer found about 7 times in 10 usable answers. Guessing: under 2 in 100.</a:t>
+            </a:r>
+          </a:p>
+          <a:p>
+            <a:pPr algn="l">
+              <a:lnSpc>
+                <a:spcPct val="110000"/>
+              </a:lnSpc>
+            </a:pPr>
+            <a:r>
+              <a:rPr sz="1700" b="1">
+                <a:solidFill>
+                  <a:srgbClr val="0C3D2B"/>
+                </a:solidFill>
+                <a:latin typeface="Calibri"/>
+              </a:rPr>
+              <a:t>Catch: </a:t>
+            </a:r>
+            <a:r>
+              <a:rPr sz="1700" b="0">
+                <a:solidFill>
+                  <a:srgbClr val="0F2419"/>
+                </a:solidFill>
+                <a:latin typeface="Calibri"/>
+              </a:rPr>
+              <a:t>A laptop solves it instantly. It was a lucky example. The real job, 50 of 200, is too big for today's chips.</a:t>
+            </a:r>
+          </a:p>
+        </p:txBody>
+      </p:sp>
+      <p:sp>
+        <p:nvSpPr>
+          <p:cNvPr id="7" name="Rectangle 6"/>
+          <p:cNvSpPr/>
+          <p:nvPr/>
+        </p:nvSpPr>
+        <p:spPr>
+          <a:xfrm>
+            <a:off x="6172200" y="1783080"/>
+            <a:ext cx="5349240" cy="3611880"/>
+          </a:xfrm>
+          <a:prstGeom prst="rect">
+            <a:avLst/>
+          </a:prstGeom>
+          <a:solidFill>
+            <a:srgbClr val="E6F4EC"/>
+          </a:solidFill>
+          <a:ln>
+            <a:noFill/>
+          </a:ln>
+          <a:effectLst/>
+        </p:spPr>
+        <p:style>
+          <a:lnRef idx="1">
+            <a:schemeClr val="accent1"/>
+          </a:lnRef>
+          <a:fillRef idx="3">
+            <a:schemeClr val="accent1"/>
+          </a:fillRef>
+          <a:effectRef idx="2">
+            <a:schemeClr val="accent1"/>
+          </a:effectRef>
+          <a:fontRef idx="minor">
+            <a:schemeClr val="lt1"/>
+          </a:fontRef>
+        </p:style>
+        <p:txBody>
+          <a:bodyPr rtlCol="0" anchor="ctr"/>
+          <a:lstStyle/>
+          <a:p>
+            <a:pPr algn="ctr"/>
+          </a:p>
+        </p:txBody>
+      </p:sp>
+      <p:sp>
+        <p:nvSpPr>
+          <p:cNvPr id="8" name="TextBox 7"/>
+          <p:cNvSpPr txBox="1"/>
+          <p:nvPr/>
+        </p:nvSpPr>
+        <p:spPr>
+          <a:xfrm>
+            <a:off x="6355080" y="1847088"/>
+            <a:ext cx="4937760" cy="502920"/>
+          </a:xfrm>
+          <a:prstGeom prst="rect">
+            <a:avLst/>
+          </a:prstGeom>
+          <a:noFill/>
+        </p:spPr>
+        <p:txBody>
+          <a:bodyPr wrap="square" anchor="t" lIns="45720" rIns="45720" tIns="27432" bIns="27432">
+            <a:spAutoFit/>
+          </a:bodyPr>
+          <a:lstStyle/>
+          <a:p>
+            <a:pPr algn="l">
+              <a:lnSpc>
+                <a:spcPct val="105000"/>
+              </a:lnSpc>
+            </a:pPr>
+            <a:r>
+              <a:rPr sz="2400" b="1">
+                <a:solidFill>
+                  <a:srgbClr val="0C3D2B"/>
+                </a:solidFill>
+                <a:latin typeface="Calibri"/>
+              </a:rPr>
+              <a:t>2. Estimating an average</a:t>
+            </a:r>
+          </a:p>
+        </p:txBody>
+      </p:sp>
+      <p:sp>
+        <p:nvSpPr>
+          <p:cNvPr id="9" name="TextBox 8"/>
+          <p:cNvSpPr txBox="1"/>
+          <p:nvPr/>
+        </p:nvSpPr>
+        <p:spPr>
+          <a:xfrm>
+            <a:off x="6355080" y="2423160"/>
+            <a:ext cx="4983480" cy="2926080"/>
+          </a:xfrm>
+          <a:prstGeom prst="rect">
+            <a:avLst/>
+          </a:prstGeom>
+          <a:noFill/>
+        </p:spPr>
+        <p:txBody>
+          <a:bodyPr wrap="square" anchor="t" lIns="45720" rIns="45720" tIns="27432" bIns="27432">
+            <a:spAutoFit/>
+          </a:bodyPr>
+          <a:lstStyle/>
+          <a:p>
+            <a:pPr algn="l">
+              <a:lnSpc>
+                <a:spcPct val="110000"/>
+              </a:lnSpc>
+            </a:pPr>
+            <a:r>
+              <a:rPr sz="1700" b="1">
+                <a:solidFill>
+                  <a:srgbClr val="0C3D2B"/>
+                </a:solidFill>
+                <a:latin typeface="Calibri"/>
+              </a:rPr>
+              <a:t>Question: </a:t>
+            </a:r>
+            <a:r>
+              <a:rPr sz="1700" b="0">
+                <a:solidFill>
+                  <a:srgbClr val="0F2419"/>
+                </a:solidFill>
+                <a:latin typeface="Calibri"/>
+              </a:rPr>
+              <a:t>Can a quantum computer estimate an average with fewer questions than a poll?</a:t>
+            </a:r>
+          </a:p>
+          <a:p>
+            <a:pPr algn="l">
+              <a:lnSpc>
+                <a:spcPct val="110000"/>
+              </a:lnSpc>
+            </a:pPr>
+            <a:r>
+              <a:rPr sz="1700" b="1">
+                <a:solidFill>
+                  <a:srgbClr val="0C3D2B"/>
+                </a:solidFill>
+                <a:latin typeface="Calibri"/>
+              </a:rPr>
+              <a:t>Result: </a:t>
+            </a:r>
+            <a:r>
+              <a:rPr sz="1700" b="0">
+                <a:solidFill>
+                  <a:srgbClr val="0F2419"/>
+                </a:solidFill>
+                <a:latin typeface="Calibri"/>
+              </a:rPr>
+              <a:t>One-qubit test: more accurate than polling at 5 of 8 sizes, up to 16x.</a:t>
+            </a:r>
+          </a:p>
+          <a:p>
+            <a:pPr algn="l">
+              <a:lnSpc>
+                <a:spcPct val="110000"/>
+              </a:lnSpc>
+            </a:pPr>
+            <a:r>
+              <a:rPr sz="1700" b="1">
+                <a:solidFill>
+                  <a:srgbClr val="0C3D2B"/>
+                </a:solidFill>
+                <a:latin typeface="Calibri"/>
+              </a:rPr>
+              <a:t>Catch: </a:t>
+            </a:r>
+            <a:r>
+              <a:rPr sz="1700" b="0">
+                <a:solidFill>
+                  <a:srgbClr val="0F2419"/>
+                </a:solidFill>
+                <a:latin typeface="Calibri"/>
+              </a:rPr>
+              <a:t>At the biggest size, mistakes erased the edge. Real size (50 patches): coin flips. The small test already knows the answer.</a:t>
+            </a:r>
+          </a:p>
+        </p:txBody>
+      </p:sp>
+      <p:sp>
+        <p:nvSpPr>
+          <p:cNvPr id="10" name="Rectangle 9"/>
+          <p:cNvSpPr/>
+          <p:nvPr/>
+        </p:nvSpPr>
+        <p:spPr>
+          <a:xfrm>
+            <a:off x="685800" y="5577840"/>
+            <a:ext cx="10835640" cy="777240"/>
+          </a:xfrm>
+          <a:prstGeom prst="rect">
+            <a:avLst/>
+          </a:prstGeom>
+          <a:solidFill>
+            <a:srgbClr val="0C3D2B"/>
+          </a:solidFill>
+          <a:ln>
+            <a:noFill/>
+          </a:ln>
+          <a:effectLst/>
+        </p:spPr>
+        <p:style>
+          <a:lnRef idx="1">
+            <a:schemeClr val="accent1"/>
+          </a:lnRef>
+          <a:fillRef idx="3">
+            <a:schemeClr val="accent1"/>
+          </a:fillRef>
+          <a:effectRef idx="2">
+            <a:schemeClr val="accent1"/>
+          </a:effectRef>
+          <a:fontRef idx="minor">
+            <a:schemeClr val="lt1"/>
+          </a:fontRef>
+        </p:style>
+        <p:txBody>
+          <a:bodyPr rtlCol="0" anchor="ctr"/>
+          <a:lstStyle/>
+          <a:p>
+            <a:pPr algn="ctr"/>
+          </a:p>
+        </p:txBody>
+      </p:sp>
+      <p:sp>
+        <p:nvSpPr>
+          <p:cNvPr id="11" name="TextBox 10"/>
+          <p:cNvSpPr txBox="1"/>
+          <p:nvPr/>
+        </p:nvSpPr>
+        <p:spPr>
+          <a:xfrm>
+            <a:off x="868680" y="5577840"/>
+            <a:ext cx="10469880" cy="777240"/>
+          </a:xfrm>
+          <a:prstGeom prst="rect">
+            <a:avLst/>
+          </a:prstGeom>
+          <a:noFill/>
+        </p:spPr>
+        <p:txBody>
+          <a:bodyPr wrap="square" anchor="ctr" lIns="45720" rIns="45720" tIns="27432" bIns="27432">
+            <a:spAutoFit/>
+          </a:bodyPr>
+          <a:lstStyle/>
+          <a:p>
+            <a:pPr algn="l">
+              <a:lnSpc>
+                <a:spcPct val="105000"/>
+              </a:lnSpc>
+            </a:pPr>
+            <a:r>
+              <a:rPr sz="1800" b="1">
+                <a:solidFill>
+                  <a:srgbClr val="4ADE9B"/>
+                </a:solidFill>
+                <a:latin typeface="Calibri"/>
+              </a:rPr>
+              <a:t>Shown: </a:t>
+            </a:r>
+            <a:r>
+              <a:rPr sz="1800" b="0">
+                <a:solidFill>
+                  <a:srgbClr val="FFFFFF"/>
+                </a:solidFill>
+                <a:latin typeface="Calibri"/>
+              </a:rPr>
+              <a:t>it works on a real chip at tiny scale; mistakes ruin it as it grows.  </a:t>
+            </a:r>
+            <a:r>
+              <a:rPr sz="1800" b="1">
+                <a:solidFill>
+                  <a:srgbClr val="4ADE9B"/>
+                </a:solidFill>
+                <a:latin typeface="Calibri"/>
+              </a:rPr>
+              <a:t>Not shown: </a:t>
+            </a:r>
+            <a:r>
+              <a:rPr sz="1800" b="0">
+                <a:solidFill>
+                  <a:srgbClr val="FFFFFF"/>
+                </a:solidFill>
+                <a:latin typeface="Calibri"/>
+              </a:rPr>
+              <a:t>that it helps our project today.</a:t>
+            </a:r>
+          </a:p>
+        </p:txBody>
+      </p:sp>
+      <p:sp>
+        <p:nvSpPr>
+          <p:cNvPr id="12" name="TextBox 11"/>
+          <p:cNvSpPr txBox="1"/>
+          <p:nvPr/>
+        </p:nvSpPr>
+        <p:spPr>
+          <a:xfrm>
+            <a:off x="640080" y="6400800"/>
+            <a:ext cx="5486400" cy="274320"/>
+          </a:xfrm>
+          <a:prstGeom prst="rect">
+            <a:avLst/>
+          </a:prstGeom>
+          <a:noFill/>
+        </p:spPr>
+        <p:txBody>
+          <a:bodyPr wrap="square" anchor="t" lIns="45720" rIns="45720" tIns="27432" bIns="27432">
+            <a:spAutoFit/>
+          </a:bodyPr>
+          <a:lstStyle/>
+          <a:p>
+            <a:pPr algn="l">
+              <a:lnSpc>
+                <a:spcPct val="105000"/>
+              </a:lnSpc>
+            </a:pPr>
+            <a:r>
+              <a:rPr sz="1200" b="0">
+                <a:solidFill>
+                  <a:srgbClr val="587063"/>
+                </a:solidFill>
+                <a:latin typeface="Calibri"/>
+              </a:rPr>
+              <a:t>Qanopy · Carbon credit verification</a:t>
+            </a:r>
+          </a:p>
+        </p:txBody>
+      </p:sp>
+      <p:sp>
+        <p:nvSpPr>
+          <p:cNvPr id="13" name="TextBox 12"/>
+          <p:cNvSpPr txBox="1"/>
+          <p:nvPr/>
+        </p:nvSpPr>
+        <p:spPr>
+          <a:xfrm>
+            <a:off x="10881360" y="6400800"/>
+            <a:ext cx="731520" cy="274320"/>
+          </a:xfrm>
+          <a:prstGeom prst="rect">
+            <a:avLst/>
+          </a:prstGeom>
+          <a:noFill/>
+        </p:spPr>
+        <p:txBody>
+          <a:bodyPr wrap="square" anchor="t" lIns="45720" rIns="45720" tIns="27432" bIns="27432">
+            <a:spAutoFit/>
+          </a:bodyPr>
+          <a:lstStyle/>
+          <a:p>
+            <a:pPr algn="r">
+              <a:lnSpc>
+                <a:spcPct val="105000"/>
+              </a:lnSpc>
+            </a:pPr>
+            <a:r>
+              <a:rPr sz="1200" b="0">
+                <a:solidFill>
+                  <a:srgbClr val="587063"/>
+                </a:solidFill>
+                <a:latin typeface="Calibri"/>
+              </a:rPr>
+              <a:t>9</a:t>
             </a:r>
           </a:p>
         </p:txBody>
